--- a/professional_background_nicolas_gaudin.pdf.pptx
+++ b/professional_background_nicolas_gaudin.pdf.pptx
@@ -5,7 +5,7 @@
     <p:sldMasterId id="2147483648" r:id="rId1"/>
   </p:sldMasterIdLst>
   <p:notesMasterIdLst>
-    <p:notesMasterId r:id="rId14"/>
+    <p:notesMasterId r:id="rId15"/>
   </p:notesMasterIdLst>
   <p:sldIdLst>
     <p:sldId id="256" r:id="rId2"/>
@@ -18,8 +18,9 @@
     <p:sldId id="281" r:id="rId9"/>
     <p:sldId id="282" r:id="rId10"/>
     <p:sldId id="283" r:id="rId11"/>
-    <p:sldId id="258" r:id="rId12"/>
-    <p:sldId id="259" r:id="rId13"/>
+    <p:sldId id="284" r:id="rId12"/>
+    <p:sldId id="258" r:id="rId13"/>
+    <p:sldId id="259" r:id="rId14"/>
   </p:sldIdLst>
   <p:sldSz cx="9144000" cy="5143500" type="screen16x9"/>
   <p:notesSz cx="5143500" cy="9144000"/>
@@ -1045,7 +1046,7 @@
           <a:p>
             <a:fld id="{F7021451-1387-4CA6-816F-3879F97B5CBC}" type="slidenum">
               <a:rPr lang="en-US"/>
-              <a:t>11</a:t>
+              <a:t>12</a:t>
             </a:fld>
             <a:endParaRPr lang="en-US"/>
           </a:p>
@@ -1129,7 +1130,7 @@
           <a:p>
             <a:fld id="{F7021451-1387-4CA6-816F-3879F97B5CBC}" type="slidenum">
               <a:rPr lang="en-US"/>
-              <a:t>12</a:t>
+              <a:t>13</a:t>
             </a:fld>
             <a:endParaRPr lang="en-US"/>
           </a:p>
@@ -2106,6 +2107,5302 @@
           </a:p>
         </p:txBody>
       </p:sp>
+      <p:sp>
+        <p:nvSpPr>
+          <p:cNvPr id="2" name="Shape 6">
+            <a:extLst>
+              <a:ext uri="{FF2B5EF4-FFF2-40B4-BE49-F238E27FC236}">
+                <a16:creationId xmlns:a16="http://schemas.microsoft.com/office/drawing/2014/main" id="{79615CF2-832B-A6C0-DB2A-B9145192B8E8}"/>
+              </a:ext>
+            </a:extLst>
+          </p:cNvPr>
+          <p:cNvSpPr/>
+          <p:nvPr/>
+        </p:nvSpPr>
+        <p:spPr>
+          <a:xfrm>
+            <a:off x="233553" y="749808"/>
+            <a:ext cx="1389888" cy="804672"/>
+          </a:xfrm>
+          <a:prstGeom prst="rect">
+            <a:avLst/>
+          </a:prstGeom>
+          <a:solidFill>
+            <a:srgbClr val="E0F2FE"/>
+          </a:solidFill>
+          <a:ln w="6350">
+            <a:solidFill>
+              <a:srgbClr val="E2E8F0"/>
+            </a:solidFill>
+            <a:prstDash val="solid"/>
+          </a:ln>
+        </p:spPr>
+        <p:txBody>
+          <a:bodyPr/>
+          <a:lstStyle/>
+          <a:p>
+            <a:endParaRPr lang="fr-FR" dirty="0"/>
+          </a:p>
+        </p:txBody>
+      </p:sp>
+      <p:sp>
+        <p:nvSpPr>
+          <p:cNvPr id="3" name="Text 7">
+            <a:extLst>
+              <a:ext uri="{FF2B5EF4-FFF2-40B4-BE49-F238E27FC236}">
+                <a16:creationId xmlns:a16="http://schemas.microsoft.com/office/drawing/2014/main" id="{0B734ED6-4815-6B0E-4753-2172017342B0}"/>
+              </a:ext>
+            </a:extLst>
+          </p:cNvPr>
+          <p:cNvSpPr/>
+          <p:nvPr/>
+        </p:nvSpPr>
+        <p:spPr>
+          <a:xfrm>
+            <a:off x="306705" y="786384"/>
+            <a:ext cx="1243584" cy="411480"/>
+          </a:xfrm>
+          <a:prstGeom prst="rect">
+            <a:avLst/>
+          </a:prstGeom>
+          <a:noFill/>
+          <a:ln/>
+        </p:spPr>
+        <p:txBody>
+          <a:bodyPr wrap="square" lIns="0" tIns="0" rIns="0" bIns="0" rtlCol="0" anchor="ctr"/>
+          <a:lstStyle/>
+          <a:p>
+            <a:pPr marL="0" indent="0" algn="ctr">
+              <a:buNone/>
+            </a:pPr>
+            <a:r>
+              <a:rPr lang="fr-FR" sz="2200" b="1" dirty="0">
+                <a:solidFill>
+                  <a:srgbClr val="0891B2"/>
+                </a:solidFill>
+              </a:rPr>
+              <a:t>#1</a:t>
+            </a:r>
+            <a:endParaRPr lang="fr-FR" sz="2200" dirty="0"/>
+          </a:p>
+        </p:txBody>
+      </p:sp>
+      <p:sp>
+        <p:nvSpPr>
+          <p:cNvPr id="4" name="Text 8">
+            <a:extLst>
+              <a:ext uri="{FF2B5EF4-FFF2-40B4-BE49-F238E27FC236}">
+                <a16:creationId xmlns:a16="http://schemas.microsoft.com/office/drawing/2014/main" id="{920CBB12-D276-F531-2E77-538BB2118DDC}"/>
+              </a:ext>
+            </a:extLst>
+          </p:cNvPr>
+          <p:cNvSpPr/>
+          <p:nvPr/>
+        </p:nvSpPr>
+        <p:spPr>
+          <a:xfrm>
+            <a:off x="288417" y="1197864"/>
+            <a:ext cx="1280160" cy="201168"/>
+          </a:xfrm>
+          <a:prstGeom prst="rect">
+            <a:avLst/>
+          </a:prstGeom>
+          <a:noFill/>
+          <a:ln/>
+        </p:spPr>
+        <p:txBody>
+          <a:bodyPr wrap="square" lIns="0" tIns="0" rIns="0" bIns="0" rtlCol="0" anchor="t"/>
+          <a:lstStyle/>
+          <a:p>
+            <a:pPr marL="0" indent="0" algn="ctr">
+              <a:buNone/>
+            </a:pPr>
+            <a:r>
+              <a:rPr lang="fr-FR" sz="750" b="1" dirty="0">
+                <a:solidFill>
+                  <a:srgbClr val="1B2A4A"/>
+                </a:solidFill>
+              </a:rPr>
+              <a:t>Compétence recherchée</a:t>
+            </a:r>
+            <a:endParaRPr lang="fr-FR" sz="750" dirty="0"/>
+          </a:p>
+        </p:txBody>
+      </p:sp>
+      <p:sp>
+        <p:nvSpPr>
+          <p:cNvPr id="5" name="Text 9">
+            <a:extLst>
+              <a:ext uri="{FF2B5EF4-FFF2-40B4-BE49-F238E27FC236}">
+                <a16:creationId xmlns:a16="http://schemas.microsoft.com/office/drawing/2014/main" id="{EEE7C619-D1E5-B72B-7875-DB98668379B1}"/>
+              </a:ext>
+            </a:extLst>
+          </p:cNvPr>
+          <p:cNvSpPr/>
+          <p:nvPr/>
+        </p:nvSpPr>
+        <p:spPr>
+          <a:xfrm>
+            <a:off x="288417" y="1371600"/>
+            <a:ext cx="1280160" cy="155448"/>
+          </a:xfrm>
+          <a:prstGeom prst="rect">
+            <a:avLst/>
+          </a:prstGeom>
+          <a:noFill/>
+          <a:ln/>
+        </p:spPr>
+        <p:txBody>
+          <a:bodyPr wrap="square" lIns="0" tIns="0" rIns="0" bIns="0" rtlCol="0" anchor="t"/>
+          <a:lstStyle/>
+          <a:p>
+            <a:pPr marL="0" indent="0" algn="ctr">
+              <a:buNone/>
+            </a:pPr>
+            <a:r>
+              <a:rPr lang="fr-FR" sz="650" dirty="0">
+                <a:solidFill>
+                  <a:srgbClr val="64748B"/>
+                </a:solidFill>
+              </a:rPr>
+              <a:t>Data Engineering 2026</a:t>
+            </a:r>
+            <a:endParaRPr lang="fr-FR" sz="650" dirty="0"/>
+          </a:p>
+        </p:txBody>
+      </p:sp>
+      <p:sp>
+        <p:nvSpPr>
+          <p:cNvPr id="6" name="Shape 10">
+            <a:extLst>
+              <a:ext uri="{FF2B5EF4-FFF2-40B4-BE49-F238E27FC236}">
+                <a16:creationId xmlns:a16="http://schemas.microsoft.com/office/drawing/2014/main" id="{41E882E5-EB69-3D1A-BA41-EBCFE65A1A50}"/>
+              </a:ext>
+            </a:extLst>
+          </p:cNvPr>
+          <p:cNvSpPr/>
+          <p:nvPr/>
+        </p:nvSpPr>
+        <p:spPr>
+          <a:xfrm>
+            <a:off x="1678305" y="749808"/>
+            <a:ext cx="1389888" cy="804672"/>
+          </a:xfrm>
+          <a:prstGeom prst="rect">
+            <a:avLst/>
+          </a:prstGeom>
+          <a:solidFill>
+            <a:srgbClr val="FFFFFF"/>
+          </a:solidFill>
+          <a:ln w="6350">
+            <a:solidFill>
+              <a:srgbClr val="E2E8F0"/>
+            </a:solidFill>
+            <a:prstDash val="solid"/>
+          </a:ln>
+        </p:spPr>
+        <p:txBody>
+          <a:bodyPr/>
+          <a:lstStyle/>
+          <a:p>
+            <a:endParaRPr lang="fr-FR" dirty="0"/>
+          </a:p>
+        </p:txBody>
+      </p:sp>
+      <p:sp>
+        <p:nvSpPr>
+          <p:cNvPr id="7" name="Text 11">
+            <a:extLst>
+              <a:ext uri="{FF2B5EF4-FFF2-40B4-BE49-F238E27FC236}">
+                <a16:creationId xmlns:a16="http://schemas.microsoft.com/office/drawing/2014/main" id="{6AFEE594-2DA2-259F-1066-B749BCC96D34}"/>
+              </a:ext>
+            </a:extLst>
+          </p:cNvPr>
+          <p:cNvSpPr/>
+          <p:nvPr/>
+        </p:nvSpPr>
+        <p:spPr>
+          <a:xfrm>
+            <a:off x="1751457" y="786384"/>
+            <a:ext cx="1243584" cy="411480"/>
+          </a:xfrm>
+          <a:prstGeom prst="rect">
+            <a:avLst/>
+          </a:prstGeom>
+          <a:noFill/>
+          <a:ln/>
+        </p:spPr>
+        <p:txBody>
+          <a:bodyPr wrap="square" lIns="0" tIns="0" rIns="0" bIns="0" rtlCol="0" anchor="ctr"/>
+          <a:lstStyle/>
+          <a:p>
+            <a:pPr marL="0" indent="0" algn="ctr">
+              <a:buNone/>
+            </a:pPr>
+            <a:r>
+              <a:rPr lang="fr-FR" sz="2200" b="1" dirty="0">
+                <a:solidFill>
+                  <a:srgbClr val="0891B2"/>
+                </a:solidFill>
+              </a:rPr>
+              <a:t>46%</a:t>
+            </a:r>
+            <a:endParaRPr lang="fr-FR" sz="2200" dirty="0"/>
+          </a:p>
+        </p:txBody>
+      </p:sp>
+      <p:sp>
+        <p:nvSpPr>
+          <p:cNvPr id="8" name="Text 12">
+            <a:extLst>
+              <a:ext uri="{FF2B5EF4-FFF2-40B4-BE49-F238E27FC236}">
+                <a16:creationId xmlns:a16="http://schemas.microsoft.com/office/drawing/2014/main" id="{4DE035BC-D83B-0019-3CD6-69381FEBD47D}"/>
+              </a:ext>
+            </a:extLst>
+          </p:cNvPr>
+          <p:cNvSpPr/>
+          <p:nvPr/>
+        </p:nvSpPr>
+        <p:spPr>
+          <a:xfrm>
+            <a:off x="1733169" y="1197864"/>
+            <a:ext cx="1280160" cy="201168"/>
+          </a:xfrm>
+          <a:prstGeom prst="rect">
+            <a:avLst/>
+          </a:prstGeom>
+          <a:noFill/>
+          <a:ln/>
+        </p:spPr>
+        <p:txBody>
+          <a:bodyPr wrap="square" lIns="0" tIns="0" rIns="0" bIns="0" rtlCol="0" anchor="t"/>
+          <a:lstStyle/>
+          <a:p>
+            <a:pPr marL="0" indent="0" algn="ctr">
+              <a:buNone/>
+            </a:pPr>
+            <a:r>
+              <a:rPr lang="fr-FR" sz="750" b="1" dirty="0">
+                <a:solidFill>
+                  <a:srgbClr val="1B2A4A"/>
+                </a:solidFill>
+              </a:rPr>
+              <a:t>des recruteurs</a:t>
+            </a:r>
+            <a:endParaRPr lang="fr-FR" sz="750" dirty="0"/>
+          </a:p>
+        </p:txBody>
+      </p:sp>
+      <p:sp>
+        <p:nvSpPr>
+          <p:cNvPr id="9" name="Text 13">
+            <a:extLst>
+              <a:ext uri="{FF2B5EF4-FFF2-40B4-BE49-F238E27FC236}">
+                <a16:creationId xmlns:a16="http://schemas.microsoft.com/office/drawing/2014/main" id="{949D181C-2FAD-089D-F4C1-09903D4177CE}"/>
+              </a:ext>
+            </a:extLst>
+          </p:cNvPr>
+          <p:cNvSpPr/>
+          <p:nvPr/>
+        </p:nvSpPr>
+        <p:spPr>
+          <a:xfrm>
+            <a:off x="1733169" y="1371600"/>
+            <a:ext cx="1280160" cy="155448"/>
+          </a:xfrm>
+          <a:prstGeom prst="rect">
+            <a:avLst/>
+          </a:prstGeom>
+          <a:noFill/>
+          <a:ln/>
+        </p:spPr>
+        <p:txBody>
+          <a:bodyPr wrap="square" lIns="0" tIns="0" rIns="0" bIns="0" rtlCol="0" anchor="t"/>
+          <a:lstStyle/>
+          <a:p>
+            <a:pPr marL="0" indent="0" algn="ctr">
+              <a:buNone/>
+            </a:pPr>
+            <a:r>
+              <a:rPr lang="fr-FR" sz="650" dirty="0">
+                <a:solidFill>
+                  <a:srgbClr val="64748B"/>
+                </a:solidFill>
+              </a:rPr>
+              <a:t>veulent du Data Eng.</a:t>
+            </a:r>
+            <a:endParaRPr lang="fr-FR" sz="650" dirty="0"/>
+          </a:p>
+        </p:txBody>
+      </p:sp>
+      <p:sp>
+        <p:nvSpPr>
+          <p:cNvPr id="10" name="Shape 14">
+            <a:extLst>
+              <a:ext uri="{FF2B5EF4-FFF2-40B4-BE49-F238E27FC236}">
+                <a16:creationId xmlns:a16="http://schemas.microsoft.com/office/drawing/2014/main" id="{7293C564-839B-A4C5-F3FF-3E29105DD9A2}"/>
+              </a:ext>
+            </a:extLst>
+          </p:cNvPr>
+          <p:cNvSpPr/>
+          <p:nvPr/>
+        </p:nvSpPr>
+        <p:spPr>
+          <a:xfrm>
+            <a:off x="3123057" y="749808"/>
+            <a:ext cx="1389888" cy="804672"/>
+          </a:xfrm>
+          <a:prstGeom prst="rect">
+            <a:avLst/>
+          </a:prstGeom>
+          <a:solidFill>
+            <a:srgbClr val="D1FAE5"/>
+          </a:solidFill>
+          <a:ln w="6350">
+            <a:solidFill>
+              <a:srgbClr val="E2E8F0"/>
+            </a:solidFill>
+            <a:prstDash val="solid"/>
+          </a:ln>
+        </p:spPr>
+        <p:txBody>
+          <a:bodyPr/>
+          <a:lstStyle/>
+          <a:p>
+            <a:endParaRPr lang="fr-FR" dirty="0"/>
+          </a:p>
+        </p:txBody>
+      </p:sp>
+      <p:sp>
+        <p:nvSpPr>
+          <p:cNvPr id="11" name="Text 15">
+            <a:extLst>
+              <a:ext uri="{FF2B5EF4-FFF2-40B4-BE49-F238E27FC236}">
+                <a16:creationId xmlns:a16="http://schemas.microsoft.com/office/drawing/2014/main" id="{9E517799-3A7A-F752-7DCD-3DA7D5F25D21}"/>
+              </a:ext>
+            </a:extLst>
+          </p:cNvPr>
+          <p:cNvSpPr/>
+          <p:nvPr/>
+        </p:nvSpPr>
+        <p:spPr>
+          <a:xfrm>
+            <a:off x="3196209" y="786384"/>
+            <a:ext cx="1243584" cy="411480"/>
+          </a:xfrm>
+          <a:prstGeom prst="rect">
+            <a:avLst/>
+          </a:prstGeom>
+          <a:noFill/>
+          <a:ln/>
+        </p:spPr>
+        <p:txBody>
+          <a:bodyPr wrap="square" lIns="0" tIns="0" rIns="0" bIns="0" rtlCol="0" anchor="ctr"/>
+          <a:lstStyle/>
+          <a:p>
+            <a:pPr marL="0" indent="0" algn="ctr">
+              <a:buNone/>
+            </a:pPr>
+            <a:r>
+              <a:rPr lang="fr-FR" sz="2200" b="1" dirty="0">
+                <a:solidFill>
+                  <a:srgbClr val="059669"/>
+                </a:solidFill>
+              </a:rPr>
+              <a:t>#2</a:t>
+            </a:r>
+            <a:endParaRPr lang="fr-FR" sz="2200" dirty="0"/>
+          </a:p>
+        </p:txBody>
+      </p:sp>
+      <p:sp>
+        <p:nvSpPr>
+          <p:cNvPr id="12" name="Text 16">
+            <a:extLst>
+              <a:ext uri="{FF2B5EF4-FFF2-40B4-BE49-F238E27FC236}">
+                <a16:creationId xmlns:a16="http://schemas.microsoft.com/office/drawing/2014/main" id="{4D95151B-1AF1-4A23-6B0F-86BAD00C89AD}"/>
+              </a:ext>
+            </a:extLst>
+          </p:cNvPr>
+          <p:cNvSpPr/>
+          <p:nvPr/>
+        </p:nvSpPr>
+        <p:spPr>
+          <a:xfrm>
+            <a:off x="3177921" y="1197864"/>
+            <a:ext cx="1280160" cy="201168"/>
+          </a:xfrm>
+          <a:prstGeom prst="rect">
+            <a:avLst/>
+          </a:prstGeom>
+          <a:noFill/>
+          <a:ln/>
+        </p:spPr>
+        <p:txBody>
+          <a:bodyPr wrap="square" lIns="0" tIns="0" rIns="0" bIns="0" rtlCol="0" anchor="t"/>
+          <a:lstStyle/>
+          <a:p>
+            <a:pPr marL="0" indent="0" algn="ctr">
+              <a:buNone/>
+            </a:pPr>
+            <a:r>
+              <a:rPr lang="fr-FR" sz="750" b="1" dirty="0">
+                <a:solidFill>
+                  <a:srgbClr val="1B2A4A"/>
+                </a:solidFill>
+              </a:rPr>
+              <a:t>Compétence demandée</a:t>
+            </a:r>
+            <a:endParaRPr lang="fr-FR" sz="750" dirty="0"/>
+          </a:p>
+        </p:txBody>
+      </p:sp>
+      <p:sp>
+        <p:nvSpPr>
+          <p:cNvPr id="13" name="Text 17">
+            <a:extLst>
+              <a:ext uri="{FF2B5EF4-FFF2-40B4-BE49-F238E27FC236}">
+                <a16:creationId xmlns:a16="http://schemas.microsoft.com/office/drawing/2014/main" id="{36DD220C-B823-8589-9072-3EACC04F96D4}"/>
+              </a:ext>
+            </a:extLst>
+          </p:cNvPr>
+          <p:cNvSpPr/>
+          <p:nvPr/>
+        </p:nvSpPr>
+        <p:spPr>
+          <a:xfrm>
+            <a:off x="3177921" y="1371600"/>
+            <a:ext cx="1280160" cy="155448"/>
+          </a:xfrm>
+          <a:prstGeom prst="rect">
+            <a:avLst/>
+          </a:prstGeom>
+          <a:noFill/>
+          <a:ln/>
+        </p:spPr>
+        <p:txBody>
+          <a:bodyPr wrap="square" lIns="0" tIns="0" rIns="0" bIns="0" rtlCol="0" anchor="t"/>
+          <a:lstStyle/>
+          <a:p>
+            <a:pPr marL="0" indent="0" algn="ctr">
+              <a:buNone/>
+            </a:pPr>
+            <a:r>
+              <a:rPr lang="fr-FR" sz="650" dirty="0">
+                <a:solidFill>
+                  <a:srgbClr val="64748B"/>
+                </a:solidFill>
+              </a:rPr>
+              <a:t>IA appliquée au métier</a:t>
+            </a:r>
+            <a:endParaRPr lang="fr-FR" sz="650" dirty="0"/>
+          </a:p>
+        </p:txBody>
+      </p:sp>
+      <p:sp>
+        <p:nvSpPr>
+          <p:cNvPr id="14" name="Shape 18">
+            <a:extLst>
+              <a:ext uri="{FF2B5EF4-FFF2-40B4-BE49-F238E27FC236}">
+                <a16:creationId xmlns:a16="http://schemas.microsoft.com/office/drawing/2014/main" id="{3887E1E0-2BD2-6F16-4439-94EC8EDC23BF}"/>
+              </a:ext>
+            </a:extLst>
+          </p:cNvPr>
+          <p:cNvSpPr/>
+          <p:nvPr/>
+        </p:nvSpPr>
+        <p:spPr>
+          <a:xfrm>
+            <a:off x="4567809" y="749808"/>
+            <a:ext cx="1389888" cy="804672"/>
+          </a:xfrm>
+          <a:prstGeom prst="rect">
+            <a:avLst/>
+          </a:prstGeom>
+          <a:solidFill>
+            <a:srgbClr val="FFFFFF"/>
+          </a:solidFill>
+          <a:ln w="6350">
+            <a:solidFill>
+              <a:srgbClr val="E2E8F0"/>
+            </a:solidFill>
+            <a:prstDash val="solid"/>
+          </a:ln>
+        </p:spPr>
+        <p:txBody>
+          <a:bodyPr/>
+          <a:lstStyle/>
+          <a:p>
+            <a:endParaRPr lang="fr-FR" dirty="0"/>
+          </a:p>
+        </p:txBody>
+      </p:sp>
+      <p:sp>
+        <p:nvSpPr>
+          <p:cNvPr id="15" name="Text 19">
+            <a:extLst>
+              <a:ext uri="{FF2B5EF4-FFF2-40B4-BE49-F238E27FC236}">
+                <a16:creationId xmlns:a16="http://schemas.microsoft.com/office/drawing/2014/main" id="{A11E0264-5AD4-B790-E9B4-CD04C81C942D}"/>
+              </a:ext>
+            </a:extLst>
+          </p:cNvPr>
+          <p:cNvSpPr/>
+          <p:nvPr/>
+        </p:nvSpPr>
+        <p:spPr>
+          <a:xfrm>
+            <a:off x="4640961" y="786384"/>
+            <a:ext cx="1243584" cy="411480"/>
+          </a:xfrm>
+          <a:prstGeom prst="rect">
+            <a:avLst/>
+          </a:prstGeom>
+          <a:noFill/>
+          <a:ln/>
+        </p:spPr>
+        <p:txBody>
+          <a:bodyPr wrap="square" lIns="0" tIns="0" rIns="0" bIns="0" rtlCol="0" anchor="ctr"/>
+          <a:lstStyle/>
+          <a:p>
+            <a:pPr marL="0" indent="0" algn="ctr">
+              <a:buNone/>
+            </a:pPr>
+            <a:r>
+              <a:rPr lang="fr-FR" sz="2200" b="1" dirty="0">
+                <a:solidFill>
+                  <a:srgbClr val="059669"/>
+                </a:solidFill>
+              </a:rPr>
+              <a:t>35%</a:t>
+            </a:r>
+            <a:endParaRPr lang="fr-FR" sz="2200" dirty="0"/>
+          </a:p>
+        </p:txBody>
+      </p:sp>
+      <p:sp>
+        <p:nvSpPr>
+          <p:cNvPr id="16" name="Text 20">
+            <a:extLst>
+              <a:ext uri="{FF2B5EF4-FFF2-40B4-BE49-F238E27FC236}">
+                <a16:creationId xmlns:a16="http://schemas.microsoft.com/office/drawing/2014/main" id="{35AF1703-0781-912C-5EC1-3A133FC60EBE}"/>
+              </a:ext>
+            </a:extLst>
+          </p:cNvPr>
+          <p:cNvSpPr/>
+          <p:nvPr/>
+        </p:nvSpPr>
+        <p:spPr>
+          <a:xfrm>
+            <a:off x="4622673" y="1197864"/>
+            <a:ext cx="1280160" cy="201168"/>
+          </a:xfrm>
+          <a:prstGeom prst="rect">
+            <a:avLst/>
+          </a:prstGeom>
+          <a:noFill/>
+          <a:ln/>
+        </p:spPr>
+        <p:txBody>
+          <a:bodyPr wrap="square" lIns="0" tIns="0" rIns="0" bIns="0" rtlCol="0" anchor="t"/>
+          <a:lstStyle/>
+          <a:p>
+            <a:pPr marL="0" indent="0" algn="ctr">
+              <a:buNone/>
+            </a:pPr>
+            <a:r>
+              <a:rPr lang="fr-FR" sz="750" b="1" dirty="0">
+                <a:solidFill>
+                  <a:srgbClr val="1B2A4A"/>
+                </a:solidFill>
+              </a:rPr>
+              <a:t>des recruteurs</a:t>
+            </a:r>
+            <a:endParaRPr lang="fr-FR" sz="750" dirty="0"/>
+          </a:p>
+        </p:txBody>
+      </p:sp>
+      <p:sp>
+        <p:nvSpPr>
+          <p:cNvPr id="17" name="Text 21">
+            <a:extLst>
+              <a:ext uri="{FF2B5EF4-FFF2-40B4-BE49-F238E27FC236}">
+                <a16:creationId xmlns:a16="http://schemas.microsoft.com/office/drawing/2014/main" id="{1A840515-08B1-4DAF-ED5D-A985A2FA7AD8}"/>
+              </a:ext>
+            </a:extLst>
+          </p:cNvPr>
+          <p:cNvSpPr/>
+          <p:nvPr/>
+        </p:nvSpPr>
+        <p:spPr>
+          <a:xfrm>
+            <a:off x="4622673" y="1371600"/>
+            <a:ext cx="1280160" cy="155448"/>
+          </a:xfrm>
+          <a:prstGeom prst="rect">
+            <a:avLst/>
+          </a:prstGeom>
+          <a:noFill/>
+          <a:ln/>
+        </p:spPr>
+        <p:txBody>
+          <a:bodyPr wrap="square" lIns="0" tIns="0" rIns="0" bIns="0" rtlCol="0" anchor="t"/>
+          <a:lstStyle/>
+          <a:p>
+            <a:pPr marL="0" indent="0" algn="ctr">
+              <a:buNone/>
+            </a:pPr>
+            <a:r>
+              <a:rPr lang="fr-FR" sz="650" dirty="0">
+                <a:solidFill>
+                  <a:srgbClr val="64748B"/>
+                </a:solidFill>
+              </a:rPr>
+              <a:t>veulent de l'IA appliquée</a:t>
+            </a:r>
+            <a:endParaRPr lang="fr-FR" sz="650" dirty="0"/>
+          </a:p>
+        </p:txBody>
+      </p:sp>
+      <p:sp>
+        <p:nvSpPr>
+          <p:cNvPr id="18" name="Shape 22">
+            <a:extLst>
+              <a:ext uri="{FF2B5EF4-FFF2-40B4-BE49-F238E27FC236}">
+                <a16:creationId xmlns:a16="http://schemas.microsoft.com/office/drawing/2014/main" id="{59A9AB8B-49E5-3B78-5C53-D46408CCF906}"/>
+              </a:ext>
+            </a:extLst>
+          </p:cNvPr>
+          <p:cNvSpPr/>
+          <p:nvPr/>
+        </p:nvSpPr>
+        <p:spPr>
+          <a:xfrm>
+            <a:off x="6012561" y="749808"/>
+            <a:ext cx="1389888" cy="804672"/>
+          </a:xfrm>
+          <a:prstGeom prst="rect">
+            <a:avLst/>
+          </a:prstGeom>
+          <a:solidFill>
+            <a:srgbClr val="FFF7ED"/>
+          </a:solidFill>
+          <a:ln w="6350">
+            <a:solidFill>
+              <a:srgbClr val="E2E8F0"/>
+            </a:solidFill>
+            <a:prstDash val="solid"/>
+          </a:ln>
+        </p:spPr>
+        <p:txBody>
+          <a:bodyPr/>
+          <a:lstStyle/>
+          <a:p>
+            <a:endParaRPr lang="fr-FR" dirty="0"/>
+          </a:p>
+        </p:txBody>
+      </p:sp>
+      <p:sp>
+        <p:nvSpPr>
+          <p:cNvPr id="19" name="Text 23">
+            <a:extLst>
+              <a:ext uri="{FF2B5EF4-FFF2-40B4-BE49-F238E27FC236}">
+                <a16:creationId xmlns:a16="http://schemas.microsoft.com/office/drawing/2014/main" id="{1BD70486-25BE-7E95-2902-8C477EAC8F9B}"/>
+              </a:ext>
+            </a:extLst>
+          </p:cNvPr>
+          <p:cNvSpPr/>
+          <p:nvPr/>
+        </p:nvSpPr>
+        <p:spPr>
+          <a:xfrm>
+            <a:off x="6085713" y="786384"/>
+            <a:ext cx="1243584" cy="411480"/>
+          </a:xfrm>
+          <a:prstGeom prst="rect">
+            <a:avLst/>
+          </a:prstGeom>
+          <a:noFill/>
+          <a:ln/>
+        </p:spPr>
+        <p:txBody>
+          <a:bodyPr wrap="square" lIns="0" tIns="0" rIns="0" bIns="0" rtlCol="0" anchor="ctr"/>
+          <a:lstStyle/>
+          <a:p>
+            <a:pPr marL="0" indent="0" algn="ctr">
+              <a:buNone/>
+            </a:pPr>
+            <a:r>
+              <a:rPr lang="fr-FR" sz="2200" b="1" dirty="0">
+                <a:solidFill>
+                  <a:srgbClr val="EA580C"/>
+                </a:solidFill>
+              </a:rPr>
+              <a:t>23%</a:t>
+            </a:r>
+            <a:endParaRPr lang="fr-FR" sz="2200" dirty="0"/>
+          </a:p>
+        </p:txBody>
+      </p:sp>
+      <p:sp>
+        <p:nvSpPr>
+          <p:cNvPr id="20" name="Text 24">
+            <a:extLst>
+              <a:ext uri="{FF2B5EF4-FFF2-40B4-BE49-F238E27FC236}">
+                <a16:creationId xmlns:a16="http://schemas.microsoft.com/office/drawing/2014/main" id="{AA516359-6B85-26DF-9E4D-8290AFEF9D2F}"/>
+              </a:ext>
+            </a:extLst>
+          </p:cNvPr>
+          <p:cNvSpPr/>
+          <p:nvPr/>
+        </p:nvSpPr>
+        <p:spPr>
+          <a:xfrm>
+            <a:off x="6067425" y="1197864"/>
+            <a:ext cx="1280160" cy="201168"/>
+          </a:xfrm>
+          <a:prstGeom prst="rect">
+            <a:avLst/>
+          </a:prstGeom>
+          <a:noFill/>
+          <a:ln/>
+        </p:spPr>
+        <p:txBody>
+          <a:bodyPr wrap="square" lIns="0" tIns="0" rIns="0" bIns="0" rtlCol="0" anchor="t"/>
+          <a:lstStyle/>
+          <a:p>
+            <a:pPr marL="0" indent="0" algn="ctr">
+              <a:buNone/>
+            </a:pPr>
+            <a:r>
+              <a:rPr lang="fr-FR" sz="750" b="1" dirty="0">
+                <a:solidFill>
+                  <a:srgbClr val="1B2A4A"/>
+                </a:solidFill>
+              </a:rPr>
+              <a:t>des profils data</a:t>
+            </a:r>
+            <a:endParaRPr lang="fr-FR" sz="750" dirty="0"/>
+          </a:p>
+        </p:txBody>
+      </p:sp>
+      <p:sp>
+        <p:nvSpPr>
+          <p:cNvPr id="21" name="Text 25">
+            <a:extLst>
+              <a:ext uri="{FF2B5EF4-FFF2-40B4-BE49-F238E27FC236}">
+                <a16:creationId xmlns:a16="http://schemas.microsoft.com/office/drawing/2014/main" id="{733B79FF-9E33-A58C-AB1F-BC2383E01D7D}"/>
+              </a:ext>
+            </a:extLst>
+          </p:cNvPr>
+          <p:cNvSpPr/>
+          <p:nvPr/>
+        </p:nvSpPr>
+        <p:spPr>
+          <a:xfrm>
+            <a:off x="6067425" y="1371600"/>
+            <a:ext cx="1280160" cy="155448"/>
+          </a:xfrm>
+          <a:prstGeom prst="rect">
+            <a:avLst/>
+          </a:prstGeom>
+          <a:noFill/>
+          <a:ln/>
+        </p:spPr>
+        <p:txBody>
+          <a:bodyPr wrap="square" lIns="0" tIns="0" rIns="0" bIns="0" rtlCol="0" anchor="t"/>
+          <a:lstStyle/>
+          <a:p>
+            <a:pPr marL="0" indent="0" algn="ctr">
+              <a:buNone/>
+            </a:pPr>
+            <a:r>
+              <a:rPr lang="fr-FR" sz="650" dirty="0">
+                <a:solidFill>
+                  <a:srgbClr val="64748B"/>
+                </a:solidFill>
+              </a:rPr>
+              <a:t>sont Data </a:t>
+            </a:r>
+            <a:r>
+              <a:rPr lang="fr-FR" sz="650" dirty="0" err="1">
+                <a:solidFill>
+                  <a:srgbClr val="64748B"/>
+                </a:solidFill>
+              </a:rPr>
+              <a:t>Engineers</a:t>
+            </a:r>
+            <a:endParaRPr lang="fr-FR" sz="650" dirty="0"/>
+          </a:p>
+        </p:txBody>
+      </p:sp>
+      <p:sp>
+        <p:nvSpPr>
+          <p:cNvPr id="22" name="Shape 26">
+            <a:extLst>
+              <a:ext uri="{FF2B5EF4-FFF2-40B4-BE49-F238E27FC236}">
+                <a16:creationId xmlns:a16="http://schemas.microsoft.com/office/drawing/2014/main" id="{FEE5D4C6-A682-94C2-C690-7CB8DF1A1AA5}"/>
+              </a:ext>
+            </a:extLst>
+          </p:cNvPr>
+          <p:cNvSpPr/>
+          <p:nvPr/>
+        </p:nvSpPr>
+        <p:spPr>
+          <a:xfrm>
+            <a:off x="7457313" y="749808"/>
+            <a:ext cx="1389888" cy="804672"/>
+          </a:xfrm>
+          <a:prstGeom prst="rect">
+            <a:avLst/>
+          </a:prstGeom>
+          <a:solidFill>
+            <a:srgbClr val="EDE9FE"/>
+          </a:solidFill>
+          <a:ln w="6350">
+            <a:solidFill>
+              <a:srgbClr val="E2E8F0"/>
+            </a:solidFill>
+            <a:prstDash val="solid"/>
+          </a:ln>
+        </p:spPr>
+        <p:txBody>
+          <a:bodyPr/>
+          <a:lstStyle/>
+          <a:p>
+            <a:endParaRPr lang="fr-FR" dirty="0"/>
+          </a:p>
+        </p:txBody>
+      </p:sp>
+      <p:sp>
+        <p:nvSpPr>
+          <p:cNvPr id="23" name="Text 27">
+            <a:extLst>
+              <a:ext uri="{FF2B5EF4-FFF2-40B4-BE49-F238E27FC236}">
+                <a16:creationId xmlns:a16="http://schemas.microsoft.com/office/drawing/2014/main" id="{74514FCC-B406-ADDC-0906-98526279B7B4}"/>
+              </a:ext>
+            </a:extLst>
+          </p:cNvPr>
+          <p:cNvSpPr/>
+          <p:nvPr/>
+        </p:nvSpPr>
+        <p:spPr>
+          <a:xfrm>
+            <a:off x="7530465" y="786384"/>
+            <a:ext cx="1243584" cy="411480"/>
+          </a:xfrm>
+          <a:prstGeom prst="rect">
+            <a:avLst/>
+          </a:prstGeom>
+          <a:noFill/>
+          <a:ln/>
+        </p:spPr>
+        <p:txBody>
+          <a:bodyPr wrap="square" lIns="0" tIns="0" rIns="0" bIns="0" rtlCol="0" anchor="ctr"/>
+          <a:lstStyle/>
+          <a:p>
+            <a:pPr marL="0" indent="0" algn="ctr">
+              <a:buNone/>
+            </a:pPr>
+            <a:r>
+              <a:rPr lang="fr-FR" sz="2200" b="1" dirty="0">
+                <a:solidFill>
+                  <a:srgbClr val="7C3AED"/>
+                </a:solidFill>
+              </a:rPr>
+              <a:t>41%</a:t>
+            </a:r>
+            <a:endParaRPr lang="fr-FR" sz="2200" dirty="0"/>
+          </a:p>
+        </p:txBody>
+      </p:sp>
+      <p:sp>
+        <p:nvSpPr>
+          <p:cNvPr id="24" name="Text 28">
+            <a:extLst>
+              <a:ext uri="{FF2B5EF4-FFF2-40B4-BE49-F238E27FC236}">
+                <a16:creationId xmlns:a16="http://schemas.microsoft.com/office/drawing/2014/main" id="{78D1028C-67D4-9E97-293A-5C37B6B783E6}"/>
+              </a:ext>
+            </a:extLst>
+          </p:cNvPr>
+          <p:cNvSpPr/>
+          <p:nvPr/>
+        </p:nvSpPr>
+        <p:spPr>
+          <a:xfrm>
+            <a:off x="7512177" y="1197864"/>
+            <a:ext cx="1280160" cy="201168"/>
+          </a:xfrm>
+          <a:prstGeom prst="rect">
+            <a:avLst/>
+          </a:prstGeom>
+          <a:noFill/>
+          <a:ln/>
+        </p:spPr>
+        <p:txBody>
+          <a:bodyPr wrap="square" lIns="0" tIns="0" rIns="0" bIns="0" rtlCol="0" anchor="t"/>
+          <a:lstStyle/>
+          <a:p>
+            <a:pPr marL="0" indent="0" algn="ctr">
+              <a:buNone/>
+            </a:pPr>
+            <a:r>
+              <a:rPr lang="fr-FR" sz="750" b="1" dirty="0">
+                <a:solidFill>
+                  <a:srgbClr val="1B2A4A"/>
+                </a:solidFill>
+              </a:rPr>
+              <a:t>travaillent</a:t>
+            </a:r>
+            <a:endParaRPr lang="fr-FR" sz="750" dirty="0"/>
+          </a:p>
+        </p:txBody>
+      </p:sp>
+      <p:sp>
+        <p:nvSpPr>
+          <p:cNvPr id="25" name="Text 29">
+            <a:extLst>
+              <a:ext uri="{FF2B5EF4-FFF2-40B4-BE49-F238E27FC236}">
+                <a16:creationId xmlns:a16="http://schemas.microsoft.com/office/drawing/2014/main" id="{23C0CF69-9E13-E220-7C06-1CD8D9D661ED}"/>
+              </a:ext>
+            </a:extLst>
+          </p:cNvPr>
+          <p:cNvSpPr/>
+          <p:nvPr/>
+        </p:nvSpPr>
+        <p:spPr>
+          <a:xfrm>
+            <a:off x="7512177" y="1371600"/>
+            <a:ext cx="1280160" cy="155448"/>
+          </a:xfrm>
+          <a:prstGeom prst="rect">
+            <a:avLst/>
+          </a:prstGeom>
+          <a:noFill/>
+          <a:ln/>
+        </p:spPr>
+        <p:txBody>
+          <a:bodyPr wrap="square" lIns="0" tIns="0" rIns="0" bIns="0" rtlCol="0" anchor="t"/>
+          <a:lstStyle/>
+          <a:p>
+            <a:pPr marL="0" indent="0" algn="ctr">
+              <a:buNone/>
+            </a:pPr>
+            <a:r>
+              <a:rPr lang="fr-FR" sz="650" dirty="0">
+                <a:solidFill>
+                  <a:srgbClr val="64748B"/>
+                </a:solidFill>
+              </a:rPr>
+              <a:t>3j/</a:t>
+            </a:r>
+            <a:r>
+              <a:rPr lang="fr-FR" sz="650" dirty="0" err="1">
+                <a:solidFill>
+                  <a:srgbClr val="64748B"/>
+                </a:solidFill>
+              </a:rPr>
+              <a:t>sem</a:t>
+            </a:r>
+            <a:r>
+              <a:rPr lang="fr-FR" sz="650" dirty="0">
+                <a:solidFill>
+                  <a:srgbClr val="64748B"/>
+                </a:solidFill>
+              </a:rPr>
+              <a:t> au bureau</a:t>
+            </a:r>
+            <a:endParaRPr lang="fr-FR" sz="650" dirty="0"/>
+          </a:p>
+        </p:txBody>
+      </p:sp>
+      <p:sp>
+        <p:nvSpPr>
+          <p:cNvPr id="26" name="Shape 30">
+            <a:extLst>
+              <a:ext uri="{FF2B5EF4-FFF2-40B4-BE49-F238E27FC236}">
+                <a16:creationId xmlns:a16="http://schemas.microsoft.com/office/drawing/2014/main" id="{3978FDB9-8938-BB53-A98A-2AE6732B6CA2}"/>
+              </a:ext>
+            </a:extLst>
+          </p:cNvPr>
+          <p:cNvSpPr/>
+          <p:nvPr/>
+        </p:nvSpPr>
+        <p:spPr>
+          <a:xfrm>
+            <a:off x="112395" y="1673352"/>
+            <a:ext cx="4005072" cy="2029968"/>
+          </a:xfrm>
+          <a:prstGeom prst="rect">
+            <a:avLst/>
+          </a:prstGeom>
+          <a:solidFill>
+            <a:srgbClr val="FFFFFF"/>
+          </a:solidFill>
+          <a:ln w="19050">
+            <a:solidFill>
+              <a:srgbClr val="0891B2"/>
+            </a:solidFill>
+            <a:prstDash val="solid"/>
+          </a:ln>
+        </p:spPr>
+        <p:txBody>
+          <a:bodyPr/>
+          <a:lstStyle/>
+          <a:p>
+            <a:endParaRPr lang="fr-FR" dirty="0"/>
+          </a:p>
+        </p:txBody>
+      </p:sp>
+      <p:sp>
+        <p:nvSpPr>
+          <p:cNvPr id="28" name="Shape 31">
+            <a:extLst>
+              <a:ext uri="{FF2B5EF4-FFF2-40B4-BE49-F238E27FC236}">
+                <a16:creationId xmlns:a16="http://schemas.microsoft.com/office/drawing/2014/main" id="{BCC41FA8-D459-C5E8-3F25-9ADF1D9618C2}"/>
+              </a:ext>
+            </a:extLst>
+          </p:cNvPr>
+          <p:cNvSpPr/>
+          <p:nvPr/>
+        </p:nvSpPr>
+        <p:spPr>
+          <a:xfrm>
+            <a:off x="112395" y="1673352"/>
+            <a:ext cx="4005072" cy="347472"/>
+          </a:xfrm>
+          <a:prstGeom prst="rect">
+            <a:avLst/>
+          </a:prstGeom>
+          <a:solidFill>
+            <a:srgbClr val="0891B2"/>
+          </a:solidFill>
+          <a:ln w="12700">
+            <a:solidFill>
+              <a:srgbClr val="0891B2"/>
+            </a:solidFill>
+            <a:prstDash val="solid"/>
+          </a:ln>
+        </p:spPr>
+        <p:txBody>
+          <a:bodyPr/>
+          <a:lstStyle/>
+          <a:p>
+            <a:endParaRPr lang="fr-FR" dirty="0"/>
+          </a:p>
+        </p:txBody>
+      </p:sp>
+      <p:sp>
+        <p:nvSpPr>
+          <p:cNvPr id="30" name="Text 33">
+            <a:extLst>
+              <a:ext uri="{FF2B5EF4-FFF2-40B4-BE49-F238E27FC236}">
+                <a16:creationId xmlns:a16="http://schemas.microsoft.com/office/drawing/2014/main" id="{DA99C501-37AC-2080-1685-E82D9E074F16}"/>
+              </a:ext>
+            </a:extLst>
+          </p:cNvPr>
+          <p:cNvSpPr/>
+          <p:nvPr/>
+        </p:nvSpPr>
+        <p:spPr>
+          <a:xfrm>
+            <a:off x="152019" y="1691640"/>
+            <a:ext cx="2194560" cy="310896"/>
+          </a:xfrm>
+          <a:prstGeom prst="rect">
+            <a:avLst/>
+          </a:prstGeom>
+          <a:noFill/>
+          <a:ln/>
+        </p:spPr>
+        <p:txBody>
+          <a:bodyPr wrap="square" lIns="0" tIns="0" rIns="0" bIns="0" rtlCol="0" anchor="ctr"/>
+          <a:lstStyle/>
+          <a:p>
+            <a:r>
+              <a:rPr lang="fr-FR" sz="1300" b="1" dirty="0">
+                <a:solidFill>
+                  <a:srgbClr val="FFFFFF"/>
+                </a:solidFill>
+              </a:rPr>
+              <a:t>Data Engineer </a:t>
+            </a:r>
+            <a:r>
+              <a:rPr lang="fr-FR" sz="1300" b="1" dirty="0">
+                <a:solidFill>
+                  <a:schemeClr val="bg1"/>
+                </a:solidFill>
+              </a:rPr>
+              <a:t>(0-3 ans)</a:t>
+            </a:r>
+            <a:endParaRPr lang="fr-FR" sz="1300" dirty="0">
+              <a:solidFill>
+                <a:schemeClr val="bg1"/>
+              </a:solidFill>
+            </a:endParaRPr>
+          </a:p>
+        </p:txBody>
+      </p:sp>
+      <p:sp>
+        <p:nvSpPr>
+          <p:cNvPr id="31" name="Text 34">
+            <a:extLst>
+              <a:ext uri="{FF2B5EF4-FFF2-40B4-BE49-F238E27FC236}">
+                <a16:creationId xmlns:a16="http://schemas.microsoft.com/office/drawing/2014/main" id="{75B84035-6828-8DC1-AF1A-343905C41BCC}"/>
+              </a:ext>
+            </a:extLst>
+          </p:cNvPr>
+          <p:cNvSpPr/>
+          <p:nvPr/>
+        </p:nvSpPr>
+        <p:spPr>
+          <a:xfrm>
+            <a:off x="171069" y="1691640"/>
+            <a:ext cx="3913632" cy="310896"/>
+          </a:xfrm>
+          <a:prstGeom prst="rect">
+            <a:avLst/>
+          </a:prstGeom>
+          <a:noFill/>
+          <a:ln/>
+        </p:spPr>
+        <p:txBody>
+          <a:bodyPr wrap="square" lIns="0" tIns="0" rIns="0" bIns="0" rtlCol="0" anchor="ctr"/>
+          <a:lstStyle/>
+          <a:p>
+            <a:pPr marL="0" indent="0" algn="r">
+              <a:buNone/>
+            </a:pPr>
+            <a:r>
+              <a:rPr lang="fr-FR" sz="750" dirty="0">
+                <a:solidFill>
+                  <a:srgbClr val="BAE6FD"/>
+                </a:solidFill>
+              </a:rPr>
+              <a:t>Salaire brut annuel K€ France (fixe + variable) — TPC 2026</a:t>
+            </a:r>
+            <a:endParaRPr lang="fr-FR" sz="750" dirty="0"/>
+          </a:p>
+        </p:txBody>
+      </p:sp>
+      <p:sp>
+        <p:nvSpPr>
+          <p:cNvPr id="32" name="Shape 35">
+            <a:extLst>
+              <a:ext uri="{FF2B5EF4-FFF2-40B4-BE49-F238E27FC236}">
+                <a16:creationId xmlns:a16="http://schemas.microsoft.com/office/drawing/2014/main" id="{9386E7A5-E85F-1ACF-E56E-DF538AC6160A}"/>
+              </a:ext>
+            </a:extLst>
+          </p:cNvPr>
+          <p:cNvSpPr/>
+          <p:nvPr/>
+        </p:nvSpPr>
+        <p:spPr>
+          <a:xfrm>
+            <a:off x="304800" y="2258567"/>
+            <a:ext cx="688572" cy="207645"/>
+          </a:xfrm>
+          <a:prstGeom prst="rect">
+            <a:avLst/>
+          </a:prstGeom>
+          <a:solidFill>
+            <a:srgbClr val="F4F6FA"/>
+          </a:solidFill>
+          <a:ln w="3810">
+            <a:solidFill>
+              <a:srgbClr val="E2E8F0"/>
+            </a:solidFill>
+            <a:prstDash val="solid"/>
+          </a:ln>
+        </p:spPr>
+        <p:txBody>
+          <a:bodyPr/>
+          <a:lstStyle/>
+          <a:p>
+            <a:endParaRPr lang="fr-FR" dirty="0"/>
+          </a:p>
+        </p:txBody>
+      </p:sp>
+      <p:sp>
+        <p:nvSpPr>
+          <p:cNvPr id="33" name="Text 36">
+            <a:extLst>
+              <a:ext uri="{FF2B5EF4-FFF2-40B4-BE49-F238E27FC236}">
+                <a16:creationId xmlns:a16="http://schemas.microsoft.com/office/drawing/2014/main" id="{695BC7C0-9AF1-FACB-B76F-309A71EB28F0}"/>
+              </a:ext>
+            </a:extLst>
+          </p:cNvPr>
+          <p:cNvSpPr/>
+          <p:nvPr/>
+        </p:nvSpPr>
+        <p:spPr>
+          <a:xfrm>
+            <a:off x="304800" y="2258567"/>
+            <a:ext cx="688572" cy="207645"/>
+          </a:xfrm>
+          <a:prstGeom prst="rect">
+            <a:avLst/>
+          </a:prstGeom>
+          <a:noFill/>
+          <a:ln/>
+        </p:spPr>
+        <p:txBody>
+          <a:bodyPr wrap="square" lIns="0" tIns="0" rIns="0" bIns="0" rtlCol="0" anchor="ctr"/>
+          <a:lstStyle/>
+          <a:p>
+            <a:pPr marL="0" indent="0" algn="ctr">
+              <a:buNone/>
+            </a:pPr>
+            <a:endParaRPr lang="fr-FR" sz="750" dirty="0"/>
+          </a:p>
+        </p:txBody>
+      </p:sp>
+      <p:sp>
+        <p:nvSpPr>
+          <p:cNvPr id="34" name="Shape 37">
+            <a:extLst>
+              <a:ext uri="{FF2B5EF4-FFF2-40B4-BE49-F238E27FC236}">
+                <a16:creationId xmlns:a16="http://schemas.microsoft.com/office/drawing/2014/main" id="{4FC3A8E0-16A7-4F52-B662-7B1C55D4034E}"/>
+              </a:ext>
+            </a:extLst>
+          </p:cNvPr>
+          <p:cNvSpPr/>
+          <p:nvPr/>
+        </p:nvSpPr>
+        <p:spPr>
+          <a:xfrm>
+            <a:off x="980799" y="2246757"/>
+            <a:ext cx="768096" cy="219456"/>
+          </a:xfrm>
+          <a:prstGeom prst="rect">
+            <a:avLst/>
+          </a:prstGeom>
+          <a:solidFill>
+            <a:srgbClr val="2D4A7A"/>
+          </a:solidFill>
+          <a:ln w="3810">
+            <a:solidFill>
+              <a:srgbClr val="E2E8F0"/>
+            </a:solidFill>
+            <a:prstDash val="solid"/>
+          </a:ln>
+        </p:spPr>
+        <p:txBody>
+          <a:bodyPr/>
+          <a:lstStyle/>
+          <a:p>
+            <a:endParaRPr lang="fr-FR" dirty="0"/>
+          </a:p>
+        </p:txBody>
+      </p:sp>
+      <p:sp>
+        <p:nvSpPr>
+          <p:cNvPr id="35" name="Text 38">
+            <a:extLst>
+              <a:ext uri="{FF2B5EF4-FFF2-40B4-BE49-F238E27FC236}">
+                <a16:creationId xmlns:a16="http://schemas.microsoft.com/office/drawing/2014/main" id="{80191839-7685-10AB-98AC-E2D021EF9B4E}"/>
+              </a:ext>
+            </a:extLst>
+          </p:cNvPr>
+          <p:cNvSpPr/>
+          <p:nvPr/>
+        </p:nvSpPr>
+        <p:spPr>
+          <a:xfrm>
+            <a:off x="980799" y="2246757"/>
+            <a:ext cx="768096" cy="219456"/>
+          </a:xfrm>
+          <a:prstGeom prst="rect">
+            <a:avLst/>
+          </a:prstGeom>
+          <a:noFill/>
+          <a:ln/>
+        </p:spPr>
+        <p:txBody>
+          <a:bodyPr wrap="square" lIns="0" tIns="0" rIns="0" bIns="0" rtlCol="0" anchor="ctr"/>
+          <a:lstStyle/>
+          <a:p>
+            <a:pPr marL="0" indent="0" algn="ctr">
+              <a:buNone/>
+            </a:pPr>
+            <a:r>
+              <a:rPr lang="fr-FR" sz="750" b="1" dirty="0">
+                <a:solidFill>
+                  <a:srgbClr val="FFFFFF"/>
+                </a:solidFill>
+              </a:rPr>
+              <a:t>0-2 ans</a:t>
+            </a:r>
+            <a:endParaRPr lang="fr-FR" sz="750" dirty="0"/>
+          </a:p>
+        </p:txBody>
+      </p:sp>
+      <p:sp>
+        <p:nvSpPr>
+          <p:cNvPr id="36" name="Shape 39">
+            <a:extLst>
+              <a:ext uri="{FF2B5EF4-FFF2-40B4-BE49-F238E27FC236}">
+                <a16:creationId xmlns:a16="http://schemas.microsoft.com/office/drawing/2014/main" id="{6AC6F853-9AD4-1AAA-7017-3104569CA1C6}"/>
+              </a:ext>
+            </a:extLst>
+          </p:cNvPr>
+          <p:cNvSpPr/>
+          <p:nvPr/>
+        </p:nvSpPr>
+        <p:spPr>
+          <a:xfrm>
+            <a:off x="1767183" y="2246757"/>
+            <a:ext cx="768096" cy="219456"/>
+          </a:xfrm>
+          <a:prstGeom prst="rect">
+            <a:avLst/>
+          </a:prstGeom>
+          <a:solidFill>
+            <a:srgbClr val="2D4A7A"/>
+          </a:solidFill>
+          <a:ln w="3810">
+            <a:solidFill>
+              <a:srgbClr val="E2E8F0"/>
+            </a:solidFill>
+            <a:prstDash val="solid"/>
+          </a:ln>
+        </p:spPr>
+        <p:txBody>
+          <a:bodyPr/>
+          <a:lstStyle/>
+          <a:p>
+            <a:endParaRPr lang="fr-FR" dirty="0"/>
+          </a:p>
+        </p:txBody>
+      </p:sp>
+      <p:sp>
+        <p:nvSpPr>
+          <p:cNvPr id="37" name="Text 40">
+            <a:extLst>
+              <a:ext uri="{FF2B5EF4-FFF2-40B4-BE49-F238E27FC236}">
+                <a16:creationId xmlns:a16="http://schemas.microsoft.com/office/drawing/2014/main" id="{C37C5C9C-7ED2-4953-9099-3B010A304150}"/>
+              </a:ext>
+            </a:extLst>
+          </p:cNvPr>
+          <p:cNvSpPr/>
+          <p:nvPr/>
+        </p:nvSpPr>
+        <p:spPr>
+          <a:xfrm>
+            <a:off x="1767183" y="2246757"/>
+            <a:ext cx="768096" cy="219456"/>
+          </a:xfrm>
+          <a:prstGeom prst="rect">
+            <a:avLst/>
+          </a:prstGeom>
+          <a:noFill/>
+          <a:ln/>
+        </p:spPr>
+        <p:txBody>
+          <a:bodyPr wrap="square" lIns="0" tIns="0" rIns="0" bIns="0" rtlCol="0" anchor="ctr"/>
+          <a:lstStyle/>
+          <a:p>
+            <a:pPr marL="0" indent="0" algn="ctr">
+              <a:buNone/>
+            </a:pPr>
+            <a:r>
+              <a:rPr lang="fr-FR" sz="750" b="1" dirty="0">
+                <a:solidFill>
+                  <a:srgbClr val="FFFFFF"/>
+                </a:solidFill>
+              </a:rPr>
+              <a:t>3-5 ans</a:t>
+            </a:r>
+            <a:endParaRPr lang="fr-FR" sz="750" dirty="0"/>
+          </a:p>
+        </p:txBody>
+      </p:sp>
+      <p:sp>
+        <p:nvSpPr>
+          <p:cNvPr id="38" name="Shape 41">
+            <a:extLst>
+              <a:ext uri="{FF2B5EF4-FFF2-40B4-BE49-F238E27FC236}">
+                <a16:creationId xmlns:a16="http://schemas.microsoft.com/office/drawing/2014/main" id="{75F3F3E1-A411-D614-EF19-2AFB2B224EDE}"/>
+              </a:ext>
+            </a:extLst>
+          </p:cNvPr>
+          <p:cNvSpPr/>
+          <p:nvPr/>
+        </p:nvSpPr>
+        <p:spPr>
+          <a:xfrm>
+            <a:off x="2553567" y="2246757"/>
+            <a:ext cx="768096" cy="219456"/>
+          </a:xfrm>
+          <a:prstGeom prst="rect">
+            <a:avLst/>
+          </a:prstGeom>
+          <a:solidFill>
+            <a:srgbClr val="2D4A7A"/>
+          </a:solidFill>
+          <a:ln w="3810">
+            <a:solidFill>
+              <a:srgbClr val="E2E8F0"/>
+            </a:solidFill>
+            <a:prstDash val="solid"/>
+          </a:ln>
+        </p:spPr>
+        <p:txBody>
+          <a:bodyPr/>
+          <a:lstStyle/>
+          <a:p>
+            <a:endParaRPr lang="fr-FR" dirty="0"/>
+          </a:p>
+        </p:txBody>
+      </p:sp>
+      <p:sp>
+        <p:nvSpPr>
+          <p:cNvPr id="39" name="Text 42">
+            <a:extLst>
+              <a:ext uri="{FF2B5EF4-FFF2-40B4-BE49-F238E27FC236}">
+                <a16:creationId xmlns:a16="http://schemas.microsoft.com/office/drawing/2014/main" id="{30033D4A-69A0-3FA5-B16B-63E60DC4E629}"/>
+              </a:ext>
+            </a:extLst>
+          </p:cNvPr>
+          <p:cNvSpPr/>
+          <p:nvPr/>
+        </p:nvSpPr>
+        <p:spPr>
+          <a:xfrm>
+            <a:off x="2553567" y="2246757"/>
+            <a:ext cx="768096" cy="219456"/>
+          </a:xfrm>
+          <a:prstGeom prst="rect">
+            <a:avLst/>
+          </a:prstGeom>
+          <a:noFill/>
+          <a:ln/>
+        </p:spPr>
+        <p:txBody>
+          <a:bodyPr wrap="square" lIns="0" tIns="0" rIns="0" bIns="0" rtlCol="0" anchor="ctr"/>
+          <a:lstStyle/>
+          <a:p>
+            <a:pPr marL="0" indent="0" algn="ctr">
+              <a:buNone/>
+            </a:pPr>
+            <a:r>
+              <a:rPr lang="fr-FR" sz="750" b="1" dirty="0">
+                <a:solidFill>
+                  <a:srgbClr val="FFFFFF"/>
+                </a:solidFill>
+              </a:rPr>
+              <a:t>6-9 ans</a:t>
+            </a:r>
+            <a:endParaRPr lang="fr-FR" sz="750" dirty="0"/>
+          </a:p>
+        </p:txBody>
+      </p:sp>
+      <p:sp>
+        <p:nvSpPr>
+          <p:cNvPr id="40" name="Shape 43">
+            <a:extLst>
+              <a:ext uri="{FF2B5EF4-FFF2-40B4-BE49-F238E27FC236}">
+                <a16:creationId xmlns:a16="http://schemas.microsoft.com/office/drawing/2014/main" id="{85D56053-EE1C-2BC9-6327-AB615D8875BA}"/>
+              </a:ext>
+            </a:extLst>
+          </p:cNvPr>
+          <p:cNvSpPr/>
+          <p:nvPr/>
+        </p:nvSpPr>
+        <p:spPr>
+          <a:xfrm>
+            <a:off x="3321663" y="2246757"/>
+            <a:ext cx="768096" cy="219456"/>
+          </a:xfrm>
+          <a:prstGeom prst="rect">
+            <a:avLst/>
+          </a:prstGeom>
+          <a:solidFill>
+            <a:srgbClr val="2D4A7A"/>
+          </a:solidFill>
+          <a:ln w="3810">
+            <a:solidFill>
+              <a:srgbClr val="E2E8F0"/>
+            </a:solidFill>
+            <a:prstDash val="solid"/>
+          </a:ln>
+        </p:spPr>
+        <p:txBody>
+          <a:bodyPr/>
+          <a:lstStyle/>
+          <a:p>
+            <a:endParaRPr lang="fr-FR" dirty="0"/>
+          </a:p>
+        </p:txBody>
+      </p:sp>
+      <p:sp>
+        <p:nvSpPr>
+          <p:cNvPr id="41" name="Text 44">
+            <a:extLst>
+              <a:ext uri="{FF2B5EF4-FFF2-40B4-BE49-F238E27FC236}">
+                <a16:creationId xmlns:a16="http://schemas.microsoft.com/office/drawing/2014/main" id="{FDBAAA62-DAD8-12CD-91F5-54E163B40FD0}"/>
+              </a:ext>
+            </a:extLst>
+          </p:cNvPr>
+          <p:cNvSpPr/>
+          <p:nvPr/>
+        </p:nvSpPr>
+        <p:spPr>
+          <a:xfrm>
+            <a:off x="3321663" y="2246757"/>
+            <a:ext cx="768096" cy="219456"/>
+          </a:xfrm>
+          <a:prstGeom prst="rect">
+            <a:avLst/>
+          </a:prstGeom>
+          <a:noFill/>
+          <a:ln/>
+        </p:spPr>
+        <p:txBody>
+          <a:bodyPr wrap="square" lIns="0" tIns="0" rIns="0" bIns="0" rtlCol="0" anchor="ctr"/>
+          <a:lstStyle/>
+          <a:p>
+            <a:pPr marL="0" indent="0" algn="ctr">
+              <a:buNone/>
+            </a:pPr>
+            <a:r>
+              <a:rPr lang="fr-FR" sz="750" b="1" dirty="0">
+                <a:solidFill>
+                  <a:srgbClr val="FFFFFF"/>
+                </a:solidFill>
+              </a:rPr>
+              <a:t>+10 ans</a:t>
+            </a:r>
+            <a:endParaRPr lang="fr-FR" sz="750" dirty="0"/>
+          </a:p>
+        </p:txBody>
+      </p:sp>
+      <p:sp>
+        <p:nvSpPr>
+          <p:cNvPr id="42" name="Shape 45">
+            <a:extLst>
+              <a:ext uri="{FF2B5EF4-FFF2-40B4-BE49-F238E27FC236}">
+                <a16:creationId xmlns:a16="http://schemas.microsoft.com/office/drawing/2014/main" id="{CEB19560-3255-5687-99F5-14DBBE4647CC}"/>
+              </a:ext>
+            </a:extLst>
+          </p:cNvPr>
+          <p:cNvSpPr/>
+          <p:nvPr/>
+        </p:nvSpPr>
+        <p:spPr>
+          <a:xfrm>
+            <a:off x="304800" y="2479991"/>
+            <a:ext cx="688572" cy="242253"/>
+          </a:xfrm>
+          <a:prstGeom prst="rect">
+            <a:avLst/>
+          </a:prstGeom>
+          <a:solidFill>
+            <a:srgbClr val="F8FAFC"/>
+          </a:solidFill>
+          <a:ln w="3810">
+            <a:solidFill>
+              <a:srgbClr val="E2E8F0"/>
+            </a:solidFill>
+            <a:prstDash val="solid"/>
+          </a:ln>
+        </p:spPr>
+        <p:txBody>
+          <a:bodyPr/>
+          <a:lstStyle/>
+          <a:p>
+            <a:endParaRPr lang="fr-FR" dirty="0"/>
+          </a:p>
+        </p:txBody>
+      </p:sp>
+      <p:sp>
+        <p:nvSpPr>
+          <p:cNvPr id="43" name="Text 46">
+            <a:extLst>
+              <a:ext uri="{FF2B5EF4-FFF2-40B4-BE49-F238E27FC236}">
+                <a16:creationId xmlns:a16="http://schemas.microsoft.com/office/drawing/2014/main" id="{3C33F8E7-9F97-25E5-315B-EA266A4EDDB7}"/>
+              </a:ext>
+            </a:extLst>
+          </p:cNvPr>
+          <p:cNvSpPr/>
+          <p:nvPr/>
+        </p:nvSpPr>
+        <p:spPr>
+          <a:xfrm>
+            <a:off x="304800" y="2479991"/>
+            <a:ext cx="688572" cy="242253"/>
+          </a:xfrm>
+          <a:prstGeom prst="rect">
+            <a:avLst/>
+          </a:prstGeom>
+          <a:noFill/>
+          <a:ln/>
+        </p:spPr>
+        <p:txBody>
+          <a:bodyPr wrap="square" lIns="0" tIns="76200" rIns="0" bIns="0" rtlCol="0" anchor="ctr"/>
+          <a:lstStyle/>
+          <a:p>
+            <a:pPr marL="0" indent="0" algn="l">
+              <a:buNone/>
+            </a:pPr>
+            <a:r>
+              <a:rPr lang="fr-FR" sz="780" dirty="0">
+                <a:solidFill>
+                  <a:srgbClr val="1B2A4A"/>
+                </a:solidFill>
+              </a:rPr>
+              <a:t>Paris / IDF</a:t>
+            </a:r>
+            <a:endParaRPr lang="fr-FR" sz="780" dirty="0"/>
+          </a:p>
+        </p:txBody>
+      </p:sp>
+      <p:sp>
+        <p:nvSpPr>
+          <p:cNvPr id="44" name="Shape 47">
+            <a:extLst>
+              <a:ext uri="{FF2B5EF4-FFF2-40B4-BE49-F238E27FC236}">
+                <a16:creationId xmlns:a16="http://schemas.microsoft.com/office/drawing/2014/main" id="{CACCB0C1-FF58-17C6-0F2F-95D83BD220CA}"/>
+              </a:ext>
+            </a:extLst>
+          </p:cNvPr>
+          <p:cNvSpPr/>
+          <p:nvPr/>
+        </p:nvSpPr>
+        <p:spPr>
+          <a:xfrm>
+            <a:off x="980799" y="2466213"/>
+            <a:ext cx="768096" cy="256032"/>
+          </a:xfrm>
+          <a:prstGeom prst="rect">
+            <a:avLst/>
+          </a:prstGeom>
+          <a:solidFill>
+            <a:srgbClr val="E0F2FE"/>
+          </a:solidFill>
+          <a:ln w="3810">
+            <a:solidFill>
+              <a:srgbClr val="E2E8F0"/>
+            </a:solidFill>
+            <a:prstDash val="solid"/>
+          </a:ln>
+        </p:spPr>
+        <p:txBody>
+          <a:bodyPr/>
+          <a:lstStyle/>
+          <a:p>
+            <a:endParaRPr lang="fr-FR" dirty="0"/>
+          </a:p>
+        </p:txBody>
+      </p:sp>
+      <p:sp>
+        <p:nvSpPr>
+          <p:cNvPr id="45" name="Text 48">
+            <a:extLst>
+              <a:ext uri="{FF2B5EF4-FFF2-40B4-BE49-F238E27FC236}">
+                <a16:creationId xmlns:a16="http://schemas.microsoft.com/office/drawing/2014/main" id="{016B5646-AF9B-E233-BB15-D24D70A3B114}"/>
+              </a:ext>
+            </a:extLst>
+          </p:cNvPr>
+          <p:cNvSpPr/>
+          <p:nvPr/>
+        </p:nvSpPr>
+        <p:spPr>
+          <a:xfrm>
+            <a:off x="980799" y="2466213"/>
+            <a:ext cx="768096" cy="256032"/>
+          </a:xfrm>
+          <a:prstGeom prst="rect">
+            <a:avLst/>
+          </a:prstGeom>
+          <a:noFill/>
+          <a:ln/>
+        </p:spPr>
+        <p:txBody>
+          <a:bodyPr wrap="square" lIns="0" tIns="0" rIns="0" bIns="0" rtlCol="0" anchor="ctr"/>
+          <a:lstStyle/>
+          <a:p>
+            <a:pPr marL="0" indent="0" algn="ctr">
+              <a:buNone/>
+            </a:pPr>
+            <a:r>
+              <a:rPr lang="fr-FR" sz="1000" b="1" dirty="0">
+                <a:solidFill>
+                  <a:srgbClr val="1B2A4A"/>
+                </a:solidFill>
+              </a:rPr>
+              <a:t>46</a:t>
+            </a:r>
+            <a:endParaRPr lang="fr-FR" sz="1000" dirty="0"/>
+          </a:p>
+        </p:txBody>
+      </p:sp>
+      <p:sp>
+        <p:nvSpPr>
+          <p:cNvPr id="46" name="Shape 49">
+            <a:extLst>
+              <a:ext uri="{FF2B5EF4-FFF2-40B4-BE49-F238E27FC236}">
+                <a16:creationId xmlns:a16="http://schemas.microsoft.com/office/drawing/2014/main" id="{8FFA837C-3C51-FBA6-F514-6C232D10EC61}"/>
+              </a:ext>
+            </a:extLst>
+          </p:cNvPr>
+          <p:cNvSpPr/>
+          <p:nvPr/>
+        </p:nvSpPr>
+        <p:spPr>
+          <a:xfrm>
+            <a:off x="1767183" y="2466213"/>
+            <a:ext cx="768096" cy="256032"/>
+          </a:xfrm>
+          <a:prstGeom prst="rect">
+            <a:avLst/>
+          </a:prstGeom>
+          <a:solidFill>
+            <a:srgbClr val="E0F2FE"/>
+          </a:solidFill>
+          <a:ln w="3810">
+            <a:solidFill>
+              <a:srgbClr val="E2E8F0"/>
+            </a:solidFill>
+            <a:prstDash val="solid"/>
+          </a:ln>
+        </p:spPr>
+        <p:txBody>
+          <a:bodyPr/>
+          <a:lstStyle/>
+          <a:p>
+            <a:endParaRPr lang="fr-FR" dirty="0"/>
+          </a:p>
+        </p:txBody>
+      </p:sp>
+      <p:sp>
+        <p:nvSpPr>
+          <p:cNvPr id="47" name="Text 50">
+            <a:extLst>
+              <a:ext uri="{FF2B5EF4-FFF2-40B4-BE49-F238E27FC236}">
+                <a16:creationId xmlns:a16="http://schemas.microsoft.com/office/drawing/2014/main" id="{1FAABF77-4E71-AA10-EAF9-D21BDFD3C1B6}"/>
+              </a:ext>
+            </a:extLst>
+          </p:cNvPr>
+          <p:cNvSpPr/>
+          <p:nvPr/>
+        </p:nvSpPr>
+        <p:spPr>
+          <a:xfrm>
+            <a:off x="1767183" y="2466213"/>
+            <a:ext cx="768096" cy="256032"/>
+          </a:xfrm>
+          <a:prstGeom prst="rect">
+            <a:avLst/>
+          </a:prstGeom>
+          <a:noFill/>
+          <a:ln/>
+        </p:spPr>
+        <p:txBody>
+          <a:bodyPr wrap="square" lIns="0" tIns="0" rIns="0" bIns="0" rtlCol="0" anchor="ctr"/>
+          <a:lstStyle/>
+          <a:p>
+            <a:pPr marL="0" indent="0" algn="ctr">
+              <a:buNone/>
+            </a:pPr>
+            <a:r>
+              <a:rPr lang="fr-FR" sz="1000" b="1" dirty="0">
+                <a:solidFill>
+                  <a:srgbClr val="1B2A4A"/>
+                </a:solidFill>
+              </a:rPr>
+              <a:t>52</a:t>
+            </a:r>
+            <a:endParaRPr lang="fr-FR" sz="1000" dirty="0"/>
+          </a:p>
+        </p:txBody>
+      </p:sp>
+      <p:sp>
+        <p:nvSpPr>
+          <p:cNvPr id="48" name="Shape 51">
+            <a:extLst>
+              <a:ext uri="{FF2B5EF4-FFF2-40B4-BE49-F238E27FC236}">
+                <a16:creationId xmlns:a16="http://schemas.microsoft.com/office/drawing/2014/main" id="{11965A68-DF4A-7C9B-514E-2DC7A3C16C4A}"/>
+              </a:ext>
+            </a:extLst>
+          </p:cNvPr>
+          <p:cNvSpPr/>
+          <p:nvPr/>
+        </p:nvSpPr>
+        <p:spPr>
+          <a:xfrm>
+            <a:off x="2553567" y="2466213"/>
+            <a:ext cx="768096" cy="256032"/>
+          </a:xfrm>
+          <a:prstGeom prst="rect">
+            <a:avLst/>
+          </a:prstGeom>
+          <a:solidFill>
+            <a:srgbClr val="E0F2FE"/>
+          </a:solidFill>
+          <a:ln w="3810">
+            <a:solidFill>
+              <a:srgbClr val="E2E8F0"/>
+            </a:solidFill>
+            <a:prstDash val="solid"/>
+          </a:ln>
+        </p:spPr>
+        <p:txBody>
+          <a:bodyPr/>
+          <a:lstStyle/>
+          <a:p>
+            <a:endParaRPr lang="fr-FR" dirty="0"/>
+          </a:p>
+        </p:txBody>
+      </p:sp>
+      <p:sp>
+        <p:nvSpPr>
+          <p:cNvPr id="49" name="Text 52">
+            <a:extLst>
+              <a:ext uri="{FF2B5EF4-FFF2-40B4-BE49-F238E27FC236}">
+                <a16:creationId xmlns:a16="http://schemas.microsoft.com/office/drawing/2014/main" id="{6E93A38A-E686-7627-46CA-3220F2F0DC0C}"/>
+              </a:ext>
+            </a:extLst>
+          </p:cNvPr>
+          <p:cNvSpPr/>
+          <p:nvPr/>
+        </p:nvSpPr>
+        <p:spPr>
+          <a:xfrm>
+            <a:off x="2553567" y="2466213"/>
+            <a:ext cx="768096" cy="256032"/>
+          </a:xfrm>
+          <a:prstGeom prst="rect">
+            <a:avLst/>
+          </a:prstGeom>
+          <a:noFill/>
+          <a:ln/>
+        </p:spPr>
+        <p:txBody>
+          <a:bodyPr wrap="square" lIns="0" tIns="0" rIns="0" bIns="0" rtlCol="0" anchor="ctr"/>
+          <a:lstStyle/>
+          <a:p>
+            <a:pPr marL="0" indent="0" algn="ctr">
+              <a:buNone/>
+            </a:pPr>
+            <a:r>
+              <a:rPr lang="fr-FR" sz="1000" b="1" dirty="0">
+                <a:solidFill>
+                  <a:srgbClr val="1B2A4A"/>
+                </a:solidFill>
+              </a:rPr>
+              <a:t>68</a:t>
+            </a:r>
+            <a:endParaRPr lang="fr-FR" sz="1000" dirty="0"/>
+          </a:p>
+        </p:txBody>
+      </p:sp>
+      <p:sp>
+        <p:nvSpPr>
+          <p:cNvPr id="50" name="Shape 53">
+            <a:extLst>
+              <a:ext uri="{FF2B5EF4-FFF2-40B4-BE49-F238E27FC236}">
+                <a16:creationId xmlns:a16="http://schemas.microsoft.com/office/drawing/2014/main" id="{27C09E2A-63AB-AB57-C338-EA4BED6866E5}"/>
+              </a:ext>
+            </a:extLst>
+          </p:cNvPr>
+          <p:cNvSpPr/>
+          <p:nvPr/>
+        </p:nvSpPr>
+        <p:spPr>
+          <a:xfrm>
+            <a:off x="3321663" y="2466213"/>
+            <a:ext cx="768096" cy="256032"/>
+          </a:xfrm>
+          <a:prstGeom prst="rect">
+            <a:avLst/>
+          </a:prstGeom>
+          <a:solidFill>
+            <a:srgbClr val="E0F2FE"/>
+          </a:solidFill>
+          <a:ln w="3810">
+            <a:solidFill>
+              <a:srgbClr val="E2E8F0"/>
+            </a:solidFill>
+            <a:prstDash val="solid"/>
+          </a:ln>
+        </p:spPr>
+        <p:txBody>
+          <a:bodyPr/>
+          <a:lstStyle/>
+          <a:p>
+            <a:endParaRPr lang="fr-FR" dirty="0"/>
+          </a:p>
+        </p:txBody>
+      </p:sp>
+      <p:sp>
+        <p:nvSpPr>
+          <p:cNvPr id="51" name="Text 54">
+            <a:extLst>
+              <a:ext uri="{FF2B5EF4-FFF2-40B4-BE49-F238E27FC236}">
+                <a16:creationId xmlns:a16="http://schemas.microsoft.com/office/drawing/2014/main" id="{EE1D1740-AC27-60FF-829F-D724DBA0DD35}"/>
+              </a:ext>
+            </a:extLst>
+          </p:cNvPr>
+          <p:cNvSpPr/>
+          <p:nvPr/>
+        </p:nvSpPr>
+        <p:spPr>
+          <a:xfrm>
+            <a:off x="3321663" y="2466213"/>
+            <a:ext cx="768096" cy="256032"/>
+          </a:xfrm>
+          <a:prstGeom prst="rect">
+            <a:avLst/>
+          </a:prstGeom>
+          <a:noFill/>
+          <a:ln/>
+        </p:spPr>
+        <p:txBody>
+          <a:bodyPr wrap="square" lIns="0" tIns="0" rIns="0" bIns="0" rtlCol="0" anchor="ctr"/>
+          <a:lstStyle/>
+          <a:p>
+            <a:pPr marL="0" indent="0" algn="ctr">
+              <a:buNone/>
+            </a:pPr>
+            <a:r>
+              <a:rPr lang="fr-FR" sz="1000" b="1" dirty="0">
+                <a:solidFill>
+                  <a:srgbClr val="0891B2"/>
+                </a:solidFill>
+              </a:rPr>
+              <a:t>68</a:t>
+            </a:r>
+            <a:endParaRPr lang="fr-FR" sz="1000" dirty="0"/>
+          </a:p>
+        </p:txBody>
+      </p:sp>
+      <p:sp>
+        <p:nvSpPr>
+          <p:cNvPr id="52" name="Shape 55">
+            <a:extLst>
+              <a:ext uri="{FF2B5EF4-FFF2-40B4-BE49-F238E27FC236}">
+                <a16:creationId xmlns:a16="http://schemas.microsoft.com/office/drawing/2014/main" id="{4104FDC1-ADCB-1498-EA12-EAC3D9524AEE}"/>
+              </a:ext>
+            </a:extLst>
+          </p:cNvPr>
+          <p:cNvSpPr/>
+          <p:nvPr/>
+        </p:nvSpPr>
+        <p:spPr>
+          <a:xfrm>
+            <a:off x="304800" y="2736023"/>
+            <a:ext cx="688572" cy="242253"/>
+          </a:xfrm>
+          <a:prstGeom prst="rect">
+            <a:avLst/>
+          </a:prstGeom>
+          <a:solidFill>
+            <a:srgbClr val="F8FAFC"/>
+          </a:solidFill>
+          <a:ln w="3810">
+            <a:solidFill>
+              <a:srgbClr val="E2E8F0"/>
+            </a:solidFill>
+            <a:prstDash val="solid"/>
+          </a:ln>
+        </p:spPr>
+        <p:txBody>
+          <a:bodyPr/>
+          <a:lstStyle/>
+          <a:p>
+            <a:endParaRPr lang="fr-FR" dirty="0"/>
+          </a:p>
+        </p:txBody>
+      </p:sp>
+      <p:sp>
+        <p:nvSpPr>
+          <p:cNvPr id="53" name="Text 56">
+            <a:extLst>
+              <a:ext uri="{FF2B5EF4-FFF2-40B4-BE49-F238E27FC236}">
+                <a16:creationId xmlns:a16="http://schemas.microsoft.com/office/drawing/2014/main" id="{9B8C99F3-12F1-0EE7-A0E2-928954819C6A}"/>
+              </a:ext>
+            </a:extLst>
+          </p:cNvPr>
+          <p:cNvSpPr/>
+          <p:nvPr/>
+        </p:nvSpPr>
+        <p:spPr>
+          <a:xfrm>
+            <a:off x="304800" y="2736023"/>
+            <a:ext cx="688572" cy="242253"/>
+          </a:xfrm>
+          <a:prstGeom prst="rect">
+            <a:avLst/>
+          </a:prstGeom>
+          <a:noFill/>
+          <a:ln/>
+        </p:spPr>
+        <p:txBody>
+          <a:bodyPr wrap="square" lIns="0" tIns="76200" rIns="0" bIns="0" rtlCol="0" anchor="ctr"/>
+          <a:lstStyle/>
+          <a:p>
+            <a:pPr marL="0" indent="0" algn="l">
+              <a:buNone/>
+            </a:pPr>
+            <a:r>
+              <a:rPr lang="fr-FR" sz="780" dirty="0">
+                <a:solidFill>
+                  <a:srgbClr val="1B2A4A"/>
+                </a:solidFill>
+              </a:rPr>
+              <a:t>Autres villes</a:t>
+            </a:r>
+            <a:endParaRPr lang="fr-FR" sz="780" dirty="0"/>
+          </a:p>
+        </p:txBody>
+      </p:sp>
+      <p:sp>
+        <p:nvSpPr>
+          <p:cNvPr id="54" name="Shape 57">
+            <a:extLst>
+              <a:ext uri="{FF2B5EF4-FFF2-40B4-BE49-F238E27FC236}">
+                <a16:creationId xmlns:a16="http://schemas.microsoft.com/office/drawing/2014/main" id="{F652FFFB-A0DC-3B91-11C3-A651967D53D3}"/>
+              </a:ext>
+            </a:extLst>
+          </p:cNvPr>
+          <p:cNvSpPr/>
+          <p:nvPr/>
+        </p:nvSpPr>
+        <p:spPr>
+          <a:xfrm>
+            <a:off x="980799" y="2722245"/>
+            <a:ext cx="768096" cy="256032"/>
+          </a:xfrm>
+          <a:prstGeom prst="rect">
+            <a:avLst/>
+          </a:prstGeom>
+          <a:solidFill>
+            <a:srgbClr val="FFFFFF"/>
+          </a:solidFill>
+          <a:ln w="3810">
+            <a:solidFill>
+              <a:srgbClr val="E2E8F0"/>
+            </a:solidFill>
+            <a:prstDash val="solid"/>
+          </a:ln>
+        </p:spPr>
+        <p:txBody>
+          <a:bodyPr/>
+          <a:lstStyle/>
+          <a:p>
+            <a:endParaRPr lang="fr-FR" dirty="0"/>
+          </a:p>
+        </p:txBody>
+      </p:sp>
+      <p:sp>
+        <p:nvSpPr>
+          <p:cNvPr id="55" name="Text 58">
+            <a:extLst>
+              <a:ext uri="{FF2B5EF4-FFF2-40B4-BE49-F238E27FC236}">
+                <a16:creationId xmlns:a16="http://schemas.microsoft.com/office/drawing/2014/main" id="{90D676B4-9FF5-BF88-D8DA-FE66C1FEB6E4}"/>
+              </a:ext>
+            </a:extLst>
+          </p:cNvPr>
+          <p:cNvSpPr/>
+          <p:nvPr/>
+        </p:nvSpPr>
+        <p:spPr>
+          <a:xfrm>
+            <a:off x="980799" y="2722245"/>
+            <a:ext cx="768096" cy="256032"/>
+          </a:xfrm>
+          <a:prstGeom prst="rect">
+            <a:avLst/>
+          </a:prstGeom>
+          <a:noFill/>
+          <a:ln/>
+        </p:spPr>
+        <p:txBody>
+          <a:bodyPr wrap="square" lIns="0" tIns="0" rIns="0" bIns="0" rtlCol="0" anchor="ctr"/>
+          <a:lstStyle/>
+          <a:p>
+            <a:pPr marL="0" indent="0" algn="ctr">
+              <a:buNone/>
+            </a:pPr>
+            <a:r>
+              <a:rPr lang="fr-FR" sz="1000" b="1" dirty="0">
+                <a:solidFill>
+                  <a:srgbClr val="1B2A4A"/>
+                </a:solidFill>
+              </a:rPr>
+              <a:t>40</a:t>
+            </a:r>
+            <a:endParaRPr lang="fr-FR" sz="1000" dirty="0"/>
+          </a:p>
+        </p:txBody>
+      </p:sp>
+      <p:sp>
+        <p:nvSpPr>
+          <p:cNvPr id="56" name="Shape 59">
+            <a:extLst>
+              <a:ext uri="{FF2B5EF4-FFF2-40B4-BE49-F238E27FC236}">
+                <a16:creationId xmlns:a16="http://schemas.microsoft.com/office/drawing/2014/main" id="{A1DD7D17-4C9E-836D-6A1E-1AC0B7A30691}"/>
+              </a:ext>
+            </a:extLst>
+          </p:cNvPr>
+          <p:cNvSpPr/>
+          <p:nvPr/>
+        </p:nvSpPr>
+        <p:spPr>
+          <a:xfrm>
+            <a:off x="1767183" y="2722245"/>
+            <a:ext cx="768096" cy="256032"/>
+          </a:xfrm>
+          <a:prstGeom prst="rect">
+            <a:avLst/>
+          </a:prstGeom>
+          <a:solidFill>
+            <a:srgbClr val="FFFFFF"/>
+          </a:solidFill>
+          <a:ln w="3810">
+            <a:solidFill>
+              <a:srgbClr val="E2E8F0"/>
+            </a:solidFill>
+            <a:prstDash val="solid"/>
+          </a:ln>
+        </p:spPr>
+        <p:txBody>
+          <a:bodyPr/>
+          <a:lstStyle/>
+          <a:p>
+            <a:endParaRPr lang="fr-FR" dirty="0"/>
+          </a:p>
+        </p:txBody>
+      </p:sp>
+      <p:sp>
+        <p:nvSpPr>
+          <p:cNvPr id="57" name="Text 60">
+            <a:extLst>
+              <a:ext uri="{FF2B5EF4-FFF2-40B4-BE49-F238E27FC236}">
+                <a16:creationId xmlns:a16="http://schemas.microsoft.com/office/drawing/2014/main" id="{794ADA74-33E9-EB34-6346-67E8F256DA1D}"/>
+              </a:ext>
+            </a:extLst>
+          </p:cNvPr>
+          <p:cNvSpPr/>
+          <p:nvPr/>
+        </p:nvSpPr>
+        <p:spPr>
+          <a:xfrm>
+            <a:off x="1767183" y="2722245"/>
+            <a:ext cx="768096" cy="256032"/>
+          </a:xfrm>
+          <a:prstGeom prst="rect">
+            <a:avLst/>
+          </a:prstGeom>
+          <a:noFill/>
+          <a:ln/>
+        </p:spPr>
+        <p:txBody>
+          <a:bodyPr wrap="square" lIns="0" tIns="0" rIns="0" bIns="0" rtlCol="0" anchor="ctr"/>
+          <a:lstStyle/>
+          <a:p>
+            <a:pPr marL="0" indent="0" algn="ctr">
+              <a:buNone/>
+            </a:pPr>
+            <a:r>
+              <a:rPr lang="fr-FR" sz="1000" b="1" dirty="0">
+                <a:solidFill>
+                  <a:srgbClr val="1B2A4A"/>
+                </a:solidFill>
+              </a:rPr>
+              <a:t>46</a:t>
+            </a:r>
+            <a:endParaRPr lang="fr-FR" sz="1000" dirty="0"/>
+          </a:p>
+        </p:txBody>
+      </p:sp>
+      <p:sp>
+        <p:nvSpPr>
+          <p:cNvPr id="58" name="Shape 61">
+            <a:extLst>
+              <a:ext uri="{FF2B5EF4-FFF2-40B4-BE49-F238E27FC236}">
+                <a16:creationId xmlns:a16="http://schemas.microsoft.com/office/drawing/2014/main" id="{37ABEA06-82FD-3DB2-DD56-27C783AD8DA2}"/>
+              </a:ext>
+            </a:extLst>
+          </p:cNvPr>
+          <p:cNvSpPr/>
+          <p:nvPr/>
+        </p:nvSpPr>
+        <p:spPr>
+          <a:xfrm>
+            <a:off x="2553567" y="2722245"/>
+            <a:ext cx="768096" cy="256032"/>
+          </a:xfrm>
+          <a:prstGeom prst="rect">
+            <a:avLst/>
+          </a:prstGeom>
+          <a:solidFill>
+            <a:srgbClr val="FFFFFF"/>
+          </a:solidFill>
+          <a:ln w="3810">
+            <a:solidFill>
+              <a:srgbClr val="E2E8F0"/>
+            </a:solidFill>
+            <a:prstDash val="solid"/>
+          </a:ln>
+        </p:spPr>
+        <p:txBody>
+          <a:bodyPr/>
+          <a:lstStyle/>
+          <a:p>
+            <a:endParaRPr lang="fr-FR" dirty="0"/>
+          </a:p>
+        </p:txBody>
+      </p:sp>
+      <p:sp>
+        <p:nvSpPr>
+          <p:cNvPr id="59" name="Text 62">
+            <a:extLst>
+              <a:ext uri="{FF2B5EF4-FFF2-40B4-BE49-F238E27FC236}">
+                <a16:creationId xmlns:a16="http://schemas.microsoft.com/office/drawing/2014/main" id="{A38B061A-D87F-6FFF-E9C4-AC4A55892FB7}"/>
+              </a:ext>
+            </a:extLst>
+          </p:cNvPr>
+          <p:cNvSpPr/>
+          <p:nvPr/>
+        </p:nvSpPr>
+        <p:spPr>
+          <a:xfrm>
+            <a:off x="2553567" y="2722245"/>
+            <a:ext cx="768096" cy="256032"/>
+          </a:xfrm>
+          <a:prstGeom prst="rect">
+            <a:avLst/>
+          </a:prstGeom>
+          <a:noFill/>
+          <a:ln/>
+        </p:spPr>
+        <p:txBody>
+          <a:bodyPr wrap="square" lIns="0" tIns="0" rIns="0" bIns="0" rtlCol="0" anchor="ctr"/>
+          <a:lstStyle/>
+          <a:p>
+            <a:pPr marL="0" indent="0" algn="ctr">
+              <a:buNone/>
+            </a:pPr>
+            <a:r>
+              <a:rPr lang="fr-FR" sz="1000" b="1" dirty="0">
+                <a:solidFill>
+                  <a:srgbClr val="1B2A4A"/>
+                </a:solidFill>
+              </a:rPr>
+              <a:t>48,5</a:t>
+            </a:r>
+            <a:endParaRPr lang="fr-FR" sz="1000" dirty="0"/>
+          </a:p>
+        </p:txBody>
+      </p:sp>
+      <p:sp>
+        <p:nvSpPr>
+          <p:cNvPr id="60" name="Shape 63">
+            <a:extLst>
+              <a:ext uri="{FF2B5EF4-FFF2-40B4-BE49-F238E27FC236}">
+                <a16:creationId xmlns:a16="http://schemas.microsoft.com/office/drawing/2014/main" id="{11E92286-82F7-A110-4957-DF8CDCA91598}"/>
+              </a:ext>
+            </a:extLst>
+          </p:cNvPr>
+          <p:cNvSpPr/>
+          <p:nvPr/>
+        </p:nvSpPr>
+        <p:spPr>
+          <a:xfrm>
+            <a:off x="3321663" y="2722245"/>
+            <a:ext cx="768096" cy="256032"/>
+          </a:xfrm>
+          <a:prstGeom prst="rect">
+            <a:avLst/>
+          </a:prstGeom>
+          <a:solidFill>
+            <a:srgbClr val="FFFFFF"/>
+          </a:solidFill>
+          <a:ln w="3810">
+            <a:solidFill>
+              <a:srgbClr val="E2E8F0"/>
+            </a:solidFill>
+            <a:prstDash val="solid"/>
+          </a:ln>
+        </p:spPr>
+        <p:txBody>
+          <a:bodyPr/>
+          <a:lstStyle/>
+          <a:p>
+            <a:endParaRPr lang="fr-FR" dirty="0"/>
+          </a:p>
+        </p:txBody>
+      </p:sp>
+      <p:sp>
+        <p:nvSpPr>
+          <p:cNvPr id="61" name="Text 64">
+            <a:extLst>
+              <a:ext uri="{FF2B5EF4-FFF2-40B4-BE49-F238E27FC236}">
+                <a16:creationId xmlns:a16="http://schemas.microsoft.com/office/drawing/2014/main" id="{71CA2FD6-831B-85FB-FA16-8BE6D81A5A66}"/>
+              </a:ext>
+            </a:extLst>
+          </p:cNvPr>
+          <p:cNvSpPr/>
+          <p:nvPr/>
+        </p:nvSpPr>
+        <p:spPr>
+          <a:xfrm>
+            <a:off x="3321663" y="2722245"/>
+            <a:ext cx="768096" cy="256032"/>
+          </a:xfrm>
+          <a:prstGeom prst="rect">
+            <a:avLst/>
+          </a:prstGeom>
+          <a:noFill/>
+          <a:ln/>
+        </p:spPr>
+        <p:txBody>
+          <a:bodyPr wrap="square" lIns="0" tIns="0" rIns="0" bIns="0" rtlCol="0" anchor="ctr"/>
+          <a:lstStyle/>
+          <a:p>
+            <a:pPr marL="0" indent="0" algn="ctr">
+              <a:buNone/>
+            </a:pPr>
+            <a:r>
+              <a:rPr lang="fr-FR" sz="1000" b="1" dirty="0">
+                <a:solidFill>
+                  <a:srgbClr val="0891B2"/>
+                </a:solidFill>
+              </a:rPr>
+              <a:t>60,5</a:t>
+            </a:r>
+            <a:endParaRPr lang="fr-FR" sz="1000" dirty="0"/>
+          </a:p>
+        </p:txBody>
+      </p:sp>
+      <p:sp>
+        <p:nvSpPr>
+          <p:cNvPr id="62" name="Shape 65">
+            <a:extLst>
+              <a:ext uri="{FF2B5EF4-FFF2-40B4-BE49-F238E27FC236}">
+                <a16:creationId xmlns:a16="http://schemas.microsoft.com/office/drawing/2014/main" id="{E16038AF-F17C-40C4-89AC-87E599B63D52}"/>
+              </a:ext>
+            </a:extLst>
+          </p:cNvPr>
+          <p:cNvSpPr/>
+          <p:nvPr/>
+        </p:nvSpPr>
+        <p:spPr>
+          <a:xfrm>
+            <a:off x="304799" y="3014853"/>
+            <a:ext cx="3739515" cy="207645"/>
+          </a:xfrm>
+          <a:prstGeom prst="rect">
+            <a:avLst/>
+          </a:prstGeom>
+          <a:solidFill>
+            <a:srgbClr val="E0F2FE"/>
+          </a:solidFill>
+          <a:ln w="6350">
+            <a:solidFill>
+              <a:srgbClr val="0891B2"/>
+            </a:solidFill>
+            <a:prstDash val="solid"/>
+          </a:ln>
+        </p:spPr>
+        <p:txBody>
+          <a:bodyPr/>
+          <a:lstStyle/>
+          <a:p>
+            <a:endParaRPr lang="fr-FR" dirty="0"/>
+          </a:p>
+        </p:txBody>
+      </p:sp>
+      <p:sp>
+        <p:nvSpPr>
+          <p:cNvPr id="63" name="Text 66">
+            <a:extLst>
+              <a:ext uri="{FF2B5EF4-FFF2-40B4-BE49-F238E27FC236}">
+                <a16:creationId xmlns:a16="http://schemas.microsoft.com/office/drawing/2014/main" id="{2DEAC38B-75E5-43A8-EDFB-99AA3B087A1E}"/>
+              </a:ext>
+            </a:extLst>
+          </p:cNvPr>
+          <p:cNvSpPr/>
+          <p:nvPr/>
+        </p:nvSpPr>
+        <p:spPr>
+          <a:xfrm>
+            <a:off x="304799" y="3014853"/>
+            <a:ext cx="3739515" cy="207645"/>
+          </a:xfrm>
+          <a:prstGeom prst="rect">
+            <a:avLst/>
+          </a:prstGeom>
+          <a:noFill/>
+          <a:ln/>
+        </p:spPr>
+        <p:txBody>
+          <a:bodyPr wrap="square" lIns="0" tIns="0" rIns="0" bIns="0" rtlCol="0" anchor="ctr"/>
+          <a:lstStyle/>
+          <a:p>
+            <a:pPr marL="0" indent="0" algn="ctr">
+              <a:buNone/>
+            </a:pPr>
+            <a:r>
+              <a:rPr lang="fr-FR" sz="750" b="1" dirty="0">
+                <a:solidFill>
+                  <a:srgbClr val="0891B2"/>
+                </a:solidFill>
+              </a:rPr>
+              <a:t>Variable : 5-8%  </a:t>
+            </a:r>
+            <a:r>
+              <a:rPr lang="fr-FR" sz="750" dirty="0">
+                <a:solidFill>
+                  <a:srgbClr val="CBD5E1"/>
+                </a:solidFill>
+              </a:rPr>
+              <a:t> | </a:t>
+            </a:r>
+            <a:r>
+              <a:rPr lang="fr-FR" sz="750" b="1" dirty="0">
+                <a:solidFill>
+                  <a:srgbClr val="2D4A7A"/>
+                </a:solidFill>
+              </a:rPr>
+              <a:t>  BSPCE : 13-27%  </a:t>
+            </a:r>
+            <a:r>
+              <a:rPr lang="fr-FR" sz="750" dirty="0">
+                <a:solidFill>
+                  <a:srgbClr val="CBD5E1"/>
+                </a:solidFill>
+              </a:rPr>
+              <a:t> | </a:t>
+            </a:r>
+            <a:r>
+              <a:rPr lang="fr-FR" sz="750" dirty="0">
+                <a:solidFill>
+                  <a:srgbClr val="64748B"/>
+                </a:solidFill>
+              </a:rPr>
+              <a:t>  Contrat : CDI majoritaire</a:t>
+            </a:r>
+            <a:endParaRPr lang="fr-FR" sz="750" dirty="0"/>
+          </a:p>
+        </p:txBody>
+      </p:sp>
+      <p:sp>
+        <p:nvSpPr>
+          <p:cNvPr id="64" name="Shape 67">
+            <a:extLst>
+              <a:ext uri="{FF2B5EF4-FFF2-40B4-BE49-F238E27FC236}">
+                <a16:creationId xmlns:a16="http://schemas.microsoft.com/office/drawing/2014/main" id="{48DBBB5C-96E4-A109-94CF-662691719338}"/>
+              </a:ext>
+            </a:extLst>
+          </p:cNvPr>
+          <p:cNvSpPr/>
+          <p:nvPr/>
+        </p:nvSpPr>
+        <p:spPr>
+          <a:xfrm>
+            <a:off x="4170045" y="1673352"/>
+            <a:ext cx="3017520" cy="2029968"/>
+          </a:xfrm>
+          <a:prstGeom prst="rect">
+            <a:avLst/>
+          </a:prstGeom>
+          <a:solidFill>
+            <a:srgbClr val="FFFFFF"/>
+          </a:solidFill>
+          <a:ln w="19050">
+            <a:solidFill>
+              <a:srgbClr val="059669"/>
+            </a:solidFill>
+            <a:prstDash val="solid"/>
+          </a:ln>
+        </p:spPr>
+        <p:txBody>
+          <a:bodyPr/>
+          <a:lstStyle/>
+          <a:p>
+            <a:endParaRPr lang="fr-FR" dirty="0"/>
+          </a:p>
+        </p:txBody>
+      </p:sp>
+      <p:sp>
+        <p:nvSpPr>
+          <p:cNvPr id="65" name="Shape 68">
+            <a:extLst>
+              <a:ext uri="{FF2B5EF4-FFF2-40B4-BE49-F238E27FC236}">
+                <a16:creationId xmlns:a16="http://schemas.microsoft.com/office/drawing/2014/main" id="{6E4F4E85-7935-38E9-16E3-DC62B0B8020F}"/>
+              </a:ext>
+            </a:extLst>
+          </p:cNvPr>
+          <p:cNvSpPr/>
+          <p:nvPr/>
+        </p:nvSpPr>
+        <p:spPr>
+          <a:xfrm>
+            <a:off x="4170045" y="1673352"/>
+            <a:ext cx="2999232" cy="347472"/>
+          </a:xfrm>
+          <a:prstGeom prst="rect">
+            <a:avLst/>
+          </a:prstGeom>
+          <a:solidFill>
+            <a:srgbClr val="059669"/>
+          </a:solidFill>
+          <a:ln w="12700">
+            <a:solidFill>
+              <a:srgbClr val="059669"/>
+            </a:solidFill>
+            <a:prstDash val="solid"/>
+          </a:ln>
+        </p:spPr>
+        <p:txBody>
+          <a:bodyPr/>
+          <a:lstStyle/>
+          <a:p>
+            <a:endParaRPr lang="fr-FR" dirty="0"/>
+          </a:p>
+        </p:txBody>
+      </p:sp>
+      <p:sp>
+        <p:nvSpPr>
+          <p:cNvPr id="67" name="Text 70">
+            <a:extLst>
+              <a:ext uri="{FF2B5EF4-FFF2-40B4-BE49-F238E27FC236}">
+                <a16:creationId xmlns:a16="http://schemas.microsoft.com/office/drawing/2014/main" id="{88BDB46F-011A-A866-7B82-44D506D80FA4}"/>
+              </a:ext>
+            </a:extLst>
+          </p:cNvPr>
+          <p:cNvSpPr/>
+          <p:nvPr/>
+        </p:nvSpPr>
+        <p:spPr>
+          <a:xfrm>
+            <a:off x="4298061" y="1691640"/>
+            <a:ext cx="1645920" cy="310896"/>
+          </a:xfrm>
+          <a:prstGeom prst="rect">
+            <a:avLst/>
+          </a:prstGeom>
+          <a:noFill/>
+          <a:ln/>
+        </p:spPr>
+        <p:txBody>
+          <a:bodyPr wrap="square" lIns="0" tIns="0" rIns="0" bIns="0" rtlCol="0" anchor="ctr"/>
+          <a:lstStyle/>
+          <a:p>
+            <a:pPr marL="0" indent="0">
+              <a:buNone/>
+            </a:pPr>
+            <a:r>
+              <a:rPr lang="fr-FR" sz="1300" b="1" dirty="0">
+                <a:solidFill>
+                  <a:srgbClr val="FFFFFF"/>
+                </a:solidFill>
+              </a:rPr>
+              <a:t>AI Engineer (0-3ans)</a:t>
+            </a:r>
+            <a:endParaRPr lang="fr-FR" sz="1300" dirty="0"/>
+          </a:p>
+        </p:txBody>
+      </p:sp>
+      <p:sp>
+        <p:nvSpPr>
+          <p:cNvPr id="68" name="Text 71">
+            <a:extLst>
+              <a:ext uri="{FF2B5EF4-FFF2-40B4-BE49-F238E27FC236}">
+                <a16:creationId xmlns:a16="http://schemas.microsoft.com/office/drawing/2014/main" id="{77B4F3A9-4DC3-B36E-9188-6CB77CBA67A7}"/>
+              </a:ext>
+            </a:extLst>
+          </p:cNvPr>
+          <p:cNvSpPr/>
+          <p:nvPr/>
+        </p:nvSpPr>
+        <p:spPr>
+          <a:xfrm>
+            <a:off x="4193286" y="1691640"/>
+            <a:ext cx="2889504" cy="310896"/>
+          </a:xfrm>
+          <a:prstGeom prst="rect">
+            <a:avLst/>
+          </a:prstGeom>
+          <a:noFill/>
+          <a:ln/>
+        </p:spPr>
+        <p:txBody>
+          <a:bodyPr wrap="square" lIns="0" tIns="0" rIns="0" bIns="0" rtlCol="0" anchor="ctr"/>
+          <a:lstStyle/>
+          <a:p>
+            <a:pPr marL="0" indent="0" algn="r">
+              <a:buNone/>
+            </a:pPr>
+            <a:r>
+              <a:rPr lang="fr-FR" sz="750" dirty="0">
+                <a:solidFill>
+                  <a:srgbClr val="A7F3D0"/>
+                </a:solidFill>
+              </a:rPr>
+              <a:t>Salaire brut annuel K€ — TPC 2026</a:t>
+            </a:r>
+            <a:endParaRPr lang="fr-FR" sz="750" dirty="0"/>
+          </a:p>
+        </p:txBody>
+      </p:sp>
+      <p:sp>
+        <p:nvSpPr>
+          <p:cNvPr id="69" name="Shape 72">
+            <a:extLst>
+              <a:ext uri="{FF2B5EF4-FFF2-40B4-BE49-F238E27FC236}">
+                <a16:creationId xmlns:a16="http://schemas.microsoft.com/office/drawing/2014/main" id="{040EDA8C-860F-32EF-C295-00E2C9ABF9BF}"/>
+              </a:ext>
+            </a:extLst>
+          </p:cNvPr>
+          <p:cNvSpPr/>
+          <p:nvPr/>
+        </p:nvSpPr>
+        <p:spPr>
+          <a:xfrm>
+            <a:off x="4224909" y="2246757"/>
+            <a:ext cx="932688" cy="219456"/>
+          </a:xfrm>
+          <a:prstGeom prst="rect">
+            <a:avLst/>
+          </a:prstGeom>
+          <a:solidFill>
+            <a:srgbClr val="F4F6FA"/>
+          </a:solidFill>
+          <a:ln w="3810">
+            <a:solidFill>
+              <a:srgbClr val="E2E8F0"/>
+            </a:solidFill>
+            <a:prstDash val="solid"/>
+          </a:ln>
+        </p:spPr>
+        <p:txBody>
+          <a:bodyPr/>
+          <a:lstStyle/>
+          <a:p>
+            <a:endParaRPr lang="fr-FR" dirty="0"/>
+          </a:p>
+        </p:txBody>
+      </p:sp>
+      <p:sp>
+        <p:nvSpPr>
+          <p:cNvPr id="70" name="Text 73">
+            <a:extLst>
+              <a:ext uri="{FF2B5EF4-FFF2-40B4-BE49-F238E27FC236}">
+                <a16:creationId xmlns:a16="http://schemas.microsoft.com/office/drawing/2014/main" id="{1F8C1763-85AB-14FE-E89C-E22F00D9C453}"/>
+              </a:ext>
+            </a:extLst>
+          </p:cNvPr>
+          <p:cNvSpPr/>
+          <p:nvPr/>
+        </p:nvSpPr>
+        <p:spPr>
+          <a:xfrm>
+            <a:off x="4224909" y="2246757"/>
+            <a:ext cx="932688" cy="219456"/>
+          </a:xfrm>
+          <a:prstGeom prst="rect">
+            <a:avLst/>
+          </a:prstGeom>
+          <a:noFill/>
+          <a:ln/>
+        </p:spPr>
+        <p:txBody>
+          <a:bodyPr wrap="square" lIns="0" tIns="0" rIns="0" bIns="0" rtlCol="0" anchor="ctr"/>
+          <a:lstStyle/>
+          <a:p>
+            <a:pPr marL="0" indent="0" algn="ctr">
+              <a:buNone/>
+            </a:pPr>
+            <a:endParaRPr lang="fr-FR" sz="750" dirty="0"/>
+          </a:p>
+        </p:txBody>
+      </p:sp>
+      <p:sp>
+        <p:nvSpPr>
+          <p:cNvPr id="71" name="Shape 74">
+            <a:extLst>
+              <a:ext uri="{FF2B5EF4-FFF2-40B4-BE49-F238E27FC236}">
+                <a16:creationId xmlns:a16="http://schemas.microsoft.com/office/drawing/2014/main" id="{0BA6E91A-BC37-B108-FF81-4518EF31558E}"/>
+              </a:ext>
+            </a:extLst>
+          </p:cNvPr>
+          <p:cNvSpPr/>
+          <p:nvPr/>
+        </p:nvSpPr>
+        <p:spPr>
+          <a:xfrm>
+            <a:off x="5157597" y="2246757"/>
+            <a:ext cx="603504" cy="219456"/>
+          </a:xfrm>
+          <a:prstGeom prst="rect">
+            <a:avLst/>
+          </a:prstGeom>
+          <a:solidFill>
+            <a:srgbClr val="065F46"/>
+          </a:solidFill>
+          <a:ln w="3810">
+            <a:solidFill>
+              <a:srgbClr val="E2E8F0"/>
+            </a:solidFill>
+            <a:prstDash val="solid"/>
+          </a:ln>
+        </p:spPr>
+        <p:txBody>
+          <a:bodyPr/>
+          <a:lstStyle/>
+          <a:p>
+            <a:endParaRPr lang="fr-FR" dirty="0"/>
+          </a:p>
+        </p:txBody>
+      </p:sp>
+      <p:sp>
+        <p:nvSpPr>
+          <p:cNvPr id="72" name="Text 75">
+            <a:extLst>
+              <a:ext uri="{FF2B5EF4-FFF2-40B4-BE49-F238E27FC236}">
+                <a16:creationId xmlns:a16="http://schemas.microsoft.com/office/drawing/2014/main" id="{7C7D9EB4-958F-AA88-2E43-BD554884A372}"/>
+              </a:ext>
+            </a:extLst>
+          </p:cNvPr>
+          <p:cNvSpPr/>
+          <p:nvPr/>
+        </p:nvSpPr>
+        <p:spPr>
+          <a:xfrm>
+            <a:off x="5157597" y="2246757"/>
+            <a:ext cx="603504" cy="219456"/>
+          </a:xfrm>
+          <a:prstGeom prst="rect">
+            <a:avLst/>
+          </a:prstGeom>
+          <a:noFill/>
+          <a:ln/>
+        </p:spPr>
+        <p:txBody>
+          <a:bodyPr wrap="square" lIns="0" tIns="0" rIns="0" bIns="0" rtlCol="0" anchor="ctr"/>
+          <a:lstStyle/>
+          <a:p>
+            <a:pPr marL="0" indent="0" algn="ctr">
+              <a:buNone/>
+            </a:pPr>
+            <a:r>
+              <a:rPr lang="fr-FR" sz="750" b="1" dirty="0">
+                <a:solidFill>
+                  <a:srgbClr val="FFFFFF"/>
+                </a:solidFill>
+              </a:rPr>
+              <a:t>0-2 ans</a:t>
+            </a:r>
+            <a:endParaRPr lang="fr-FR" sz="750" dirty="0"/>
+          </a:p>
+        </p:txBody>
+      </p:sp>
+      <p:sp>
+        <p:nvSpPr>
+          <p:cNvPr id="73" name="Shape 76">
+            <a:extLst>
+              <a:ext uri="{FF2B5EF4-FFF2-40B4-BE49-F238E27FC236}">
+                <a16:creationId xmlns:a16="http://schemas.microsoft.com/office/drawing/2014/main" id="{496F2E8D-9C6F-F899-C14E-B9A99C284C0C}"/>
+              </a:ext>
+            </a:extLst>
+          </p:cNvPr>
+          <p:cNvSpPr/>
+          <p:nvPr/>
+        </p:nvSpPr>
+        <p:spPr>
+          <a:xfrm>
+            <a:off x="5761101" y="2246757"/>
+            <a:ext cx="603504" cy="219456"/>
+          </a:xfrm>
+          <a:prstGeom prst="rect">
+            <a:avLst/>
+          </a:prstGeom>
+          <a:solidFill>
+            <a:srgbClr val="065F46"/>
+          </a:solidFill>
+          <a:ln w="3810">
+            <a:solidFill>
+              <a:srgbClr val="E2E8F0"/>
+            </a:solidFill>
+            <a:prstDash val="solid"/>
+          </a:ln>
+        </p:spPr>
+        <p:txBody>
+          <a:bodyPr/>
+          <a:lstStyle/>
+          <a:p>
+            <a:endParaRPr lang="fr-FR" dirty="0"/>
+          </a:p>
+        </p:txBody>
+      </p:sp>
+      <p:sp>
+        <p:nvSpPr>
+          <p:cNvPr id="74" name="Text 77">
+            <a:extLst>
+              <a:ext uri="{FF2B5EF4-FFF2-40B4-BE49-F238E27FC236}">
+                <a16:creationId xmlns:a16="http://schemas.microsoft.com/office/drawing/2014/main" id="{3879734D-9B42-4E78-4A4C-61D67440490D}"/>
+              </a:ext>
+            </a:extLst>
+          </p:cNvPr>
+          <p:cNvSpPr/>
+          <p:nvPr/>
+        </p:nvSpPr>
+        <p:spPr>
+          <a:xfrm>
+            <a:off x="5761101" y="2246757"/>
+            <a:ext cx="603504" cy="219456"/>
+          </a:xfrm>
+          <a:prstGeom prst="rect">
+            <a:avLst/>
+          </a:prstGeom>
+          <a:noFill/>
+          <a:ln/>
+        </p:spPr>
+        <p:txBody>
+          <a:bodyPr wrap="square" lIns="0" tIns="0" rIns="0" bIns="0" rtlCol="0" anchor="ctr"/>
+          <a:lstStyle/>
+          <a:p>
+            <a:pPr marL="0" indent="0" algn="ctr">
+              <a:buNone/>
+            </a:pPr>
+            <a:r>
+              <a:rPr lang="fr-FR" sz="750" b="1" dirty="0">
+                <a:solidFill>
+                  <a:srgbClr val="FFFFFF"/>
+                </a:solidFill>
+              </a:rPr>
+              <a:t>3-5 ans</a:t>
+            </a:r>
+            <a:endParaRPr lang="fr-FR" sz="750" dirty="0"/>
+          </a:p>
+        </p:txBody>
+      </p:sp>
+      <p:sp>
+        <p:nvSpPr>
+          <p:cNvPr id="75" name="Shape 78">
+            <a:extLst>
+              <a:ext uri="{FF2B5EF4-FFF2-40B4-BE49-F238E27FC236}">
+                <a16:creationId xmlns:a16="http://schemas.microsoft.com/office/drawing/2014/main" id="{286AF757-2259-597D-7C6E-DBF24C5BFBED}"/>
+              </a:ext>
+            </a:extLst>
+          </p:cNvPr>
+          <p:cNvSpPr/>
+          <p:nvPr/>
+        </p:nvSpPr>
+        <p:spPr>
+          <a:xfrm>
+            <a:off x="6364605" y="2246757"/>
+            <a:ext cx="603504" cy="219456"/>
+          </a:xfrm>
+          <a:prstGeom prst="rect">
+            <a:avLst/>
+          </a:prstGeom>
+          <a:solidFill>
+            <a:srgbClr val="065F46"/>
+          </a:solidFill>
+          <a:ln w="3810">
+            <a:solidFill>
+              <a:srgbClr val="E2E8F0"/>
+            </a:solidFill>
+            <a:prstDash val="solid"/>
+          </a:ln>
+        </p:spPr>
+        <p:txBody>
+          <a:bodyPr/>
+          <a:lstStyle/>
+          <a:p>
+            <a:endParaRPr lang="fr-FR" dirty="0"/>
+          </a:p>
+        </p:txBody>
+      </p:sp>
+      <p:sp>
+        <p:nvSpPr>
+          <p:cNvPr id="76" name="Text 79">
+            <a:extLst>
+              <a:ext uri="{FF2B5EF4-FFF2-40B4-BE49-F238E27FC236}">
+                <a16:creationId xmlns:a16="http://schemas.microsoft.com/office/drawing/2014/main" id="{A707ED8A-2191-771F-0D8F-E7CDF81BC868}"/>
+              </a:ext>
+            </a:extLst>
+          </p:cNvPr>
+          <p:cNvSpPr/>
+          <p:nvPr/>
+        </p:nvSpPr>
+        <p:spPr>
+          <a:xfrm>
+            <a:off x="6364605" y="2246757"/>
+            <a:ext cx="603504" cy="219456"/>
+          </a:xfrm>
+          <a:prstGeom prst="rect">
+            <a:avLst/>
+          </a:prstGeom>
+          <a:noFill/>
+          <a:ln/>
+        </p:spPr>
+        <p:txBody>
+          <a:bodyPr wrap="square" lIns="0" tIns="0" rIns="0" bIns="0" rtlCol="0" anchor="ctr"/>
+          <a:lstStyle/>
+          <a:p>
+            <a:pPr marL="0" indent="0" algn="ctr">
+              <a:buNone/>
+            </a:pPr>
+            <a:r>
+              <a:rPr lang="fr-FR" sz="750" b="1" dirty="0">
+                <a:solidFill>
+                  <a:srgbClr val="FFFFFF"/>
+                </a:solidFill>
+              </a:rPr>
+              <a:t>6-9 ans</a:t>
+            </a:r>
+            <a:endParaRPr lang="fr-FR" sz="750" dirty="0"/>
+          </a:p>
+        </p:txBody>
+      </p:sp>
+      <p:sp>
+        <p:nvSpPr>
+          <p:cNvPr id="77" name="Shape 80">
+            <a:extLst>
+              <a:ext uri="{FF2B5EF4-FFF2-40B4-BE49-F238E27FC236}">
+                <a16:creationId xmlns:a16="http://schemas.microsoft.com/office/drawing/2014/main" id="{FB8CBC4A-FB1F-0421-0243-6D0138E3341B}"/>
+              </a:ext>
+            </a:extLst>
+          </p:cNvPr>
+          <p:cNvSpPr/>
+          <p:nvPr/>
+        </p:nvSpPr>
+        <p:spPr>
+          <a:xfrm>
+            <a:off x="4224909" y="2466213"/>
+            <a:ext cx="932688" cy="256032"/>
+          </a:xfrm>
+          <a:prstGeom prst="rect">
+            <a:avLst/>
+          </a:prstGeom>
+          <a:solidFill>
+            <a:srgbClr val="F8FAFC"/>
+          </a:solidFill>
+          <a:ln w="3810">
+            <a:solidFill>
+              <a:srgbClr val="E2E8F0"/>
+            </a:solidFill>
+            <a:prstDash val="solid"/>
+          </a:ln>
+        </p:spPr>
+        <p:txBody>
+          <a:bodyPr/>
+          <a:lstStyle/>
+          <a:p>
+            <a:endParaRPr lang="fr-FR" dirty="0"/>
+          </a:p>
+        </p:txBody>
+      </p:sp>
+      <p:sp>
+        <p:nvSpPr>
+          <p:cNvPr id="78" name="Text 81">
+            <a:extLst>
+              <a:ext uri="{FF2B5EF4-FFF2-40B4-BE49-F238E27FC236}">
+                <a16:creationId xmlns:a16="http://schemas.microsoft.com/office/drawing/2014/main" id="{9BF4FF49-53CD-8C51-16EE-C969BD2AB0B7}"/>
+              </a:ext>
+            </a:extLst>
+          </p:cNvPr>
+          <p:cNvSpPr/>
+          <p:nvPr/>
+        </p:nvSpPr>
+        <p:spPr>
+          <a:xfrm>
+            <a:off x="4263009" y="2466213"/>
+            <a:ext cx="932688" cy="256032"/>
+          </a:xfrm>
+          <a:prstGeom prst="rect">
+            <a:avLst/>
+          </a:prstGeom>
+          <a:noFill/>
+          <a:ln/>
+        </p:spPr>
+        <p:txBody>
+          <a:bodyPr wrap="square" lIns="0" tIns="50800" rIns="0" bIns="0" rtlCol="0" anchor="ctr"/>
+          <a:lstStyle/>
+          <a:p>
+            <a:pPr marL="0" indent="0" algn="l">
+              <a:buNone/>
+            </a:pPr>
+            <a:r>
+              <a:rPr lang="fr-FR" sz="780" dirty="0">
+                <a:solidFill>
+                  <a:srgbClr val="1B2A4A"/>
+                </a:solidFill>
+              </a:rPr>
+              <a:t>Paris / IDF</a:t>
+            </a:r>
+            <a:endParaRPr lang="fr-FR" sz="780" dirty="0"/>
+          </a:p>
+        </p:txBody>
+      </p:sp>
+      <p:sp>
+        <p:nvSpPr>
+          <p:cNvPr id="79" name="Shape 82">
+            <a:extLst>
+              <a:ext uri="{FF2B5EF4-FFF2-40B4-BE49-F238E27FC236}">
+                <a16:creationId xmlns:a16="http://schemas.microsoft.com/office/drawing/2014/main" id="{85911CA7-2E53-1E9A-EA56-9B788D727756}"/>
+              </a:ext>
+            </a:extLst>
+          </p:cNvPr>
+          <p:cNvSpPr/>
+          <p:nvPr/>
+        </p:nvSpPr>
+        <p:spPr>
+          <a:xfrm>
+            <a:off x="5157597" y="2466213"/>
+            <a:ext cx="603504" cy="256032"/>
+          </a:xfrm>
+          <a:prstGeom prst="rect">
+            <a:avLst/>
+          </a:prstGeom>
+          <a:solidFill>
+            <a:srgbClr val="D1FAE5"/>
+          </a:solidFill>
+          <a:ln w="3810">
+            <a:solidFill>
+              <a:srgbClr val="E2E8F0"/>
+            </a:solidFill>
+            <a:prstDash val="solid"/>
+          </a:ln>
+        </p:spPr>
+        <p:txBody>
+          <a:bodyPr/>
+          <a:lstStyle/>
+          <a:p>
+            <a:endParaRPr lang="fr-FR" dirty="0"/>
+          </a:p>
+        </p:txBody>
+      </p:sp>
+      <p:sp>
+        <p:nvSpPr>
+          <p:cNvPr id="80" name="Text 83">
+            <a:extLst>
+              <a:ext uri="{FF2B5EF4-FFF2-40B4-BE49-F238E27FC236}">
+                <a16:creationId xmlns:a16="http://schemas.microsoft.com/office/drawing/2014/main" id="{66D5651D-29F1-BF9B-767C-0AFFC4AE44A5}"/>
+              </a:ext>
+            </a:extLst>
+          </p:cNvPr>
+          <p:cNvSpPr/>
+          <p:nvPr/>
+        </p:nvSpPr>
+        <p:spPr>
+          <a:xfrm>
+            <a:off x="5157597" y="2466213"/>
+            <a:ext cx="603504" cy="256032"/>
+          </a:xfrm>
+          <a:prstGeom prst="rect">
+            <a:avLst/>
+          </a:prstGeom>
+          <a:noFill/>
+          <a:ln/>
+        </p:spPr>
+        <p:txBody>
+          <a:bodyPr wrap="square" lIns="0" tIns="0" rIns="0" bIns="0" rtlCol="0" anchor="ctr"/>
+          <a:lstStyle/>
+          <a:p>
+            <a:pPr marL="0" indent="0" algn="ctr">
+              <a:buNone/>
+            </a:pPr>
+            <a:r>
+              <a:rPr lang="fr-FR" sz="1000" b="1" dirty="0">
+                <a:solidFill>
+                  <a:srgbClr val="1B2A4A"/>
+                </a:solidFill>
+              </a:rPr>
+              <a:t>48,5</a:t>
+            </a:r>
+            <a:endParaRPr lang="fr-FR" sz="1000" dirty="0"/>
+          </a:p>
+        </p:txBody>
+      </p:sp>
+      <p:sp>
+        <p:nvSpPr>
+          <p:cNvPr id="81" name="Shape 84">
+            <a:extLst>
+              <a:ext uri="{FF2B5EF4-FFF2-40B4-BE49-F238E27FC236}">
+                <a16:creationId xmlns:a16="http://schemas.microsoft.com/office/drawing/2014/main" id="{4749F243-141E-ABBD-F7EE-0CBD14FC7887}"/>
+              </a:ext>
+            </a:extLst>
+          </p:cNvPr>
+          <p:cNvSpPr/>
+          <p:nvPr/>
+        </p:nvSpPr>
+        <p:spPr>
+          <a:xfrm>
+            <a:off x="5761101" y="2466213"/>
+            <a:ext cx="603504" cy="256032"/>
+          </a:xfrm>
+          <a:prstGeom prst="rect">
+            <a:avLst/>
+          </a:prstGeom>
+          <a:solidFill>
+            <a:srgbClr val="D1FAE5"/>
+          </a:solidFill>
+          <a:ln w="3810">
+            <a:solidFill>
+              <a:srgbClr val="E2E8F0"/>
+            </a:solidFill>
+            <a:prstDash val="solid"/>
+          </a:ln>
+        </p:spPr>
+        <p:txBody>
+          <a:bodyPr/>
+          <a:lstStyle/>
+          <a:p>
+            <a:endParaRPr lang="fr-FR" dirty="0"/>
+          </a:p>
+        </p:txBody>
+      </p:sp>
+      <p:sp>
+        <p:nvSpPr>
+          <p:cNvPr id="82" name="Text 85">
+            <a:extLst>
+              <a:ext uri="{FF2B5EF4-FFF2-40B4-BE49-F238E27FC236}">
+                <a16:creationId xmlns:a16="http://schemas.microsoft.com/office/drawing/2014/main" id="{3A1D8453-0368-AF39-7F95-DFB08674B698}"/>
+              </a:ext>
+            </a:extLst>
+          </p:cNvPr>
+          <p:cNvSpPr/>
+          <p:nvPr/>
+        </p:nvSpPr>
+        <p:spPr>
+          <a:xfrm>
+            <a:off x="5761101" y="2466213"/>
+            <a:ext cx="603504" cy="256032"/>
+          </a:xfrm>
+          <a:prstGeom prst="rect">
+            <a:avLst/>
+          </a:prstGeom>
+          <a:noFill/>
+          <a:ln/>
+        </p:spPr>
+        <p:txBody>
+          <a:bodyPr wrap="square" lIns="0" tIns="0" rIns="0" bIns="0" rtlCol="0" anchor="ctr"/>
+          <a:lstStyle/>
+          <a:p>
+            <a:pPr marL="0" indent="0" algn="ctr">
+              <a:buNone/>
+            </a:pPr>
+            <a:r>
+              <a:rPr lang="fr-FR" sz="1000" b="1" dirty="0">
+                <a:solidFill>
+                  <a:srgbClr val="1B2A4A"/>
+                </a:solidFill>
+              </a:rPr>
+              <a:t>58</a:t>
+            </a:r>
+            <a:endParaRPr lang="fr-FR" sz="1000" dirty="0"/>
+          </a:p>
+        </p:txBody>
+      </p:sp>
+      <p:sp>
+        <p:nvSpPr>
+          <p:cNvPr id="83" name="Shape 86">
+            <a:extLst>
+              <a:ext uri="{FF2B5EF4-FFF2-40B4-BE49-F238E27FC236}">
+                <a16:creationId xmlns:a16="http://schemas.microsoft.com/office/drawing/2014/main" id="{6EAAE9E4-EDD7-D955-BDFA-BB52AAE16FDB}"/>
+              </a:ext>
+            </a:extLst>
+          </p:cNvPr>
+          <p:cNvSpPr/>
+          <p:nvPr/>
+        </p:nvSpPr>
+        <p:spPr>
+          <a:xfrm>
+            <a:off x="6364605" y="2466213"/>
+            <a:ext cx="603504" cy="256032"/>
+          </a:xfrm>
+          <a:prstGeom prst="rect">
+            <a:avLst/>
+          </a:prstGeom>
+          <a:solidFill>
+            <a:srgbClr val="D1FAE5"/>
+          </a:solidFill>
+          <a:ln w="3810">
+            <a:solidFill>
+              <a:srgbClr val="E2E8F0"/>
+            </a:solidFill>
+            <a:prstDash val="solid"/>
+          </a:ln>
+        </p:spPr>
+        <p:txBody>
+          <a:bodyPr/>
+          <a:lstStyle/>
+          <a:p>
+            <a:endParaRPr lang="fr-FR" dirty="0"/>
+          </a:p>
+        </p:txBody>
+      </p:sp>
+      <p:sp>
+        <p:nvSpPr>
+          <p:cNvPr id="84" name="Text 87">
+            <a:extLst>
+              <a:ext uri="{FF2B5EF4-FFF2-40B4-BE49-F238E27FC236}">
+                <a16:creationId xmlns:a16="http://schemas.microsoft.com/office/drawing/2014/main" id="{770AB088-45B0-40D5-C647-6BF3A28F68F0}"/>
+              </a:ext>
+            </a:extLst>
+          </p:cNvPr>
+          <p:cNvSpPr/>
+          <p:nvPr/>
+        </p:nvSpPr>
+        <p:spPr>
+          <a:xfrm>
+            <a:off x="6364605" y="2466213"/>
+            <a:ext cx="603504" cy="256032"/>
+          </a:xfrm>
+          <a:prstGeom prst="rect">
+            <a:avLst/>
+          </a:prstGeom>
+          <a:noFill/>
+          <a:ln/>
+        </p:spPr>
+        <p:txBody>
+          <a:bodyPr wrap="square" lIns="0" tIns="0" rIns="0" bIns="0" rtlCol="0" anchor="ctr"/>
+          <a:lstStyle/>
+          <a:p>
+            <a:pPr marL="0" indent="0" algn="ctr">
+              <a:buNone/>
+            </a:pPr>
+            <a:r>
+              <a:rPr lang="fr-FR" sz="1000" b="1" dirty="0">
+                <a:solidFill>
+                  <a:srgbClr val="059669"/>
+                </a:solidFill>
+              </a:rPr>
+              <a:t>80</a:t>
+            </a:r>
+            <a:endParaRPr lang="fr-FR" sz="1000" dirty="0"/>
+          </a:p>
+        </p:txBody>
+      </p:sp>
+      <p:sp>
+        <p:nvSpPr>
+          <p:cNvPr id="85" name="Shape 88">
+            <a:extLst>
+              <a:ext uri="{FF2B5EF4-FFF2-40B4-BE49-F238E27FC236}">
+                <a16:creationId xmlns:a16="http://schemas.microsoft.com/office/drawing/2014/main" id="{D13CE61C-82A1-1AE0-1A43-84C5A050FFF2}"/>
+              </a:ext>
+            </a:extLst>
+          </p:cNvPr>
+          <p:cNvSpPr/>
+          <p:nvPr/>
+        </p:nvSpPr>
+        <p:spPr>
+          <a:xfrm>
+            <a:off x="4224909" y="2722245"/>
+            <a:ext cx="932688" cy="256032"/>
+          </a:xfrm>
+          <a:prstGeom prst="rect">
+            <a:avLst/>
+          </a:prstGeom>
+          <a:solidFill>
+            <a:srgbClr val="F8FAFC"/>
+          </a:solidFill>
+          <a:ln w="3810">
+            <a:solidFill>
+              <a:srgbClr val="E2E8F0"/>
+            </a:solidFill>
+            <a:prstDash val="solid"/>
+          </a:ln>
+        </p:spPr>
+        <p:txBody>
+          <a:bodyPr/>
+          <a:lstStyle/>
+          <a:p>
+            <a:endParaRPr lang="fr-FR" dirty="0"/>
+          </a:p>
+        </p:txBody>
+      </p:sp>
+      <p:sp>
+        <p:nvSpPr>
+          <p:cNvPr id="86" name="Text 89">
+            <a:extLst>
+              <a:ext uri="{FF2B5EF4-FFF2-40B4-BE49-F238E27FC236}">
+                <a16:creationId xmlns:a16="http://schemas.microsoft.com/office/drawing/2014/main" id="{007B8D27-C3F4-20F3-BB86-26C392C6FFBA}"/>
+              </a:ext>
+            </a:extLst>
+          </p:cNvPr>
+          <p:cNvSpPr/>
+          <p:nvPr/>
+        </p:nvSpPr>
+        <p:spPr>
+          <a:xfrm>
+            <a:off x="4253484" y="2722245"/>
+            <a:ext cx="932688" cy="256032"/>
+          </a:xfrm>
+          <a:prstGeom prst="rect">
+            <a:avLst/>
+          </a:prstGeom>
+          <a:noFill/>
+          <a:ln/>
+        </p:spPr>
+        <p:txBody>
+          <a:bodyPr wrap="square" lIns="0" tIns="50800" rIns="0" bIns="0" rtlCol="0" anchor="ctr"/>
+          <a:lstStyle/>
+          <a:p>
+            <a:pPr marL="0" indent="0" algn="l">
+              <a:buNone/>
+            </a:pPr>
+            <a:r>
+              <a:rPr lang="fr-FR" sz="780" dirty="0">
+                <a:solidFill>
+                  <a:srgbClr val="1B2A4A"/>
+                </a:solidFill>
+              </a:rPr>
+              <a:t>Autres villes</a:t>
+            </a:r>
+            <a:endParaRPr lang="fr-FR" sz="780" dirty="0"/>
+          </a:p>
+        </p:txBody>
+      </p:sp>
+      <p:sp>
+        <p:nvSpPr>
+          <p:cNvPr id="87" name="Shape 90">
+            <a:extLst>
+              <a:ext uri="{FF2B5EF4-FFF2-40B4-BE49-F238E27FC236}">
+                <a16:creationId xmlns:a16="http://schemas.microsoft.com/office/drawing/2014/main" id="{65BBE9B8-6222-E476-5F7E-25852B2A791D}"/>
+              </a:ext>
+            </a:extLst>
+          </p:cNvPr>
+          <p:cNvSpPr/>
+          <p:nvPr/>
+        </p:nvSpPr>
+        <p:spPr>
+          <a:xfrm>
+            <a:off x="5157597" y="2722245"/>
+            <a:ext cx="603504" cy="256032"/>
+          </a:xfrm>
+          <a:prstGeom prst="rect">
+            <a:avLst/>
+          </a:prstGeom>
+          <a:solidFill>
+            <a:srgbClr val="FFFFFF"/>
+          </a:solidFill>
+          <a:ln w="3810">
+            <a:solidFill>
+              <a:srgbClr val="E2E8F0"/>
+            </a:solidFill>
+            <a:prstDash val="solid"/>
+          </a:ln>
+        </p:spPr>
+        <p:txBody>
+          <a:bodyPr/>
+          <a:lstStyle/>
+          <a:p>
+            <a:endParaRPr lang="fr-FR" dirty="0"/>
+          </a:p>
+        </p:txBody>
+      </p:sp>
+      <p:sp>
+        <p:nvSpPr>
+          <p:cNvPr id="88" name="Text 91">
+            <a:extLst>
+              <a:ext uri="{FF2B5EF4-FFF2-40B4-BE49-F238E27FC236}">
+                <a16:creationId xmlns:a16="http://schemas.microsoft.com/office/drawing/2014/main" id="{FD475116-9570-2B3A-BDBD-1AC13F83D9AF}"/>
+              </a:ext>
+            </a:extLst>
+          </p:cNvPr>
+          <p:cNvSpPr/>
+          <p:nvPr/>
+        </p:nvSpPr>
+        <p:spPr>
+          <a:xfrm>
+            <a:off x="5157597" y="2722245"/>
+            <a:ext cx="603504" cy="256032"/>
+          </a:xfrm>
+          <a:prstGeom prst="rect">
+            <a:avLst/>
+          </a:prstGeom>
+          <a:noFill/>
+          <a:ln/>
+        </p:spPr>
+        <p:txBody>
+          <a:bodyPr wrap="square" lIns="0" tIns="0" rIns="0" bIns="0" rtlCol="0" anchor="ctr"/>
+          <a:lstStyle/>
+          <a:p>
+            <a:pPr marL="0" indent="0" algn="ctr">
+              <a:buNone/>
+            </a:pPr>
+            <a:r>
+              <a:rPr lang="fr-FR" sz="1000" b="1" dirty="0">
+                <a:solidFill>
+                  <a:srgbClr val="1B2A4A"/>
+                </a:solidFill>
+              </a:rPr>
+              <a:t>42</a:t>
+            </a:r>
+            <a:endParaRPr lang="fr-FR" sz="1000" dirty="0"/>
+          </a:p>
+        </p:txBody>
+      </p:sp>
+      <p:sp>
+        <p:nvSpPr>
+          <p:cNvPr id="89" name="Shape 92">
+            <a:extLst>
+              <a:ext uri="{FF2B5EF4-FFF2-40B4-BE49-F238E27FC236}">
+                <a16:creationId xmlns:a16="http://schemas.microsoft.com/office/drawing/2014/main" id="{FCE410D8-F334-B4D6-2F42-64F37EF5A220}"/>
+              </a:ext>
+            </a:extLst>
+          </p:cNvPr>
+          <p:cNvSpPr/>
+          <p:nvPr/>
+        </p:nvSpPr>
+        <p:spPr>
+          <a:xfrm>
+            <a:off x="5761101" y="2722245"/>
+            <a:ext cx="603504" cy="256032"/>
+          </a:xfrm>
+          <a:prstGeom prst="rect">
+            <a:avLst/>
+          </a:prstGeom>
+          <a:solidFill>
+            <a:srgbClr val="FFFFFF"/>
+          </a:solidFill>
+          <a:ln w="3810">
+            <a:solidFill>
+              <a:srgbClr val="E2E8F0"/>
+            </a:solidFill>
+            <a:prstDash val="solid"/>
+          </a:ln>
+        </p:spPr>
+        <p:txBody>
+          <a:bodyPr/>
+          <a:lstStyle/>
+          <a:p>
+            <a:endParaRPr lang="fr-FR" dirty="0"/>
+          </a:p>
+        </p:txBody>
+      </p:sp>
+      <p:sp>
+        <p:nvSpPr>
+          <p:cNvPr id="90" name="Text 93">
+            <a:extLst>
+              <a:ext uri="{FF2B5EF4-FFF2-40B4-BE49-F238E27FC236}">
+                <a16:creationId xmlns:a16="http://schemas.microsoft.com/office/drawing/2014/main" id="{8FE76DF1-0533-F2E4-5110-60B9AD55A4E1}"/>
+              </a:ext>
+            </a:extLst>
+          </p:cNvPr>
+          <p:cNvSpPr/>
+          <p:nvPr/>
+        </p:nvSpPr>
+        <p:spPr>
+          <a:xfrm>
+            <a:off x="5761101" y="2722245"/>
+            <a:ext cx="603504" cy="256032"/>
+          </a:xfrm>
+          <a:prstGeom prst="rect">
+            <a:avLst/>
+          </a:prstGeom>
+          <a:noFill/>
+          <a:ln/>
+        </p:spPr>
+        <p:txBody>
+          <a:bodyPr wrap="square" lIns="0" tIns="0" rIns="0" bIns="0" rtlCol="0" anchor="ctr"/>
+          <a:lstStyle/>
+          <a:p>
+            <a:pPr marL="0" indent="0" algn="ctr">
+              <a:buNone/>
+            </a:pPr>
+            <a:r>
+              <a:rPr lang="fr-FR" sz="1000" b="1" dirty="0">
+                <a:solidFill>
+                  <a:srgbClr val="1B2A4A"/>
+                </a:solidFill>
+              </a:rPr>
+              <a:t>49,2</a:t>
+            </a:r>
+            <a:endParaRPr lang="fr-FR" sz="1000" dirty="0"/>
+          </a:p>
+        </p:txBody>
+      </p:sp>
+      <p:sp>
+        <p:nvSpPr>
+          <p:cNvPr id="91" name="Shape 94">
+            <a:extLst>
+              <a:ext uri="{FF2B5EF4-FFF2-40B4-BE49-F238E27FC236}">
+                <a16:creationId xmlns:a16="http://schemas.microsoft.com/office/drawing/2014/main" id="{F95EBB8A-990E-389E-AE32-C551C9FD95F2}"/>
+              </a:ext>
+            </a:extLst>
+          </p:cNvPr>
+          <p:cNvSpPr/>
+          <p:nvPr/>
+        </p:nvSpPr>
+        <p:spPr>
+          <a:xfrm>
+            <a:off x="6364605" y="2722245"/>
+            <a:ext cx="603504" cy="256032"/>
+          </a:xfrm>
+          <a:prstGeom prst="rect">
+            <a:avLst/>
+          </a:prstGeom>
+          <a:solidFill>
+            <a:srgbClr val="FFFFFF"/>
+          </a:solidFill>
+          <a:ln w="3810">
+            <a:solidFill>
+              <a:srgbClr val="E2E8F0"/>
+            </a:solidFill>
+            <a:prstDash val="solid"/>
+          </a:ln>
+        </p:spPr>
+        <p:txBody>
+          <a:bodyPr/>
+          <a:lstStyle/>
+          <a:p>
+            <a:endParaRPr lang="fr-FR" dirty="0"/>
+          </a:p>
+        </p:txBody>
+      </p:sp>
+      <p:sp>
+        <p:nvSpPr>
+          <p:cNvPr id="92" name="Text 95">
+            <a:extLst>
+              <a:ext uri="{FF2B5EF4-FFF2-40B4-BE49-F238E27FC236}">
+                <a16:creationId xmlns:a16="http://schemas.microsoft.com/office/drawing/2014/main" id="{043A15EF-2D59-03F9-9BCF-8DA5581A9506}"/>
+              </a:ext>
+            </a:extLst>
+          </p:cNvPr>
+          <p:cNvSpPr/>
+          <p:nvPr/>
+        </p:nvSpPr>
+        <p:spPr>
+          <a:xfrm>
+            <a:off x="6364605" y="2722245"/>
+            <a:ext cx="603504" cy="256032"/>
+          </a:xfrm>
+          <a:prstGeom prst="rect">
+            <a:avLst/>
+          </a:prstGeom>
+          <a:noFill/>
+          <a:ln/>
+        </p:spPr>
+        <p:txBody>
+          <a:bodyPr wrap="square" lIns="0" tIns="0" rIns="0" bIns="0" rtlCol="0" anchor="ctr"/>
+          <a:lstStyle/>
+          <a:p>
+            <a:pPr marL="0" indent="0" algn="ctr">
+              <a:buNone/>
+            </a:pPr>
+            <a:r>
+              <a:rPr lang="fr-FR" sz="1000" b="1" dirty="0">
+                <a:solidFill>
+                  <a:srgbClr val="059669"/>
+                </a:solidFill>
+              </a:rPr>
+              <a:t>55,5</a:t>
+            </a:r>
+            <a:endParaRPr lang="fr-FR" sz="1000" dirty="0"/>
+          </a:p>
+        </p:txBody>
+      </p:sp>
+      <p:sp>
+        <p:nvSpPr>
+          <p:cNvPr id="93" name="Shape 96">
+            <a:extLst>
+              <a:ext uri="{FF2B5EF4-FFF2-40B4-BE49-F238E27FC236}">
+                <a16:creationId xmlns:a16="http://schemas.microsoft.com/office/drawing/2014/main" id="{93E1B6AE-5E65-D302-0D2D-4D913009265A}"/>
+              </a:ext>
+            </a:extLst>
+          </p:cNvPr>
+          <p:cNvSpPr/>
+          <p:nvPr/>
+        </p:nvSpPr>
+        <p:spPr>
+          <a:xfrm>
+            <a:off x="4224909" y="3014853"/>
+            <a:ext cx="2889504" cy="219456"/>
+          </a:xfrm>
+          <a:prstGeom prst="rect">
+            <a:avLst/>
+          </a:prstGeom>
+          <a:solidFill>
+            <a:srgbClr val="D1FAE5"/>
+          </a:solidFill>
+          <a:ln w="6350">
+            <a:solidFill>
+              <a:srgbClr val="059669"/>
+            </a:solidFill>
+            <a:prstDash val="solid"/>
+          </a:ln>
+        </p:spPr>
+        <p:txBody>
+          <a:bodyPr/>
+          <a:lstStyle/>
+          <a:p>
+            <a:endParaRPr lang="fr-FR" dirty="0"/>
+          </a:p>
+        </p:txBody>
+      </p:sp>
+      <p:sp>
+        <p:nvSpPr>
+          <p:cNvPr id="94" name="Text 97">
+            <a:extLst>
+              <a:ext uri="{FF2B5EF4-FFF2-40B4-BE49-F238E27FC236}">
+                <a16:creationId xmlns:a16="http://schemas.microsoft.com/office/drawing/2014/main" id="{A25F9C41-E79C-19C6-F60A-4C180B68380C}"/>
+              </a:ext>
+            </a:extLst>
+          </p:cNvPr>
+          <p:cNvSpPr/>
+          <p:nvPr/>
+        </p:nvSpPr>
+        <p:spPr>
+          <a:xfrm>
+            <a:off x="4224909" y="3014853"/>
+            <a:ext cx="2889504" cy="219456"/>
+          </a:xfrm>
+          <a:prstGeom prst="rect">
+            <a:avLst/>
+          </a:prstGeom>
+          <a:noFill/>
+          <a:ln/>
+        </p:spPr>
+        <p:txBody>
+          <a:bodyPr wrap="square" lIns="0" tIns="0" rIns="0" bIns="0" rtlCol="0" anchor="ctr"/>
+          <a:lstStyle/>
+          <a:p>
+            <a:pPr marL="0" indent="0" algn="ctr">
+              <a:buNone/>
+            </a:pPr>
+            <a:r>
+              <a:rPr lang="fr-FR" sz="750" b="1" dirty="0">
+                <a:solidFill>
+                  <a:srgbClr val="059669"/>
+                </a:solidFill>
+              </a:rPr>
+              <a:t>Variable : 6-8%  </a:t>
+            </a:r>
+            <a:r>
+              <a:rPr lang="fr-FR" sz="750" dirty="0">
+                <a:solidFill>
+                  <a:srgbClr val="CBD5E1"/>
+                </a:solidFill>
+              </a:rPr>
+              <a:t> | </a:t>
+            </a:r>
+            <a:r>
+              <a:rPr lang="fr-FR" sz="750" b="1" dirty="0">
+                <a:solidFill>
+                  <a:srgbClr val="2D4A7A"/>
+                </a:solidFill>
+              </a:rPr>
+              <a:t>  BSPCE : 16-44%</a:t>
+            </a:r>
+            <a:endParaRPr lang="fr-FR" sz="750" dirty="0"/>
+          </a:p>
+        </p:txBody>
+      </p:sp>
+      <p:sp>
+        <p:nvSpPr>
+          <p:cNvPr id="95" name="Shape 98">
+            <a:extLst>
+              <a:ext uri="{FF2B5EF4-FFF2-40B4-BE49-F238E27FC236}">
+                <a16:creationId xmlns:a16="http://schemas.microsoft.com/office/drawing/2014/main" id="{1CA536FB-BB2B-8EA9-F01A-F80B93068F40}"/>
+              </a:ext>
+            </a:extLst>
+          </p:cNvPr>
+          <p:cNvSpPr/>
+          <p:nvPr/>
+        </p:nvSpPr>
+        <p:spPr>
+          <a:xfrm>
+            <a:off x="7242429" y="1673352"/>
+            <a:ext cx="1901952" cy="2029968"/>
+          </a:xfrm>
+          <a:prstGeom prst="rect">
+            <a:avLst/>
+          </a:prstGeom>
+          <a:solidFill>
+            <a:srgbClr val="FFFFFF"/>
+          </a:solidFill>
+          <a:ln w="10160">
+            <a:solidFill>
+              <a:srgbClr val="E2E8F0"/>
+            </a:solidFill>
+            <a:prstDash val="solid"/>
+          </a:ln>
+        </p:spPr>
+        <p:txBody>
+          <a:bodyPr/>
+          <a:lstStyle/>
+          <a:p>
+            <a:endParaRPr lang="fr-FR" dirty="0"/>
+          </a:p>
+        </p:txBody>
+      </p:sp>
+      <p:sp>
+        <p:nvSpPr>
+          <p:cNvPr id="96" name="Shape 99">
+            <a:extLst>
+              <a:ext uri="{FF2B5EF4-FFF2-40B4-BE49-F238E27FC236}">
+                <a16:creationId xmlns:a16="http://schemas.microsoft.com/office/drawing/2014/main" id="{20148CA4-28EA-3916-29FE-8116FF8936B1}"/>
+              </a:ext>
+            </a:extLst>
+          </p:cNvPr>
+          <p:cNvSpPr/>
+          <p:nvPr/>
+        </p:nvSpPr>
+        <p:spPr>
+          <a:xfrm>
+            <a:off x="7242429" y="1673352"/>
+            <a:ext cx="1828800" cy="310896"/>
+          </a:xfrm>
+          <a:prstGeom prst="rect">
+            <a:avLst/>
+          </a:prstGeom>
+          <a:solidFill>
+            <a:srgbClr val="1B2A4A"/>
+          </a:solidFill>
+          <a:ln w="12700">
+            <a:solidFill>
+              <a:srgbClr val="1B2A4A"/>
+            </a:solidFill>
+            <a:prstDash val="solid"/>
+          </a:ln>
+        </p:spPr>
+        <p:txBody>
+          <a:bodyPr/>
+          <a:lstStyle/>
+          <a:p>
+            <a:endParaRPr lang="fr-FR" dirty="0"/>
+          </a:p>
+        </p:txBody>
+      </p:sp>
+      <p:sp>
+        <p:nvSpPr>
+          <p:cNvPr id="98" name="Text 101">
+            <a:extLst>
+              <a:ext uri="{FF2B5EF4-FFF2-40B4-BE49-F238E27FC236}">
+                <a16:creationId xmlns:a16="http://schemas.microsoft.com/office/drawing/2014/main" id="{E1D66226-6F31-9764-CBDE-147CE3070F82}"/>
+              </a:ext>
+            </a:extLst>
+          </p:cNvPr>
+          <p:cNvSpPr/>
+          <p:nvPr/>
+        </p:nvSpPr>
+        <p:spPr>
+          <a:xfrm>
+            <a:off x="7333869" y="1673352"/>
+            <a:ext cx="1719072" cy="310896"/>
+          </a:xfrm>
+          <a:prstGeom prst="rect">
+            <a:avLst/>
+          </a:prstGeom>
+          <a:noFill/>
+          <a:ln/>
+        </p:spPr>
+        <p:txBody>
+          <a:bodyPr wrap="square" lIns="0" tIns="0" rIns="0" bIns="0" rtlCol="0" anchor="ctr"/>
+          <a:lstStyle/>
+          <a:p>
+            <a:pPr marL="0" indent="0" algn="ctr">
+              <a:buNone/>
+            </a:pPr>
+            <a:r>
+              <a:rPr lang="fr-FR" sz="850" b="1" kern="0" spc="150" dirty="0">
+                <a:solidFill>
+                  <a:srgbClr val="FFFFFF"/>
+                </a:solidFill>
+              </a:rPr>
+              <a:t>STRUCTURES VISÉES</a:t>
+            </a:r>
+            <a:endParaRPr lang="fr-FR" sz="850" dirty="0"/>
+          </a:p>
+        </p:txBody>
+      </p:sp>
+      <p:sp>
+        <p:nvSpPr>
+          <p:cNvPr id="99" name="Shape 102">
+            <a:extLst>
+              <a:ext uri="{FF2B5EF4-FFF2-40B4-BE49-F238E27FC236}">
+                <a16:creationId xmlns:a16="http://schemas.microsoft.com/office/drawing/2014/main" id="{1551FE98-F8AC-4BDA-60CA-BB66B1E5EC04}"/>
+              </a:ext>
+            </a:extLst>
+          </p:cNvPr>
+          <p:cNvSpPr/>
+          <p:nvPr/>
+        </p:nvSpPr>
+        <p:spPr>
+          <a:xfrm>
+            <a:off x="7315581" y="2039112"/>
+            <a:ext cx="1755648" cy="274320"/>
+          </a:xfrm>
+          <a:prstGeom prst="rect">
+            <a:avLst/>
+          </a:prstGeom>
+          <a:solidFill>
+            <a:srgbClr val="E0F2FE"/>
+          </a:solidFill>
+          <a:ln w="10160">
+            <a:solidFill>
+              <a:srgbClr val="0891B2"/>
+            </a:solidFill>
+            <a:prstDash val="solid"/>
+          </a:ln>
+        </p:spPr>
+        <p:txBody>
+          <a:bodyPr/>
+          <a:lstStyle/>
+          <a:p>
+            <a:endParaRPr lang="fr-FR" dirty="0"/>
+          </a:p>
+        </p:txBody>
+      </p:sp>
+      <p:sp>
+        <p:nvSpPr>
+          <p:cNvPr id="100" name="Text 103">
+            <a:extLst>
+              <a:ext uri="{FF2B5EF4-FFF2-40B4-BE49-F238E27FC236}">
+                <a16:creationId xmlns:a16="http://schemas.microsoft.com/office/drawing/2014/main" id="{F649CD9B-7FCC-36DF-5E6C-3F3C88F7A65A}"/>
+              </a:ext>
+            </a:extLst>
+          </p:cNvPr>
+          <p:cNvSpPr/>
+          <p:nvPr/>
+        </p:nvSpPr>
+        <p:spPr>
+          <a:xfrm>
+            <a:off x="7352157" y="2039112"/>
+            <a:ext cx="1682496" cy="274320"/>
+          </a:xfrm>
+          <a:prstGeom prst="rect">
+            <a:avLst/>
+          </a:prstGeom>
+          <a:noFill/>
+          <a:ln/>
+        </p:spPr>
+        <p:txBody>
+          <a:bodyPr wrap="square" lIns="0" tIns="0" rIns="0" bIns="0" rtlCol="0" anchor="ctr"/>
+          <a:lstStyle/>
+          <a:p>
+            <a:pPr marL="0" indent="0">
+              <a:buNone/>
+            </a:pPr>
+            <a:r>
+              <a:rPr lang="fr-FR" sz="800" b="1" dirty="0">
+                <a:solidFill>
+                  <a:srgbClr val="0891B2"/>
+                </a:solidFill>
+              </a:rPr>
+              <a:t>★ INSERM / CNRS</a:t>
+            </a:r>
+            <a:endParaRPr lang="fr-FR" sz="800" dirty="0"/>
+          </a:p>
+          <a:p>
+            <a:pPr marL="0" indent="0">
+              <a:buNone/>
+            </a:pPr>
+            <a:r>
+              <a:rPr lang="fr-FR" sz="680" dirty="0">
+                <a:solidFill>
+                  <a:srgbClr val="64748B"/>
+                </a:solidFill>
+              </a:rPr>
+              <a:t>Horigene actif — réseau direct</a:t>
+            </a:r>
+            <a:endParaRPr lang="fr-FR" sz="800" dirty="0"/>
+          </a:p>
+        </p:txBody>
+      </p:sp>
+      <p:sp>
+        <p:nvSpPr>
+          <p:cNvPr id="101" name="Shape 104">
+            <a:extLst>
+              <a:ext uri="{FF2B5EF4-FFF2-40B4-BE49-F238E27FC236}">
+                <a16:creationId xmlns:a16="http://schemas.microsoft.com/office/drawing/2014/main" id="{F875AF88-AAEA-2DA7-A72D-A3966727E7F8}"/>
+              </a:ext>
+            </a:extLst>
+          </p:cNvPr>
+          <p:cNvSpPr/>
+          <p:nvPr/>
+        </p:nvSpPr>
+        <p:spPr>
+          <a:xfrm>
+            <a:off x="7315581" y="2368296"/>
+            <a:ext cx="1755648" cy="274320"/>
+          </a:xfrm>
+          <a:prstGeom prst="rect">
+            <a:avLst/>
+          </a:prstGeom>
+          <a:solidFill>
+            <a:srgbClr val="FFFFFF"/>
+          </a:solidFill>
+          <a:ln w="3810">
+            <a:solidFill>
+              <a:srgbClr val="E2E8F0"/>
+            </a:solidFill>
+            <a:prstDash val="solid"/>
+          </a:ln>
+        </p:spPr>
+        <p:txBody>
+          <a:bodyPr/>
+          <a:lstStyle/>
+          <a:p>
+            <a:endParaRPr lang="fr-FR" dirty="0"/>
+          </a:p>
+        </p:txBody>
+      </p:sp>
+      <p:sp>
+        <p:nvSpPr>
+          <p:cNvPr id="102" name="Text 105">
+            <a:extLst>
+              <a:ext uri="{FF2B5EF4-FFF2-40B4-BE49-F238E27FC236}">
+                <a16:creationId xmlns:a16="http://schemas.microsoft.com/office/drawing/2014/main" id="{A3EC7F0C-9B36-45CA-BB6A-AAB4144D6735}"/>
+              </a:ext>
+            </a:extLst>
+          </p:cNvPr>
+          <p:cNvSpPr/>
+          <p:nvPr/>
+        </p:nvSpPr>
+        <p:spPr>
+          <a:xfrm>
+            <a:off x="7352157" y="2368296"/>
+            <a:ext cx="1682496" cy="274320"/>
+          </a:xfrm>
+          <a:prstGeom prst="rect">
+            <a:avLst/>
+          </a:prstGeom>
+          <a:noFill/>
+          <a:ln/>
+        </p:spPr>
+        <p:txBody>
+          <a:bodyPr wrap="square" lIns="0" tIns="0" rIns="0" bIns="0" rtlCol="0" anchor="ctr"/>
+          <a:lstStyle/>
+          <a:p>
+            <a:pPr marL="0" indent="0">
+              <a:buNone/>
+            </a:pPr>
+            <a:r>
+              <a:rPr lang="fr-FR" sz="800" b="1" dirty="0">
+                <a:solidFill>
+                  <a:srgbClr val="1B2A4A"/>
+                </a:solidFill>
+              </a:rPr>
+              <a:t>▸ Biotech / Pharma</a:t>
+            </a:r>
+            <a:endParaRPr lang="fr-FR" sz="800" dirty="0"/>
+          </a:p>
+          <a:p>
+            <a:pPr marL="0" indent="0">
+              <a:buNone/>
+            </a:pPr>
+            <a:r>
+              <a:rPr lang="fr-FR" sz="680" dirty="0" err="1">
+                <a:solidFill>
+                  <a:srgbClr val="64748B"/>
+                </a:solidFill>
+              </a:rPr>
+              <a:t>Biomérieux</a:t>
+            </a:r>
+            <a:r>
+              <a:rPr lang="fr-FR" sz="680" dirty="0">
+                <a:solidFill>
+                  <a:srgbClr val="64748B"/>
+                </a:solidFill>
+              </a:rPr>
+              <a:t> · Sanofi · Ipsen</a:t>
+            </a:r>
+            <a:endParaRPr lang="fr-FR" sz="800" dirty="0"/>
+          </a:p>
+        </p:txBody>
+      </p:sp>
+      <p:sp>
+        <p:nvSpPr>
+          <p:cNvPr id="103" name="Shape 106">
+            <a:extLst>
+              <a:ext uri="{FF2B5EF4-FFF2-40B4-BE49-F238E27FC236}">
+                <a16:creationId xmlns:a16="http://schemas.microsoft.com/office/drawing/2014/main" id="{C2C6BB76-4E6E-675B-268B-915A45F74E96}"/>
+              </a:ext>
+            </a:extLst>
+          </p:cNvPr>
+          <p:cNvSpPr/>
+          <p:nvPr/>
+        </p:nvSpPr>
+        <p:spPr>
+          <a:xfrm>
+            <a:off x="7315581" y="2697480"/>
+            <a:ext cx="1755648" cy="274320"/>
+          </a:xfrm>
+          <a:prstGeom prst="rect">
+            <a:avLst/>
+          </a:prstGeom>
+          <a:solidFill>
+            <a:srgbClr val="F8FAFC"/>
+          </a:solidFill>
+          <a:ln w="3810">
+            <a:solidFill>
+              <a:srgbClr val="E2E8F0"/>
+            </a:solidFill>
+            <a:prstDash val="solid"/>
+          </a:ln>
+        </p:spPr>
+        <p:txBody>
+          <a:bodyPr/>
+          <a:lstStyle/>
+          <a:p>
+            <a:endParaRPr lang="fr-FR" dirty="0"/>
+          </a:p>
+        </p:txBody>
+      </p:sp>
+      <p:sp>
+        <p:nvSpPr>
+          <p:cNvPr id="104" name="Text 107">
+            <a:extLst>
+              <a:ext uri="{FF2B5EF4-FFF2-40B4-BE49-F238E27FC236}">
+                <a16:creationId xmlns:a16="http://schemas.microsoft.com/office/drawing/2014/main" id="{BC81A37A-F137-270B-AC57-726660230F1C}"/>
+              </a:ext>
+            </a:extLst>
+          </p:cNvPr>
+          <p:cNvSpPr/>
+          <p:nvPr/>
+        </p:nvSpPr>
+        <p:spPr>
+          <a:xfrm>
+            <a:off x="7352157" y="2697480"/>
+            <a:ext cx="1682496" cy="274320"/>
+          </a:xfrm>
+          <a:prstGeom prst="rect">
+            <a:avLst/>
+          </a:prstGeom>
+          <a:noFill/>
+          <a:ln/>
+        </p:spPr>
+        <p:txBody>
+          <a:bodyPr wrap="square" lIns="0" tIns="0" rIns="0" bIns="0" rtlCol="0" anchor="ctr"/>
+          <a:lstStyle/>
+          <a:p>
+            <a:pPr marL="0" indent="0">
+              <a:buNone/>
+            </a:pPr>
+            <a:r>
+              <a:rPr lang="fr-FR" sz="800" b="1" dirty="0">
+                <a:solidFill>
+                  <a:srgbClr val="1B2A4A"/>
+                </a:solidFill>
+              </a:rPr>
+              <a:t>▸ Startups </a:t>
+            </a:r>
+            <a:r>
+              <a:rPr lang="fr-FR" sz="800" b="1" dirty="0" err="1">
+                <a:solidFill>
+                  <a:srgbClr val="1B2A4A"/>
+                </a:solidFill>
+              </a:rPr>
+              <a:t>Healthtech</a:t>
+            </a:r>
+            <a:endParaRPr lang="fr-FR" sz="800" dirty="0"/>
+          </a:p>
+          <a:p>
+            <a:pPr marL="0" indent="0">
+              <a:buNone/>
+            </a:pPr>
+            <a:r>
+              <a:rPr lang="fr-FR" sz="680" dirty="0" err="1">
+                <a:solidFill>
+                  <a:srgbClr val="64748B"/>
+                </a:solidFill>
+              </a:rPr>
+              <a:t>Owkin</a:t>
+            </a:r>
+            <a:r>
+              <a:rPr lang="fr-FR" sz="680" dirty="0">
+                <a:solidFill>
+                  <a:srgbClr val="64748B"/>
+                </a:solidFill>
+              </a:rPr>
+              <a:t> · </a:t>
+            </a:r>
+            <a:r>
+              <a:rPr lang="fr-FR" sz="680" dirty="0" err="1">
+                <a:solidFill>
+                  <a:srgbClr val="64748B"/>
+                </a:solidFill>
+              </a:rPr>
+              <a:t>Nexomis</a:t>
+            </a:r>
+            <a:r>
+              <a:rPr lang="fr-FR" sz="680" dirty="0">
+                <a:solidFill>
+                  <a:srgbClr val="64748B"/>
+                </a:solidFill>
+              </a:rPr>
+              <a:t> · </a:t>
+            </a:r>
+            <a:r>
+              <a:rPr lang="fr-FR" sz="680" dirty="0" err="1">
+                <a:solidFill>
+                  <a:srgbClr val="64748B"/>
+                </a:solidFill>
+              </a:rPr>
+              <a:t>BioSerenity</a:t>
+            </a:r>
+            <a:endParaRPr lang="fr-FR" sz="800" dirty="0"/>
+          </a:p>
+        </p:txBody>
+      </p:sp>
+      <p:sp>
+        <p:nvSpPr>
+          <p:cNvPr id="105" name="Shape 108">
+            <a:extLst>
+              <a:ext uri="{FF2B5EF4-FFF2-40B4-BE49-F238E27FC236}">
+                <a16:creationId xmlns:a16="http://schemas.microsoft.com/office/drawing/2014/main" id="{A76522B1-6C1F-8782-5601-D5357B2E3A18}"/>
+              </a:ext>
+            </a:extLst>
+          </p:cNvPr>
+          <p:cNvSpPr/>
+          <p:nvPr/>
+        </p:nvSpPr>
+        <p:spPr>
+          <a:xfrm>
+            <a:off x="7315581" y="3026664"/>
+            <a:ext cx="1755648" cy="274320"/>
+          </a:xfrm>
+          <a:prstGeom prst="rect">
+            <a:avLst/>
+          </a:prstGeom>
+          <a:solidFill>
+            <a:srgbClr val="FFFFFF"/>
+          </a:solidFill>
+          <a:ln w="3810">
+            <a:solidFill>
+              <a:srgbClr val="E2E8F0"/>
+            </a:solidFill>
+            <a:prstDash val="solid"/>
+          </a:ln>
+        </p:spPr>
+        <p:txBody>
+          <a:bodyPr/>
+          <a:lstStyle/>
+          <a:p>
+            <a:endParaRPr lang="fr-FR" dirty="0"/>
+          </a:p>
+        </p:txBody>
+      </p:sp>
+      <p:sp>
+        <p:nvSpPr>
+          <p:cNvPr id="106" name="Text 109">
+            <a:extLst>
+              <a:ext uri="{FF2B5EF4-FFF2-40B4-BE49-F238E27FC236}">
+                <a16:creationId xmlns:a16="http://schemas.microsoft.com/office/drawing/2014/main" id="{9CE4FACB-D1F9-3285-06A6-4C79216C3595}"/>
+              </a:ext>
+            </a:extLst>
+          </p:cNvPr>
+          <p:cNvSpPr/>
+          <p:nvPr/>
+        </p:nvSpPr>
+        <p:spPr>
+          <a:xfrm>
+            <a:off x="7352157" y="3026664"/>
+            <a:ext cx="1682496" cy="274320"/>
+          </a:xfrm>
+          <a:prstGeom prst="rect">
+            <a:avLst/>
+          </a:prstGeom>
+          <a:noFill/>
+          <a:ln/>
+        </p:spPr>
+        <p:txBody>
+          <a:bodyPr wrap="square" lIns="0" tIns="0" rIns="0" bIns="0" rtlCol="0" anchor="ctr"/>
+          <a:lstStyle/>
+          <a:p>
+            <a:pPr marL="0" indent="0">
+              <a:buNone/>
+            </a:pPr>
+            <a:r>
+              <a:rPr lang="fr-FR" sz="800" b="1" dirty="0">
+                <a:solidFill>
+                  <a:srgbClr val="1B2A4A"/>
+                </a:solidFill>
+              </a:rPr>
+              <a:t>▸ Plateformes bio-info</a:t>
+            </a:r>
+            <a:endParaRPr lang="fr-FR" sz="800" dirty="0"/>
+          </a:p>
+          <a:p>
+            <a:pPr marL="0" indent="0">
+              <a:buNone/>
+            </a:pPr>
+            <a:r>
+              <a:rPr lang="fr-FR" sz="680" dirty="0">
+                <a:solidFill>
+                  <a:srgbClr val="64748B"/>
+                </a:solidFill>
+              </a:rPr>
+              <a:t>IFB · GenoToul · PRABI</a:t>
+            </a:r>
+            <a:endParaRPr lang="fr-FR" sz="800" dirty="0"/>
+          </a:p>
+        </p:txBody>
+      </p:sp>
+      <p:sp>
+        <p:nvSpPr>
+          <p:cNvPr id="107" name="Shape 110">
+            <a:extLst>
+              <a:ext uri="{FF2B5EF4-FFF2-40B4-BE49-F238E27FC236}">
+                <a16:creationId xmlns:a16="http://schemas.microsoft.com/office/drawing/2014/main" id="{5014FFC1-AD54-FE8D-9B10-877BF7E79690}"/>
+              </a:ext>
+            </a:extLst>
+          </p:cNvPr>
+          <p:cNvSpPr/>
+          <p:nvPr/>
+        </p:nvSpPr>
+        <p:spPr>
+          <a:xfrm>
+            <a:off x="7315581" y="3355848"/>
+            <a:ext cx="1755648" cy="274320"/>
+          </a:xfrm>
+          <a:prstGeom prst="rect">
+            <a:avLst/>
+          </a:prstGeom>
+          <a:solidFill>
+            <a:srgbClr val="F8FAFC"/>
+          </a:solidFill>
+          <a:ln w="3810">
+            <a:solidFill>
+              <a:srgbClr val="E2E8F0"/>
+            </a:solidFill>
+            <a:prstDash val="solid"/>
+          </a:ln>
+        </p:spPr>
+        <p:txBody>
+          <a:bodyPr/>
+          <a:lstStyle/>
+          <a:p>
+            <a:endParaRPr lang="fr-FR" dirty="0"/>
+          </a:p>
+        </p:txBody>
+      </p:sp>
+      <p:sp>
+        <p:nvSpPr>
+          <p:cNvPr id="108" name="Text 111">
+            <a:extLst>
+              <a:ext uri="{FF2B5EF4-FFF2-40B4-BE49-F238E27FC236}">
+                <a16:creationId xmlns:a16="http://schemas.microsoft.com/office/drawing/2014/main" id="{14230BF9-7E39-D8ED-ED9D-7C3BB5945C19}"/>
+              </a:ext>
+            </a:extLst>
+          </p:cNvPr>
+          <p:cNvSpPr/>
+          <p:nvPr/>
+        </p:nvSpPr>
+        <p:spPr>
+          <a:xfrm>
+            <a:off x="7352157" y="3355848"/>
+            <a:ext cx="1682496" cy="274320"/>
+          </a:xfrm>
+          <a:prstGeom prst="rect">
+            <a:avLst/>
+          </a:prstGeom>
+          <a:noFill/>
+          <a:ln/>
+        </p:spPr>
+        <p:txBody>
+          <a:bodyPr wrap="square" lIns="0" tIns="0" rIns="0" bIns="0" rtlCol="0" anchor="ctr"/>
+          <a:lstStyle/>
+          <a:p>
+            <a:pPr marL="0" indent="0">
+              <a:buNone/>
+            </a:pPr>
+            <a:r>
+              <a:rPr lang="fr-FR" sz="800" b="1" dirty="0">
+                <a:solidFill>
+                  <a:srgbClr val="1B2A4A"/>
+                </a:solidFill>
+              </a:rPr>
+              <a:t>▸ CHU / Hôpitaux</a:t>
+            </a:r>
+            <a:endParaRPr lang="fr-FR" sz="800" dirty="0"/>
+          </a:p>
+          <a:p>
+            <a:pPr marL="0" indent="0">
+              <a:buNone/>
+            </a:pPr>
+            <a:r>
+              <a:rPr lang="fr-FR" sz="680" dirty="0">
+                <a:solidFill>
+                  <a:srgbClr val="64748B"/>
+                </a:solidFill>
+              </a:rPr>
+              <a:t>Bio-info clinique &amp; génomique</a:t>
+            </a:r>
+            <a:endParaRPr lang="fr-FR" sz="800" dirty="0"/>
+          </a:p>
+        </p:txBody>
+      </p:sp>
+      <p:sp>
+        <p:nvSpPr>
+          <p:cNvPr id="109" name="Shape 112">
+            <a:extLst>
+              <a:ext uri="{FF2B5EF4-FFF2-40B4-BE49-F238E27FC236}">
+                <a16:creationId xmlns:a16="http://schemas.microsoft.com/office/drawing/2014/main" id="{5E35157D-7137-AEF3-84D0-1BEDD221F341}"/>
+              </a:ext>
+            </a:extLst>
+          </p:cNvPr>
+          <p:cNvSpPr/>
+          <p:nvPr/>
+        </p:nvSpPr>
+        <p:spPr>
+          <a:xfrm>
+            <a:off x="109728" y="3785616"/>
+            <a:ext cx="8924544" cy="1234440"/>
+          </a:xfrm>
+          <a:prstGeom prst="rect">
+            <a:avLst/>
+          </a:prstGeom>
+          <a:solidFill>
+            <a:srgbClr val="FFFFFF"/>
+          </a:solidFill>
+          <a:ln w="10160">
+            <a:solidFill>
+              <a:srgbClr val="E2E8F0"/>
+            </a:solidFill>
+            <a:prstDash val="solid"/>
+          </a:ln>
+        </p:spPr>
+        <p:txBody>
+          <a:bodyPr/>
+          <a:lstStyle/>
+          <a:p>
+            <a:endParaRPr lang="fr-FR" dirty="0"/>
+          </a:p>
+        </p:txBody>
+      </p:sp>
+      <p:sp>
+        <p:nvSpPr>
+          <p:cNvPr id="110" name="Shape 113">
+            <a:extLst>
+              <a:ext uri="{FF2B5EF4-FFF2-40B4-BE49-F238E27FC236}">
+                <a16:creationId xmlns:a16="http://schemas.microsoft.com/office/drawing/2014/main" id="{33196749-C398-EB99-F9A7-4B50A289C67B}"/>
+              </a:ext>
+            </a:extLst>
+          </p:cNvPr>
+          <p:cNvSpPr/>
+          <p:nvPr/>
+        </p:nvSpPr>
+        <p:spPr>
+          <a:xfrm>
+            <a:off x="109728" y="3785616"/>
+            <a:ext cx="8924544" cy="292608"/>
+          </a:xfrm>
+          <a:prstGeom prst="rect">
+            <a:avLst/>
+          </a:prstGeom>
+          <a:solidFill>
+            <a:srgbClr val="7C3AED"/>
+          </a:solidFill>
+          <a:ln w="12700">
+            <a:solidFill>
+              <a:srgbClr val="7C3AED"/>
+            </a:solidFill>
+            <a:prstDash val="solid"/>
+          </a:ln>
+        </p:spPr>
+        <p:txBody>
+          <a:bodyPr/>
+          <a:lstStyle/>
+          <a:p>
+            <a:pPr algn="ctr"/>
+            <a:endParaRPr lang="fr-FR" dirty="0"/>
+          </a:p>
+        </p:txBody>
+      </p:sp>
+      <p:sp>
+        <p:nvSpPr>
+          <p:cNvPr id="111" name="Shape 114">
+            <a:extLst>
+              <a:ext uri="{FF2B5EF4-FFF2-40B4-BE49-F238E27FC236}">
+                <a16:creationId xmlns:a16="http://schemas.microsoft.com/office/drawing/2014/main" id="{5A830B06-A3BB-70A3-D30C-1243CB0DEA5B}"/>
+              </a:ext>
+            </a:extLst>
+          </p:cNvPr>
+          <p:cNvSpPr/>
+          <p:nvPr/>
+        </p:nvSpPr>
+        <p:spPr>
+          <a:xfrm>
+            <a:off x="109728" y="3950208"/>
+            <a:ext cx="8924544" cy="128016"/>
+          </a:xfrm>
+          <a:prstGeom prst="rect">
+            <a:avLst/>
+          </a:prstGeom>
+          <a:solidFill>
+            <a:srgbClr val="7C3AED"/>
+          </a:solidFill>
+          <a:ln w="12700">
+            <a:solidFill>
+              <a:srgbClr val="7C3AED"/>
+            </a:solidFill>
+            <a:prstDash val="solid"/>
+          </a:ln>
+        </p:spPr>
+        <p:txBody>
+          <a:bodyPr/>
+          <a:lstStyle/>
+          <a:p>
+            <a:endParaRPr lang="fr-FR" dirty="0"/>
+          </a:p>
+        </p:txBody>
+      </p:sp>
+      <p:sp>
+        <p:nvSpPr>
+          <p:cNvPr id="112" name="Text 115">
+            <a:extLst>
+              <a:ext uri="{FF2B5EF4-FFF2-40B4-BE49-F238E27FC236}">
+                <a16:creationId xmlns:a16="http://schemas.microsoft.com/office/drawing/2014/main" id="{B087C84E-944B-FD57-1C5F-C550B7F89E40}"/>
+              </a:ext>
+            </a:extLst>
+          </p:cNvPr>
+          <p:cNvSpPr/>
+          <p:nvPr/>
+        </p:nvSpPr>
+        <p:spPr>
+          <a:xfrm>
+            <a:off x="109728" y="3785616"/>
+            <a:ext cx="8833104" cy="292608"/>
+          </a:xfrm>
+          <a:prstGeom prst="rect">
+            <a:avLst/>
+          </a:prstGeom>
+          <a:noFill/>
+          <a:ln/>
+        </p:spPr>
+        <p:txBody>
+          <a:bodyPr wrap="square" lIns="0" tIns="0" rIns="0" bIns="0" rtlCol="0" anchor="ctr"/>
+          <a:lstStyle/>
+          <a:p>
+            <a:pPr marL="0" indent="0" algn="ctr">
+              <a:buNone/>
+            </a:pPr>
+            <a:r>
+              <a:rPr lang="fr-FR" sz="900" b="1" kern="0" spc="100" dirty="0">
+                <a:solidFill>
+                  <a:srgbClr val="FFFFFF"/>
+                </a:solidFill>
+              </a:rPr>
+              <a:t>PROSPECTION RÉALISTE — Stratégie de recherche d'emploi</a:t>
+            </a:r>
+            <a:endParaRPr lang="fr-FR" sz="900" dirty="0"/>
+          </a:p>
+        </p:txBody>
+      </p:sp>
+      <p:sp>
+        <p:nvSpPr>
+          <p:cNvPr id="113" name="Shape 116">
+            <a:extLst>
+              <a:ext uri="{FF2B5EF4-FFF2-40B4-BE49-F238E27FC236}">
+                <a16:creationId xmlns:a16="http://schemas.microsoft.com/office/drawing/2014/main" id="{3020150B-E6F1-6E03-7DD7-0548043C38C4}"/>
+              </a:ext>
+            </a:extLst>
+          </p:cNvPr>
+          <p:cNvSpPr/>
+          <p:nvPr/>
+        </p:nvSpPr>
+        <p:spPr>
+          <a:xfrm>
+            <a:off x="182880" y="4133088"/>
+            <a:ext cx="2176272" cy="813816"/>
+          </a:xfrm>
+          <a:prstGeom prst="rect">
+            <a:avLst/>
+          </a:prstGeom>
+          <a:solidFill>
+            <a:srgbClr val="E0F2FE"/>
+          </a:solidFill>
+          <a:ln w="10160">
+            <a:solidFill>
+              <a:srgbClr val="0891B2"/>
+            </a:solidFill>
+            <a:prstDash val="solid"/>
+          </a:ln>
+        </p:spPr>
+        <p:txBody>
+          <a:bodyPr/>
+          <a:lstStyle/>
+          <a:p>
+            <a:endParaRPr lang="fr-FR" sz="1000" dirty="0"/>
+          </a:p>
+        </p:txBody>
+      </p:sp>
+      <p:sp>
+        <p:nvSpPr>
+          <p:cNvPr id="114" name="Shape 117">
+            <a:extLst>
+              <a:ext uri="{FF2B5EF4-FFF2-40B4-BE49-F238E27FC236}">
+                <a16:creationId xmlns:a16="http://schemas.microsoft.com/office/drawing/2014/main" id="{572CCF38-CDA0-CEEA-C54F-3290BB65CC90}"/>
+              </a:ext>
+            </a:extLst>
+          </p:cNvPr>
+          <p:cNvSpPr/>
+          <p:nvPr/>
+        </p:nvSpPr>
+        <p:spPr>
+          <a:xfrm>
+            <a:off x="182880" y="4133088"/>
+            <a:ext cx="45720" cy="813816"/>
+          </a:xfrm>
+          <a:prstGeom prst="rect">
+            <a:avLst/>
+          </a:prstGeom>
+          <a:solidFill>
+            <a:srgbClr val="0891B2"/>
+          </a:solidFill>
+          <a:ln w="12700">
+            <a:solidFill>
+              <a:srgbClr val="0891B2"/>
+            </a:solidFill>
+            <a:prstDash val="solid"/>
+          </a:ln>
+        </p:spPr>
+        <p:txBody>
+          <a:bodyPr/>
+          <a:lstStyle/>
+          <a:p>
+            <a:endParaRPr lang="fr-FR" sz="1000" dirty="0"/>
+          </a:p>
+        </p:txBody>
+      </p:sp>
+      <p:sp>
+        <p:nvSpPr>
+          <p:cNvPr id="115" name="Text 118">
+            <a:extLst>
+              <a:ext uri="{FF2B5EF4-FFF2-40B4-BE49-F238E27FC236}">
+                <a16:creationId xmlns:a16="http://schemas.microsoft.com/office/drawing/2014/main" id="{BDD7F8A9-21E6-F915-EEF2-7CC3BE930975}"/>
+              </a:ext>
+            </a:extLst>
+          </p:cNvPr>
+          <p:cNvSpPr/>
+          <p:nvPr/>
+        </p:nvSpPr>
+        <p:spPr>
+          <a:xfrm>
+            <a:off x="274320" y="4133088"/>
+            <a:ext cx="2048256" cy="813816"/>
+          </a:xfrm>
+          <a:prstGeom prst="rect">
+            <a:avLst/>
+          </a:prstGeom>
+          <a:noFill/>
+          <a:ln/>
+        </p:spPr>
+        <p:txBody>
+          <a:bodyPr wrap="square" lIns="0" tIns="0" rIns="0" bIns="0" rtlCol="0" anchor="ctr"/>
+          <a:lstStyle/>
+          <a:p>
+            <a:pPr marL="0" indent="0">
+              <a:buNone/>
+            </a:pPr>
+            <a:r>
+              <a:rPr lang="fr-FR" sz="1000" b="1" dirty="0">
+                <a:solidFill>
+                  <a:srgbClr val="0891B2"/>
+                </a:solidFill>
+              </a:rPr>
+              <a:t>🔗 Réseau CIRI / INSERM</a:t>
+            </a:r>
+            <a:endParaRPr lang="fr-FR" sz="1000" dirty="0"/>
+          </a:p>
+          <a:p>
+            <a:pPr marL="0" indent="0">
+              <a:buNone/>
+            </a:pPr>
+            <a:r>
+              <a:rPr lang="fr-FR" sz="1000" dirty="0">
+                <a:solidFill>
+                  <a:srgbClr val="1B2A4A"/>
+                </a:solidFill>
+              </a:rPr>
+              <a:t>J</a:t>
+            </a:r>
+          </a:p>
+          <a:p>
+            <a:pPr marL="0" indent="0">
+              <a:buNone/>
+            </a:pPr>
+            <a:r>
+              <a:rPr lang="fr-FR" sz="1000" dirty="0" err="1">
+                <a:solidFill>
+                  <a:srgbClr val="1B2A4A"/>
+                </a:solidFill>
+              </a:rPr>
+              <a:t>ulien</a:t>
+            </a:r>
+            <a:r>
+              <a:rPr lang="fr-FR" sz="1000" dirty="0">
+                <a:solidFill>
+                  <a:srgbClr val="1B2A4A"/>
+                </a:solidFill>
+              </a:rPr>
+              <a:t> </a:t>
+            </a:r>
+            <a:r>
+              <a:rPr lang="fr-FR" sz="1000" dirty="0" err="1">
+                <a:solidFill>
+                  <a:srgbClr val="1B2A4A"/>
+                </a:solidFill>
+              </a:rPr>
+              <a:t>Fouret</a:t>
+            </a:r>
+            <a:r>
+              <a:rPr lang="fr-FR" sz="1000" dirty="0">
+                <a:solidFill>
+                  <a:srgbClr val="1B2A4A"/>
+                </a:solidFill>
+              </a:rPr>
+              <a:t>, Xavier Charpentier</a:t>
+            </a:r>
+            <a:endParaRPr lang="fr-FR" sz="1000" dirty="0"/>
+          </a:p>
+          <a:p>
+            <a:pPr marL="0" indent="0">
+              <a:buNone/>
+            </a:pPr>
+            <a:r>
+              <a:rPr lang="fr-FR" sz="1000" dirty="0">
+                <a:solidFill>
+                  <a:srgbClr val="64748B"/>
+                </a:solidFill>
+              </a:rPr>
+              <a:t>Candidatures directes unités Lyon</a:t>
+            </a:r>
+            <a:endParaRPr lang="fr-FR" sz="1000" dirty="0"/>
+          </a:p>
+        </p:txBody>
+      </p:sp>
+      <p:sp>
+        <p:nvSpPr>
+          <p:cNvPr id="116" name="Shape 119">
+            <a:extLst>
+              <a:ext uri="{FF2B5EF4-FFF2-40B4-BE49-F238E27FC236}">
+                <a16:creationId xmlns:a16="http://schemas.microsoft.com/office/drawing/2014/main" id="{55506D30-BC5B-5C13-E349-BA626E214BE6}"/>
+              </a:ext>
+            </a:extLst>
+          </p:cNvPr>
+          <p:cNvSpPr/>
+          <p:nvPr/>
+        </p:nvSpPr>
+        <p:spPr>
+          <a:xfrm>
+            <a:off x="2414016" y="4133088"/>
+            <a:ext cx="2176272" cy="813816"/>
+          </a:xfrm>
+          <a:prstGeom prst="rect">
+            <a:avLst/>
+          </a:prstGeom>
+          <a:solidFill>
+            <a:srgbClr val="F0F4FF"/>
+          </a:solidFill>
+          <a:ln w="10160">
+            <a:solidFill>
+              <a:srgbClr val="2D4A7A"/>
+            </a:solidFill>
+            <a:prstDash val="solid"/>
+          </a:ln>
+        </p:spPr>
+        <p:txBody>
+          <a:bodyPr/>
+          <a:lstStyle/>
+          <a:p>
+            <a:endParaRPr lang="fr-FR" sz="1000" dirty="0"/>
+          </a:p>
+        </p:txBody>
+      </p:sp>
+      <p:sp>
+        <p:nvSpPr>
+          <p:cNvPr id="117" name="Shape 120">
+            <a:extLst>
+              <a:ext uri="{FF2B5EF4-FFF2-40B4-BE49-F238E27FC236}">
+                <a16:creationId xmlns:a16="http://schemas.microsoft.com/office/drawing/2014/main" id="{25ACC8DF-9273-96EF-46D8-CFF1F7F6AC12}"/>
+              </a:ext>
+            </a:extLst>
+          </p:cNvPr>
+          <p:cNvSpPr/>
+          <p:nvPr/>
+        </p:nvSpPr>
+        <p:spPr>
+          <a:xfrm>
+            <a:off x="2414016" y="4133088"/>
+            <a:ext cx="45720" cy="813816"/>
+          </a:xfrm>
+          <a:prstGeom prst="rect">
+            <a:avLst/>
+          </a:prstGeom>
+          <a:solidFill>
+            <a:srgbClr val="2D4A7A"/>
+          </a:solidFill>
+          <a:ln w="12700">
+            <a:solidFill>
+              <a:srgbClr val="2D4A7A"/>
+            </a:solidFill>
+            <a:prstDash val="solid"/>
+          </a:ln>
+        </p:spPr>
+        <p:txBody>
+          <a:bodyPr/>
+          <a:lstStyle/>
+          <a:p>
+            <a:endParaRPr lang="fr-FR" sz="1000" dirty="0"/>
+          </a:p>
+        </p:txBody>
+      </p:sp>
+      <p:sp>
+        <p:nvSpPr>
+          <p:cNvPr id="118" name="Text 121">
+            <a:extLst>
+              <a:ext uri="{FF2B5EF4-FFF2-40B4-BE49-F238E27FC236}">
+                <a16:creationId xmlns:a16="http://schemas.microsoft.com/office/drawing/2014/main" id="{76E19974-0374-D5C1-46F0-F02883E0146C}"/>
+              </a:ext>
+            </a:extLst>
+          </p:cNvPr>
+          <p:cNvSpPr/>
+          <p:nvPr/>
+        </p:nvSpPr>
+        <p:spPr>
+          <a:xfrm>
+            <a:off x="2505456" y="4133088"/>
+            <a:ext cx="2048256" cy="813816"/>
+          </a:xfrm>
+          <a:prstGeom prst="rect">
+            <a:avLst/>
+          </a:prstGeom>
+          <a:noFill/>
+          <a:ln/>
+        </p:spPr>
+        <p:txBody>
+          <a:bodyPr wrap="square" lIns="0" tIns="0" rIns="0" bIns="0" rtlCol="0" anchor="ctr"/>
+          <a:lstStyle/>
+          <a:p>
+            <a:pPr marL="0" indent="0">
+              <a:buNone/>
+            </a:pPr>
+            <a:r>
+              <a:rPr lang="fr-FR" sz="1000" b="1" dirty="0">
+                <a:solidFill>
+                  <a:srgbClr val="2D4A7A"/>
+                </a:solidFill>
+              </a:rPr>
+              <a:t>💻 Portfolio technique</a:t>
+            </a:r>
+            <a:endParaRPr lang="fr-FR" sz="1000" dirty="0"/>
+          </a:p>
+          <a:p>
+            <a:pPr marL="0" indent="0">
+              <a:buNone/>
+            </a:pPr>
+            <a:endParaRPr lang="fr-FR" sz="1000" dirty="0">
+              <a:solidFill>
+                <a:srgbClr val="1B2A4A"/>
+              </a:solidFill>
+            </a:endParaRPr>
+          </a:p>
+          <a:p>
+            <a:pPr marL="0" indent="0">
+              <a:buNone/>
+            </a:pPr>
+            <a:r>
+              <a:rPr lang="fr-FR" sz="1000" dirty="0">
+                <a:solidFill>
+                  <a:srgbClr val="1B2A4A"/>
+                </a:solidFill>
+              </a:rPr>
+              <a:t>GitHub public Strain(+)</a:t>
+            </a:r>
+            <a:r>
+              <a:rPr lang="fr-FR" sz="1000" dirty="0" err="1">
+                <a:solidFill>
+                  <a:srgbClr val="1B2A4A"/>
+                </a:solidFill>
+              </a:rPr>
+              <a:t>Lab</a:t>
+            </a:r>
+            <a:endParaRPr lang="fr-FR" sz="1000" dirty="0"/>
+          </a:p>
+          <a:p>
+            <a:pPr marL="0" indent="0">
+              <a:buNone/>
+            </a:pPr>
+            <a:r>
+              <a:rPr lang="fr-FR" sz="1000" dirty="0">
+                <a:solidFill>
+                  <a:srgbClr val="64748B"/>
+                </a:solidFill>
+              </a:rPr>
+              <a:t>CI/CD · docs · démo live</a:t>
+            </a:r>
+            <a:endParaRPr lang="fr-FR" sz="1000" dirty="0"/>
+          </a:p>
+        </p:txBody>
+      </p:sp>
+      <p:sp>
+        <p:nvSpPr>
+          <p:cNvPr id="119" name="Shape 122">
+            <a:extLst>
+              <a:ext uri="{FF2B5EF4-FFF2-40B4-BE49-F238E27FC236}">
+                <a16:creationId xmlns:a16="http://schemas.microsoft.com/office/drawing/2014/main" id="{0EF0E456-5EC8-F266-C286-FBDF001F1BCD}"/>
+              </a:ext>
+            </a:extLst>
+          </p:cNvPr>
+          <p:cNvSpPr/>
+          <p:nvPr/>
+        </p:nvSpPr>
+        <p:spPr>
+          <a:xfrm>
+            <a:off x="4645152" y="4133088"/>
+            <a:ext cx="2176272" cy="813816"/>
+          </a:xfrm>
+          <a:prstGeom prst="rect">
+            <a:avLst/>
+          </a:prstGeom>
+          <a:solidFill>
+            <a:srgbClr val="FFF7ED"/>
+          </a:solidFill>
+          <a:ln w="10160">
+            <a:solidFill>
+              <a:srgbClr val="EA580C"/>
+            </a:solidFill>
+            <a:prstDash val="solid"/>
+          </a:ln>
+        </p:spPr>
+        <p:txBody>
+          <a:bodyPr/>
+          <a:lstStyle/>
+          <a:p>
+            <a:endParaRPr lang="fr-FR" sz="1000" dirty="0"/>
+          </a:p>
+        </p:txBody>
+      </p:sp>
+      <p:sp>
+        <p:nvSpPr>
+          <p:cNvPr id="120" name="Shape 123">
+            <a:extLst>
+              <a:ext uri="{FF2B5EF4-FFF2-40B4-BE49-F238E27FC236}">
+                <a16:creationId xmlns:a16="http://schemas.microsoft.com/office/drawing/2014/main" id="{781FFE71-8188-CA8A-DAEC-EB36A85B8E5C}"/>
+              </a:ext>
+            </a:extLst>
+          </p:cNvPr>
+          <p:cNvSpPr/>
+          <p:nvPr/>
+        </p:nvSpPr>
+        <p:spPr>
+          <a:xfrm>
+            <a:off x="4645152" y="4133088"/>
+            <a:ext cx="45720" cy="813816"/>
+          </a:xfrm>
+          <a:prstGeom prst="rect">
+            <a:avLst/>
+          </a:prstGeom>
+          <a:solidFill>
+            <a:srgbClr val="EA580C"/>
+          </a:solidFill>
+          <a:ln w="12700">
+            <a:solidFill>
+              <a:srgbClr val="EA580C"/>
+            </a:solidFill>
+            <a:prstDash val="solid"/>
+          </a:ln>
+        </p:spPr>
+        <p:txBody>
+          <a:bodyPr/>
+          <a:lstStyle/>
+          <a:p>
+            <a:endParaRPr lang="fr-FR" sz="1000" dirty="0"/>
+          </a:p>
+        </p:txBody>
+      </p:sp>
+      <p:sp>
+        <p:nvSpPr>
+          <p:cNvPr id="121" name="Text 124">
+            <a:extLst>
+              <a:ext uri="{FF2B5EF4-FFF2-40B4-BE49-F238E27FC236}">
+                <a16:creationId xmlns:a16="http://schemas.microsoft.com/office/drawing/2014/main" id="{C471FC28-D446-4344-7E0A-72653D033291}"/>
+              </a:ext>
+            </a:extLst>
+          </p:cNvPr>
+          <p:cNvSpPr/>
+          <p:nvPr/>
+        </p:nvSpPr>
+        <p:spPr>
+          <a:xfrm>
+            <a:off x="4736592" y="4133088"/>
+            <a:ext cx="2048256" cy="813816"/>
+          </a:xfrm>
+          <a:prstGeom prst="rect">
+            <a:avLst/>
+          </a:prstGeom>
+          <a:noFill/>
+          <a:ln/>
+        </p:spPr>
+        <p:txBody>
+          <a:bodyPr wrap="square" lIns="0" tIns="0" rIns="0" bIns="0" rtlCol="0" anchor="ctr"/>
+          <a:lstStyle/>
+          <a:p>
+            <a:pPr marL="0" indent="0">
+              <a:buNone/>
+            </a:pPr>
+            <a:r>
+              <a:rPr lang="fr-FR" sz="1000" b="1" dirty="0">
+                <a:solidFill>
+                  <a:srgbClr val="EA580C"/>
+                </a:solidFill>
+              </a:rPr>
+              <a:t>📋 Plateformes ciblées</a:t>
+            </a:r>
+            <a:endParaRPr lang="fr-FR" sz="1000" dirty="0"/>
+          </a:p>
+          <a:p>
+            <a:pPr marL="0" indent="0">
+              <a:buNone/>
+            </a:pPr>
+            <a:endParaRPr lang="fr-FR" sz="1000" dirty="0">
+              <a:solidFill>
+                <a:srgbClr val="1B2A4A"/>
+              </a:solidFill>
+            </a:endParaRPr>
+          </a:p>
+          <a:p>
+            <a:pPr marL="0" indent="0">
+              <a:buNone/>
+            </a:pPr>
+            <a:r>
+              <a:rPr lang="fr-FR" sz="1000" dirty="0">
+                <a:solidFill>
+                  <a:srgbClr val="1B2A4A"/>
+                </a:solidFill>
+              </a:rPr>
+              <a:t>offres.sfbi.fr · emploi.cnrs.fr</a:t>
+            </a:r>
+            <a:endParaRPr lang="fr-FR" sz="1000" dirty="0"/>
+          </a:p>
+          <a:p>
+            <a:pPr marL="0" indent="0">
+              <a:buNone/>
+            </a:pPr>
+            <a:r>
+              <a:rPr lang="fr-FR" sz="1000" dirty="0">
+                <a:solidFill>
+                  <a:srgbClr val="64748B"/>
+                </a:solidFill>
+              </a:rPr>
+              <a:t>LinkedIn · APEC · EURES</a:t>
+            </a:r>
+            <a:endParaRPr lang="fr-FR" sz="1000" dirty="0"/>
+          </a:p>
+        </p:txBody>
+      </p:sp>
+      <p:sp>
+        <p:nvSpPr>
+          <p:cNvPr id="122" name="Shape 125">
+            <a:extLst>
+              <a:ext uri="{FF2B5EF4-FFF2-40B4-BE49-F238E27FC236}">
+                <a16:creationId xmlns:a16="http://schemas.microsoft.com/office/drawing/2014/main" id="{DFE07F0B-3C2E-7FB0-1DDB-3590F07183A9}"/>
+              </a:ext>
+            </a:extLst>
+          </p:cNvPr>
+          <p:cNvSpPr/>
+          <p:nvPr/>
+        </p:nvSpPr>
+        <p:spPr>
+          <a:xfrm>
+            <a:off x="6876288" y="4133088"/>
+            <a:ext cx="2176272" cy="813816"/>
+          </a:xfrm>
+          <a:prstGeom prst="rect">
+            <a:avLst/>
+          </a:prstGeom>
+          <a:solidFill>
+            <a:srgbClr val="D1FAE5"/>
+          </a:solidFill>
+          <a:ln w="10160">
+            <a:solidFill>
+              <a:srgbClr val="059669"/>
+            </a:solidFill>
+            <a:prstDash val="solid"/>
+          </a:ln>
+        </p:spPr>
+        <p:txBody>
+          <a:bodyPr/>
+          <a:lstStyle/>
+          <a:p>
+            <a:endParaRPr lang="fr-FR" sz="1000" dirty="0"/>
+          </a:p>
+        </p:txBody>
+      </p:sp>
+      <p:sp>
+        <p:nvSpPr>
+          <p:cNvPr id="123" name="Shape 126">
+            <a:extLst>
+              <a:ext uri="{FF2B5EF4-FFF2-40B4-BE49-F238E27FC236}">
+                <a16:creationId xmlns:a16="http://schemas.microsoft.com/office/drawing/2014/main" id="{8B57B748-ADF8-34BD-6314-0306DAFBFB28}"/>
+              </a:ext>
+            </a:extLst>
+          </p:cNvPr>
+          <p:cNvSpPr/>
+          <p:nvPr/>
+        </p:nvSpPr>
+        <p:spPr>
+          <a:xfrm>
+            <a:off x="6876288" y="4133088"/>
+            <a:ext cx="45720" cy="813816"/>
+          </a:xfrm>
+          <a:prstGeom prst="rect">
+            <a:avLst/>
+          </a:prstGeom>
+          <a:solidFill>
+            <a:srgbClr val="059669"/>
+          </a:solidFill>
+          <a:ln w="12700">
+            <a:solidFill>
+              <a:srgbClr val="059669"/>
+            </a:solidFill>
+            <a:prstDash val="solid"/>
+          </a:ln>
+        </p:spPr>
+        <p:txBody>
+          <a:bodyPr/>
+          <a:lstStyle/>
+          <a:p>
+            <a:endParaRPr lang="fr-FR" sz="1000" dirty="0"/>
+          </a:p>
+        </p:txBody>
+      </p:sp>
+      <p:sp>
+        <p:nvSpPr>
+          <p:cNvPr id="124" name="Text 127">
+            <a:extLst>
+              <a:ext uri="{FF2B5EF4-FFF2-40B4-BE49-F238E27FC236}">
+                <a16:creationId xmlns:a16="http://schemas.microsoft.com/office/drawing/2014/main" id="{B3078E3A-57E1-2CA9-7B19-7773A51C3EF4}"/>
+              </a:ext>
+            </a:extLst>
+          </p:cNvPr>
+          <p:cNvSpPr/>
+          <p:nvPr/>
+        </p:nvSpPr>
+        <p:spPr>
+          <a:xfrm>
+            <a:off x="6967728" y="4133088"/>
+            <a:ext cx="2048256" cy="813816"/>
+          </a:xfrm>
+          <a:prstGeom prst="rect">
+            <a:avLst/>
+          </a:prstGeom>
+          <a:noFill/>
+          <a:ln/>
+        </p:spPr>
+        <p:txBody>
+          <a:bodyPr wrap="square" lIns="0" tIns="0" rIns="0" bIns="0" rtlCol="0" anchor="ctr"/>
+          <a:lstStyle/>
+          <a:p>
+            <a:pPr marL="0" indent="0">
+              <a:buNone/>
+            </a:pPr>
+            <a:r>
+              <a:rPr lang="fr-FR" sz="1000" b="1" dirty="0">
+                <a:solidFill>
+                  <a:srgbClr val="059669"/>
+                </a:solidFill>
+              </a:rPr>
+              <a:t>🚀 Candidatures spontanées</a:t>
+            </a:r>
+            <a:endParaRPr lang="fr-FR" sz="1000" dirty="0"/>
+          </a:p>
+          <a:p>
+            <a:pPr marL="0" indent="0">
+              <a:buNone/>
+            </a:pPr>
+            <a:endParaRPr lang="fr-FR" sz="1000" dirty="0">
+              <a:solidFill>
+                <a:srgbClr val="1B2A4A"/>
+              </a:solidFill>
+            </a:endParaRPr>
+          </a:p>
+          <a:p>
+            <a:pPr marL="0" indent="0">
+              <a:buNone/>
+            </a:pPr>
+            <a:r>
+              <a:rPr lang="fr-FR" sz="1000" dirty="0" err="1">
+                <a:solidFill>
+                  <a:srgbClr val="1B2A4A"/>
+                </a:solidFill>
+              </a:rPr>
+              <a:t>Biomérieux</a:t>
+            </a:r>
+            <a:r>
+              <a:rPr lang="fr-FR" sz="1000" dirty="0">
+                <a:solidFill>
+                  <a:srgbClr val="1B2A4A"/>
+                </a:solidFill>
+              </a:rPr>
+              <a:t> · Sanofi Pasteur</a:t>
+            </a:r>
+            <a:endParaRPr lang="fr-FR" sz="1000" dirty="0"/>
+          </a:p>
+          <a:p>
+            <a:pPr marL="0" indent="0">
+              <a:buNone/>
+            </a:pPr>
+            <a:r>
+              <a:rPr lang="fr-FR" sz="1000" dirty="0">
+                <a:solidFill>
+                  <a:srgbClr val="64748B"/>
+                </a:solidFill>
+              </a:rPr>
+              <a:t>Boiron · </a:t>
+            </a:r>
+            <a:r>
+              <a:rPr lang="fr-FR" sz="1000" dirty="0" err="1">
+                <a:solidFill>
+                  <a:srgbClr val="64748B"/>
+                </a:solidFill>
+              </a:rPr>
+              <a:t>Nexomis</a:t>
+            </a:r>
+            <a:r>
+              <a:rPr lang="fr-FR" sz="1000" dirty="0">
+                <a:solidFill>
+                  <a:srgbClr val="64748B"/>
+                </a:solidFill>
+              </a:rPr>
+              <a:t> · </a:t>
+            </a:r>
+            <a:r>
+              <a:rPr lang="fr-FR" sz="1000" dirty="0" err="1">
+                <a:solidFill>
+                  <a:srgbClr val="64748B"/>
+                </a:solidFill>
+              </a:rPr>
+              <a:t>Owkin</a:t>
+            </a:r>
+            <a:endParaRPr lang="fr-FR" sz="1000" dirty="0"/>
+          </a:p>
+        </p:txBody>
+      </p:sp>
+      <p:sp>
+        <p:nvSpPr>
+          <p:cNvPr id="130" name="Shape 0">
+            <a:extLst>
+              <a:ext uri="{FF2B5EF4-FFF2-40B4-BE49-F238E27FC236}">
+                <a16:creationId xmlns:a16="http://schemas.microsoft.com/office/drawing/2014/main" id="{219BC6F8-4274-BBC2-CE8D-5A2CABB890C7}"/>
+              </a:ext>
+            </a:extLst>
+          </p:cNvPr>
+          <p:cNvSpPr/>
+          <p:nvPr/>
+        </p:nvSpPr>
+        <p:spPr>
+          <a:xfrm>
+            <a:off x="0" y="8389"/>
+            <a:ext cx="9144000" cy="601570"/>
+          </a:xfrm>
+          <a:prstGeom prst="rect">
+            <a:avLst/>
+          </a:prstGeom>
+          <a:solidFill>
+            <a:srgbClr val="0D1B2A"/>
+          </a:solidFill>
+          <a:ln/>
+        </p:spPr>
+        <p:txBody>
+          <a:bodyPr/>
+          <a:lstStyle/>
+          <a:p>
+            <a:endParaRPr lang="fr-FR" noProof="0" dirty="0"/>
+          </a:p>
+        </p:txBody>
+      </p:sp>
+      <p:sp>
+        <p:nvSpPr>
+          <p:cNvPr id="131" name="Text 0">
+            <a:extLst>
+              <a:ext uri="{FF2B5EF4-FFF2-40B4-BE49-F238E27FC236}">
+                <a16:creationId xmlns:a16="http://schemas.microsoft.com/office/drawing/2014/main" id="{CB208261-D78B-F764-82D4-8F8FBB8D377E}"/>
+              </a:ext>
+            </a:extLst>
+          </p:cNvPr>
+          <p:cNvSpPr/>
+          <p:nvPr/>
+        </p:nvSpPr>
+        <p:spPr>
+          <a:xfrm>
+            <a:off x="320040" y="92964"/>
+            <a:ext cx="8503920" cy="457200"/>
+          </a:xfrm>
+          <a:prstGeom prst="rect">
+            <a:avLst/>
+          </a:prstGeom>
+          <a:noFill/>
+          <a:ln/>
+        </p:spPr>
+        <p:txBody>
+          <a:bodyPr wrap="square" lIns="0" tIns="0" rIns="0" bIns="0" rtlCol="0" anchor="ctr"/>
+          <a:lstStyle/>
+          <a:p>
+            <a:r>
+              <a:rPr lang="fr-FR" sz="2000" b="1" noProof="0" dirty="0">
+                <a:solidFill>
+                  <a:schemeClr val="bg1"/>
+                </a:solidFill>
+              </a:rPr>
+              <a:t>08 </a:t>
+            </a:r>
+            <a:r>
+              <a:rPr lang="fr-FR" sz="2000" dirty="0">
+                <a:solidFill>
+                  <a:schemeClr val="bg1"/>
+                </a:solidFill>
+              </a:rPr>
+              <a:t>— </a:t>
+            </a:r>
+            <a:r>
+              <a:rPr lang="fr-FR" sz="2000" b="1" dirty="0">
+                <a:solidFill>
+                  <a:schemeClr val="bg1"/>
+                </a:solidFill>
+              </a:rPr>
+              <a:t>Analyse du marché : Data Engineer &amp; AI Engineer</a:t>
+            </a:r>
+          </a:p>
+        </p:txBody>
+      </p:sp>
+      <p:sp>
+        <p:nvSpPr>
+          <p:cNvPr id="133" name="ZoneTexte 132">
+            <a:extLst>
+              <a:ext uri="{FF2B5EF4-FFF2-40B4-BE49-F238E27FC236}">
+                <a16:creationId xmlns:a16="http://schemas.microsoft.com/office/drawing/2014/main" id="{DB41F3E1-A79B-FF98-1D07-C8992B45C448}"/>
+              </a:ext>
+            </a:extLst>
+          </p:cNvPr>
+          <p:cNvSpPr txBox="1"/>
+          <p:nvPr/>
+        </p:nvSpPr>
+        <p:spPr>
+          <a:xfrm>
+            <a:off x="114491" y="4946904"/>
+            <a:ext cx="4576762" cy="246221"/>
+          </a:xfrm>
+          <a:prstGeom prst="rect">
+            <a:avLst/>
+          </a:prstGeom>
+          <a:noFill/>
+        </p:spPr>
+        <p:txBody>
+          <a:bodyPr wrap="square">
+            <a:spAutoFit/>
+          </a:bodyPr>
+          <a:lstStyle/>
+          <a:p>
+            <a:r>
+              <a:rPr lang="fr-FR" sz="1000" b="1" i="1" dirty="0"/>
+              <a:t>(France-2026-source=TPC)</a:t>
+            </a:r>
+            <a:endParaRPr lang="fr-FR" sz="1000" i="1" dirty="0"/>
+          </a:p>
+        </p:txBody>
+      </p:sp>
     </p:spTree>
     <p:extLst>
       <p:ext uri="{BB962C8B-B14F-4D97-AF65-F5344CB8AC3E}">
@@ -2136,6 +7433,36 @@
           <a:chExt cx="0" cy="0"/>
         </a:xfrm>
       </p:grpSpPr>
+    </p:spTree>
+    <p:extLst>
+      <p:ext uri="{BB962C8B-B14F-4D97-AF65-F5344CB8AC3E}">
+        <p14:creationId xmlns:p14="http://schemas.microsoft.com/office/powerpoint/2010/main" val="3769505603"/>
+      </p:ext>
+    </p:extLst>
+  </p:cSld>
+  <p:clrMapOvr>
+    <a:masterClrMapping/>
+  </p:clrMapOvr>
+</p:sld>
+</file>
+
+<file path=ppt/slides/slide12.xml><?xml version="1.0" encoding="utf-8"?>
+<p:sld xmlns:a="http://schemas.openxmlformats.org/drawingml/2006/main" xmlns:r="http://schemas.openxmlformats.org/officeDocument/2006/relationships" xmlns:p="http://schemas.openxmlformats.org/presentationml/2006/main">
+  <p:cSld>
+    <p:spTree>
+      <p:nvGrpSpPr>
+        <p:cNvPr id="1" name=""/>
+        <p:cNvGrpSpPr/>
+        <p:nvPr/>
+      </p:nvGrpSpPr>
+      <p:grpSpPr>
+        <a:xfrm>
+          <a:off x="0" y="0"/>
+          <a:ext cx="0" cy="0"/>
+          <a:chOff x="0" y="0"/>
+          <a:chExt cx="0" cy="0"/>
+        </a:xfrm>
+      </p:grpSpPr>
       <p:sp>
         <p:nvSpPr>
           <p:cNvPr id="2" name="Shape 0"/>
@@ -3985,7 +9312,7 @@
 </p:sld>
 </file>
 
-<file path=ppt/slides/slide12.xml><?xml version="1.0" encoding="utf-8"?>
+<file path=ppt/slides/slide13.xml><?xml version="1.0" encoding="utf-8"?>
 <p:sld xmlns:a="http://schemas.openxmlformats.org/drawingml/2006/main" xmlns:r="http://schemas.openxmlformats.org/officeDocument/2006/relationships" xmlns:p="http://schemas.openxmlformats.org/presentationml/2006/main">
   <p:cSld>
     <p:spTree>
@@ -8014,15 +13341,8 @@
                   <a:schemeClr val="bg1"/>
                 </a:solidFill>
               </a:rPr>
-              <a:t>Les contraintes &amp; réalités du métier</a:t>
-            </a:r>
-          </a:p>
-          <a:p>
-            <a:pPr algn="ctr">
-              <a:lnSpc>
-                <a:spcPct val="130000"/>
-              </a:lnSpc>
-            </a:pPr>
+              <a:t>Compétences clés pour l’ingénierie des données scientifiques</a:t>
+            </a:r>
             <a:endParaRPr lang="fr-FR" sz="1050" b="1" noProof="0" dirty="0"/>
           </a:p>
         </p:txBody>
@@ -8397,19 +13717,18 @@
             </a:lvl9pPr>
           </a:lstStyle>
           <a:p>
-            <a:pPr marL="0" indent="0" algn="ctr">
+            <a:pPr algn="ctr">
               <a:lnSpc>
                 <a:spcPct val="130000"/>
               </a:lnSpc>
-              <a:buNone/>
             </a:pPr>
             <a:r>
-              <a:rPr lang="fr-FR" sz="1050" b="1" noProof="0" dirty="0">
-                <a:solidFill>
-                  <a:srgbClr val="FFFFFF"/>
-                </a:solidFill>
-              </a:rPr>
-              <a:t>Conclusion</a:t>
+              <a:rPr lang="fr-FR" sz="1050" b="1" dirty="0">
+                <a:solidFill>
+                  <a:schemeClr val="bg1"/>
+                </a:solidFill>
+              </a:rPr>
+              <a:t>Analyse du marché</a:t>
             </a:r>
             <a:endParaRPr lang="fr-FR" sz="1050" b="1" noProof="0" dirty="0"/>
           </a:p>
@@ -14733,7 +20052,7 @@
                   <a:srgbClr val="1B2A3E"/>
                 </a:solidFill>
               </a:rPr>
-              <a:t>Introduction à la bio-informatique structurale et prédictive (AlphaFold), dynamique moléculaire. Confirmation de la voie informatique.</a:t>
+              <a:t>Introduction à la bio-informatique structurale et prédictive (AlphaFold) et dynamique moléculaire. Confirmation de la voie informatique.</a:t>
             </a:r>
             <a:endParaRPr lang="en-US" sz="1000" dirty="0"/>
           </a:p>
@@ -16961,11 +22280,23 @@
                   <a:srgbClr val="1B2A3E"/>
                 </a:solidFill>
               </a:rPr>
-              <a:t>Data Engineering de </a:t>
+              <a:t>Data Engineer / </a:t>
             </a:r>
             <a:r>
               <a:rPr lang="fr-FR" sz="1400" b="1" dirty="0"/>
-              <a:t>plateformes scientifiques et outils IA pour les données biologiques</a:t>
+              <a:t>AI Engineer </a:t>
+            </a:r>
+            <a:r>
+              <a:rPr lang="fr-FR" sz="1400" b="1" dirty="0">
+                <a:solidFill>
+                  <a:srgbClr val="1B2A3E"/>
+                </a:solidFill>
+              </a:rPr>
+              <a:t>orienté sur les données</a:t>
+            </a:r>
+            <a:r>
+              <a:rPr lang="fr-FR" sz="1400" b="1" dirty="0"/>
+              <a:t> scientifiques</a:t>
             </a:r>
           </a:p>
         </p:txBody>
@@ -16984,8 +22315,8 @@
         </p:nvSpPr>
         <p:spPr>
           <a:xfrm>
-            <a:off x="613628" y="1358496"/>
-            <a:ext cx="6858000" cy="621792"/>
+            <a:off x="613627" y="1379277"/>
+            <a:ext cx="7130627" cy="621792"/>
           </a:xfrm>
           <a:prstGeom prst="rect">
             <a:avLst/>
@@ -17045,7 +22376,6 @@
               </a:rPr>
               <a:t>Généraliser la plateforme à d'autres unités INSERM — pipeline assisté IA d'import + base de données autours de la souche</a:t>
             </a:r>
-            <a:endParaRPr lang="fr-FR" sz="900" dirty="0"/>
           </a:p>
           <a:p>
             <a:pPr marL="342900" indent="-342900">
@@ -17053,7 +22383,6 @@
                 <a:spcPts val="300"/>
               </a:spcAft>
               <a:buSzPct val="100000"/>
-              <a:buFontTx/>
               <a:buChar char="•"/>
             </a:pPr>
             <a:r>
@@ -17062,7 +22391,7 @@
                   <a:srgbClr val="5A6A7A"/>
                 </a:solidFill>
               </a:rPr>
-              <a:t>Concevoir des pipelines, bases de données et outils scientifiques pour l’exploitation des données de laboratoire</a:t>
+              <a:t>Concevoir des pipelines ETL, bases de données et outils scientifiques, en combinant ingénierie des données, architecture logicielle et IA appliquée</a:t>
             </a:r>
           </a:p>
         </p:txBody>
@@ -18040,7 +23369,7 @@
         <p:spPr>
           <a:xfrm>
             <a:off x="6346664" y="1155188"/>
-            <a:ext cx="2663536" cy="292388"/>
+            <a:ext cx="2797336" cy="292388"/>
           </a:xfrm>
           <a:prstGeom prst="rect">
             <a:avLst/>
@@ -18387,8 +23716,8 @@
         </p:nvSpPr>
         <p:spPr>
           <a:xfrm>
-            <a:off x="961576" y="3758921"/>
-            <a:ext cx="2000250" cy="321468"/>
+            <a:off x="381000" y="3758921"/>
+            <a:ext cx="2580826" cy="292388"/>
           </a:xfrm>
           <a:prstGeom prst="rect">
             <a:avLst/>
@@ -18403,13 +23732,13 @@
           <a:p>
             <a:pPr algn="r"/>
             <a:r>
-              <a:rPr lang="fr-FR" sz="1300" b="1" noProof="0" dirty="0">
+              <a:rPr lang="fr-FR" sz="1300" b="1" dirty="0">
                 <a:solidFill>
                   <a:srgbClr val="10B981"/>
                 </a:solidFill>
                 <a:latin typeface="Calibri"/>
               </a:rPr>
-              <a:t>Apprentissage autonome</a:t>
+              <a:t>Montée en compétence technique</a:t>
             </a:r>
           </a:p>
         </p:txBody>
@@ -18428,8 +23757,8 @@
         </p:nvSpPr>
         <p:spPr>
           <a:xfrm>
-            <a:off x="961576" y="4094677"/>
-            <a:ext cx="2000250" cy="507831"/>
+            <a:off x="876283" y="4040618"/>
+            <a:ext cx="1684642" cy="646331"/>
           </a:xfrm>
           <a:prstGeom prst="rect">
             <a:avLst/>
@@ -18447,74 +23776,68 @@
               <a:buChar char="q"/>
             </a:pPr>
             <a:r>
-              <a:rPr lang="fr-FR" sz="900" b="0" noProof="0" dirty="0" err="1">
-                <a:latin typeface="Calibri"/>
-              </a:rPr>
+              <a:rPr lang="fr-FR" sz="900" dirty="0"/>
+              <a:t>Backend &amp; données :</a:t>
+            </a:r>
+          </a:p>
+          <a:p>
+            <a:pPr algn="just"/>
+            <a:r>
+              <a:rPr lang="fr-FR" sz="900" dirty="0" err="1"/>
               <a:t>FastAPI</a:t>
             </a:r>
             <a:r>
-              <a:rPr lang="fr-FR" sz="900" b="0" noProof="0" dirty="0">
-                <a:latin typeface="Calibri"/>
-              </a:rPr>
+              <a:rPr lang="fr-FR" sz="900" dirty="0"/>
               <a:t>, </a:t>
             </a:r>
             <a:r>
-              <a:rPr lang="fr-FR" sz="900" b="0" noProof="0" dirty="0" err="1">
-                <a:latin typeface="Calibri"/>
-              </a:rPr>
+              <a:rPr lang="fr-FR" sz="900" dirty="0" err="1"/>
+              <a:t>SQLModel</a:t>
+            </a:r>
+            <a:r>
+              <a:rPr lang="fr-FR" sz="900" dirty="0"/>
+              <a:t>, </a:t>
+            </a:r>
+            <a:r>
+              <a:rPr lang="fr-FR" sz="900" dirty="0" err="1"/>
+              <a:t>Alembic</a:t>
+            </a:r>
+            <a:endParaRPr lang="fr-FR" sz="900" dirty="0"/>
+          </a:p>
+          <a:p>
+            <a:pPr marL="171450" indent="-171450" algn="just">
+              <a:buFont typeface="Wingdings" panose="05000000000000000000" pitchFamily="2" charset="2"/>
+              <a:buChar char="q"/>
+            </a:pPr>
+            <a:r>
+              <a:rPr lang="fr-FR" sz="900" dirty="0"/>
+              <a:t>IA appliquée : </a:t>
+            </a:r>
+          </a:p>
+          <a:p>
+            <a:pPr algn="just"/>
+            <a:r>
+              <a:rPr lang="fr-FR" sz="900" dirty="0" err="1"/>
               <a:t>LangChain</a:t>
             </a:r>
             <a:r>
-              <a:rPr lang="fr-FR" sz="900" b="0" noProof="0" dirty="0">
-                <a:latin typeface="Calibri"/>
-              </a:rPr>
+              <a:rPr lang="fr-FR" sz="900" dirty="0"/>
               <a:t>, </a:t>
             </a:r>
             <a:r>
-              <a:rPr lang="fr-FR" sz="900" b="0" noProof="0" dirty="0" err="1">
-                <a:latin typeface="Calibri"/>
-              </a:rPr>
+              <a:rPr lang="fr-FR" sz="900" dirty="0" err="1"/>
               <a:t>Pydantic</a:t>
             </a:r>
             <a:r>
-              <a:rPr lang="fr-FR" sz="900" b="0" noProof="0" dirty="0">
-                <a:latin typeface="Calibri"/>
-              </a:rPr>
-              <a:t> AI, </a:t>
-            </a:r>
-            <a:r>
-              <a:rPr lang="fr-FR" sz="900" b="0" noProof="0" dirty="0" err="1">
-                <a:latin typeface="Calibri"/>
-              </a:rPr>
-              <a:t>SQLModel</a:t>
-            </a:r>
-            <a:r>
-              <a:rPr lang="fr-FR" sz="900" b="0" noProof="0" dirty="0">
-                <a:latin typeface="Calibri"/>
-              </a:rPr>
-              <a:t>, </a:t>
-            </a:r>
-            <a:r>
-              <a:rPr lang="fr-FR" sz="900" b="0" noProof="0" dirty="0" err="1">
-                <a:latin typeface="Calibri"/>
-              </a:rPr>
-              <a:t>Alembic</a:t>
-            </a:r>
-            <a:r>
-              <a:rPr lang="fr-FR" sz="900" b="0" noProof="0" dirty="0">
-                <a:latin typeface="Calibri"/>
-              </a:rPr>
-              <a:t> — appris en autonomie sur projet réel</a:t>
-            </a:r>
-            <a:r>
-              <a:rPr lang="fr-FR" sz="900" b="0" noProof="0" dirty="0">
-                <a:solidFill>
-                  <a:srgbClr val="94A3B8"/>
-                </a:solidFill>
-                <a:latin typeface="Calibri"/>
-              </a:rPr>
-              <a:t>.</a:t>
-            </a:r>
+              <a:rPr lang="fr-FR" sz="900" dirty="0"/>
+              <a:t> AI</a:t>
+            </a:r>
+            <a:endParaRPr lang="fr-FR" sz="900" b="0" noProof="0" dirty="0">
+              <a:solidFill>
+                <a:srgbClr val="94A3B8"/>
+              </a:solidFill>
+              <a:latin typeface="Calibri"/>
+            </a:endParaRPr>
           </a:p>
         </p:txBody>
       </p:sp>
@@ -18562,7 +23885,7 @@
         </p:nvSpPr>
         <p:spPr>
           <a:xfrm>
-            <a:off x="6346665" y="3797789"/>
+            <a:off x="6346664" y="3719150"/>
             <a:ext cx="2000250" cy="321468"/>
           </a:xfrm>
           <a:prstGeom prst="rect">
@@ -18603,7 +23926,7 @@
         </p:nvSpPr>
         <p:spPr>
           <a:xfrm>
-            <a:off x="6346665" y="4133545"/>
+            <a:off x="6346665" y="4026105"/>
             <a:ext cx="1835759" cy="507831"/>
           </a:xfrm>
           <a:prstGeom prst="rect">
@@ -18704,7 +24027,7 @@
                   <a:schemeClr val="bg1"/>
                 </a:solidFill>
               </a:rPr>
-              <a:t>Compétences clés pour les données scientifiques</a:t>
+              <a:t>Compétences clés pour l’ingénierie des données scientifiques</a:t>
             </a:r>
           </a:p>
         </p:txBody>
@@ -20383,8 +25706,8 @@
         </p:nvSpPr>
         <p:spPr>
           <a:xfrm>
-            <a:off x="4882895" y="3774519"/>
-            <a:ext cx="1719072" cy="960120"/>
+            <a:off x="4882895" y="3788373"/>
+            <a:ext cx="1801368" cy="615553"/>
           </a:xfrm>
           <a:prstGeom prst="rect">
             <a:avLst/>
